--- a/Week_1_variables_operators_and_algorithms/Seminar_algorithms/seminar1_algorithms.pptx
+++ b/Week_1_variables_operators_and_algorithms/Seminar_algorithms/seminar1_algorithms.pptx
@@ -5,21 +5,21 @@
     <p:sldMasterId id="2147483648" r:id="rId1"/>
   </p:sldMasterIdLst>
   <p:notesMasterIdLst>
-    <p:notesMasterId r:id="rId42"/>
+    <p:notesMasterId r:id="rId44"/>
   </p:notesMasterIdLst>
   <p:sldIdLst>
     <p:sldId id="256" r:id="rId2"/>
     <p:sldId id="257" r:id="rId3"/>
-    <p:sldId id="258" r:id="rId4"/>
-    <p:sldId id="259" r:id="rId5"/>
-    <p:sldId id="261" r:id="rId6"/>
-    <p:sldId id="262" r:id="rId7"/>
-    <p:sldId id="263" r:id="rId8"/>
-    <p:sldId id="267" r:id="rId9"/>
-    <p:sldId id="299" r:id="rId10"/>
-    <p:sldId id="298" r:id="rId11"/>
-    <p:sldId id="300" r:id="rId12"/>
-    <p:sldId id="301" r:id="rId13"/>
+    <p:sldId id="259" r:id="rId4"/>
+    <p:sldId id="261" r:id="rId5"/>
+    <p:sldId id="262" r:id="rId6"/>
+    <p:sldId id="263" r:id="rId7"/>
+    <p:sldId id="267" r:id="rId8"/>
+    <p:sldId id="299" r:id="rId9"/>
+    <p:sldId id="298" r:id="rId10"/>
+    <p:sldId id="300" r:id="rId11"/>
+    <p:sldId id="301" r:id="rId12"/>
+    <p:sldId id="306" r:id="rId13"/>
     <p:sldId id="265" r:id="rId14"/>
     <p:sldId id="268" r:id="rId15"/>
     <p:sldId id="269" r:id="rId16"/>
@@ -40,14 +40,16 @@
     <p:sldId id="284" r:id="rId31"/>
     <p:sldId id="285" r:id="rId32"/>
     <p:sldId id="286" r:id="rId33"/>
-    <p:sldId id="287" r:id="rId34"/>
-    <p:sldId id="292" r:id="rId35"/>
-    <p:sldId id="293" r:id="rId36"/>
-    <p:sldId id="295" r:id="rId37"/>
-    <p:sldId id="294" r:id="rId38"/>
-    <p:sldId id="296" r:id="rId39"/>
-    <p:sldId id="297" r:id="rId40"/>
-    <p:sldId id="302" r:id="rId41"/>
+    <p:sldId id="305" r:id="rId34"/>
+    <p:sldId id="307" r:id="rId35"/>
+    <p:sldId id="287" r:id="rId36"/>
+    <p:sldId id="292" r:id="rId37"/>
+    <p:sldId id="293" r:id="rId38"/>
+    <p:sldId id="295" r:id="rId39"/>
+    <p:sldId id="294" r:id="rId40"/>
+    <p:sldId id="296" r:id="rId41"/>
+    <p:sldId id="297" r:id="rId42"/>
+    <p:sldId id="302" r:id="rId43"/>
   </p:sldIdLst>
   <p:sldSz cx="12192000" cy="6858000"/>
   <p:notesSz cx="6858000" cy="9144000"/>
@@ -154,54 +156,38 @@
 </p:presentation>
 </file>
 
-<file path=ppt/revisionInfo.xml><?xml version="1.0" encoding="utf-8"?>
-<p1510:revInfo xmlns:a="http://schemas.openxmlformats.org/drawingml/2006/main" xmlns:r="http://schemas.openxmlformats.org/officeDocument/2006/relationships" xmlns:p1510="http://schemas.microsoft.com/office/powerpoint/2015/10/main">
-  <p1510:revLst>
-    <p1510:client id="{4998859B-0823-174A-87D2-6A898A8C2869}" v="59" dt="2025-09-24T12:28:11.634"/>
-  </p1510:revLst>
-</p1510:revInfo>
-</file>
-
 <file path=ppt/changesInfos/changesInfo1.xml><?xml version="1.0" encoding="utf-8"?>
 <pc:chgInfo xmlns:a="http://schemas.openxmlformats.org/drawingml/2006/main" xmlns:r="http://schemas.openxmlformats.org/officeDocument/2006/relationships" xmlns:ac="http://schemas.microsoft.com/office/drawing/2013/main/command" xmlns:pc="http://schemas.microsoft.com/office/powerpoint/2013/main/command">
   <pc:docChgLst>
-    <pc:chgData name="Martin Garrad" userId="29fa8137-b5d4-4adf-94e3-55aca812c4da" providerId="ADAL" clId="{7F7E35A6-1589-9547-9539-0C50FDBE5FEE}"/>
-    <pc:docChg chg="modSld">
-      <pc:chgData name="Martin Garrad" userId="29fa8137-b5d4-4adf-94e3-55aca812c4da" providerId="ADAL" clId="{7F7E35A6-1589-9547-9539-0C50FDBE5FEE}" dt="2025-08-12T15:39:38.327" v="19" actId="20577"/>
+    <pc:chgData name="Martin Garrad" userId="29fa8137-b5d4-4adf-94e3-55aca812c4da" providerId="ADAL" clId="{FE7E3326-2F4E-5A39-AD8A-48BAAAFC5A20}"/>
+    <pc:docChg chg="custSel addSld modSld sldOrd">
+      <pc:chgData name="Martin Garrad" userId="29fa8137-b5d4-4adf-94e3-55aca812c4da" providerId="ADAL" clId="{FE7E3326-2F4E-5A39-AD8A-48BAAAFC5A20}" dt="2026-09-17T15:26:09.726" v="353"/>
       <pc:docMkLst>
         <pc:docMk/>
       </pc:docMkLst>
       <pc:sldChg chg="modSp mod">
-        <pc:chgData name="Martin Garrad" userId="29fa8137-b5d4-4adf-94e3-55aca812c4da" providerId="ADAL" clId="{7F7E35A6-1589-9547-9539-0C50FDBE5FEE}" dt="2025-08-11T13:05:20.700" v="15" actId="20577"/>
+        <pc:chgData name="Martin Garrad" userId="29fa8137-b5d4-4adf-94e3-55aca812c4da" providerId="ADAL" clId="{FE7E3326-2F4E-5A39-AD8A-48BAAAFC5A20}" dt="2026-09-17T14:08:07.035" v="175" actId="20577"/>
         <pc:sldMkLst>
           <pc:docMk/>
-          <pc:sldMk cId="4188381686" sldId="287"/>
+          <pc:sldMk cId="1773176039" sldId="256"/>
         </pc:sldMkLst>
+        <pc:spChg chg="mod">
+          <ac:chgData name="Martin Garrad" userId="29fa8137-b5d4-4adf-94e3-55aca812c4da" providerId="ADAL" clId="{FE7E3326-2F4E-5A39-AD8A-48BAAAFC5A20}" dt="2026-09-17T14:08:07.035" v="175" actId="20577"/>
+          <ac:spMkLst>
+            <pc:docMk/>
+            <pc:sldMk cId="1773176039" sldId="256"/>
+            <ac:spMk id="3" creationId="{9D162F11-11E1-8A8D-9682-8DEB6F1BB879}"/>
+          </ac:spMkLst>
+        </pc:spChg>
       </pc:sldChg>
       <pc:sldChg chg="modSp mod">
-        <pc:chgData name="Martin Garrad" userId="29fa8137-b5d4-4adf-94e3-55aca812c4da" providerId="ADAL" clId="{7F7E35A6-1589-9547-9539-0C50FDBE5FEE}" dt="2025-08-12T15:39:38.327" v="19" actId="20577"/>
-        <pc:sldMkLst>
-          <pc:docMk/>
-          <pc:sldMk cId="3809527063" sldId="297"/>
-        </pc:sldMkLst>
-      </pc:sldChg>
-    </pc:docChg>
-  </pc:docChgLst>
-  <pc:docChgLst>
-    <pc:chgData name="Martin Garrad" userId="29fa8137-b5d4-4adf-94e3-55aca812c4da" providerId="ADAL" clId="{FE7E3326-2F4E-5A39-AD8A-48BAAAFC5A20}"/>
-    <pc:docChg chg="undo custSel addSld delSld modSld">
-      <pc:chgData name="Martin Garrad" userId="29fa8137-b5d4-4adf-94e3-55aca812c4da" providerId="ADAL" clId="{FE7E3326-2F4E-5A39-AD8A-48BAAAFC5A20}" dt="2025-09-24T12:35:47.826" v="1423" actId="20577"/>
-      <pc:docMkLst>
-        <pc:docMk/>
-      </pc:docMkLst>
-      <pc:sldChg chg="modSp mod modNotesTx">
-        <pc:chgData name="Martin Garrad" userId="29fa8137-b5d4-4adf-94e3-55aca812c4da" providerId="ADAL" clId="{FE7E3326-2F4E-5A39-AD8A-48BAAAFC5A20}" dt="2025-09-24T12:20:13.695" v="1185" actId="20577"/>
+        <pc:chgData name="Martin Garrad" userId="29fa8137-b5d4-4adf-94e3-55aca812c4da" providerId="ADAL" clId="{FE7E3326-2F4E-5A39-AD8A-48BAAAFC5A20}" dt="2026-09-17T15:23:31.793" v="330" actId="20577"/>
         <pc:sldMkLst>
           <pc:docMk/>
           <pc:sldMk cId="2343005188" sldId="257"/>
         </pc:sldMkLst>
         <pc:spChg chg="mod">
-          <ac:chgData name="Martin Garrad" userId="29fa8137-b5d4-4adf-94e3-55aca812c4da" providerId="ADAL" clId="{FE7E3326-2F4E-5A39-AD8A-48BAAAFC5A20}" dt="2025-09-24T12:20:05.345" v="1175" actId="14100"/>
+          <ac:chgData name="Martin Garrad" userId="29fa8137-b5d4-4adf-94e3-55aca812c4da" providerId="ADAL" clId="{FE7E3326-2F4E-5A39-AD8A-48BAAAFC5A20}" dt="2026-09-17T15:23:31.793" v="330" actId="20577"/>
           <ac:spMkLst>
             <pc:docMk/>
             <pc:sldMk cId="2343005188" sldId="257"/>
@@ -210,139 +196,13 @@
         </pc:spChg>
       </pc:sldChg>
       <pc:sldChg chg="modSp mod">
-        <pc:chgData name="Martin Garrad" userId="29fa8137-b5d4-4adf-94e3-55aca812c4da" providerId="ADAL" clId="{FE7E3326-2F4E-5A39-AD8A-48BAAAFC5A20}" dt="2025-09-24T11:05:50.115" v="19" actId="1076"/>
-        <pc:sldMkLst>
-          <pc:docMk/>
-          <pc:sldMk cId="1672918485" sldId="261"/>
-        </pc:sldMkLst>
-        <pc:spChg chg="mod">
-          <ac:chgData name="Martin Garrad" userId="29fa8137-b5d4-4adf-94e3-55aca812c4da" providerId="ADAL" clId="{FE7E3326-2F4E-5A39-AD8A-48BAAAFC5A20}" dt="2025-09-24T11:05:17.666" v="9" actId="20577"/>
-          <ac:spMkLst>
-            <pc:docMk/>
-            <pc:sldMk cId="1672918485" sldId="261"/>
-            <ac:spMk id="3" creationId="{273284C4-8633-A94B-7B32-754C491ED548}"/>
-          </ac:spMkLst>
-        </pc:spChg>
-        <pc:grpChg chg="mod">
-          <ac:chgData name="Martin Garrad" userId="29fa8137-b5d4-4adf-94e3-55aca812c4da" providerId="ADAL" clId="{FE7E3326-2F4E-5A39-AD8A-48BAAAFC5A20}" dt="2025-09-24T11:05:50.115" v="19" actId="1076"/>
-          <ac:grpSpMkLst>
-            <pc:docMk/>
-            <pc:sldMk cId="1672918485" sldId="261"/>
-            <ac:grpSpMk id="9" creationId="{375A48C2-D42F-E9CE-73C8-A1E6336B9AE7}"/>
-          </ac:grpSpMkLst>
-        </pc:grpChg>
-        <pc:picChg chg="mod">
-          <ac:chgData name="Martin Garrad" userId="29fa8137-b5d4-4adf-94e3-55aca812c4da" providerId="ADAL" clId="{FE7E3326-2F4E-5A39-AD8A-48BAAAFC5A20}" dt="2025-09-24T11:05:50.115" v="19" actId="1076"/>
-          <ac:picMkLst>
-            <pc:docMk/>
-            <pc:sldMk cId="1672918485" sldId="261"/>
-            <ac:picMk id="6" creationId="{84E45741-F93F-1F93-736A-5A2FD4BECB5C}"/>
-          </ac:picMkLst>
-        </pc:picChg>
-        <pc:picChg chg="mod">
-          <ac:chgData name="Martin Garrad" userId="29fa8137-b5d4-4adf-94e3-55aca812c4da" providerId="ADAL" clId="{FE7E3326-2F4E-5A39-AD8A-48BAAAFC5A20}" dt="2025-09-24T11:05:50.115" v="19" actId="1076"/>
-          <ac:picMkLst>
-            <pc:docMk/>
-            <pc:sldMk cId="1672918485" sldId="261"/>
-            <ac:picMk id="8" creationId="{5B8A5E4C-7BED-718B-82AF-349E584E493D}"/>
-          </ac:picMkLst>
-        </pc:picChg>
-        <pc:picChg chg="mod">
-          <ac:chgData name="Martin Garrad" userId="29fa8137-b5d4-4adf-94e3-55aca812c4da" providerId="ADAL" clId="{FE7E3326-2F4E-5A39-AD8A-48BAAAFC5A20}" dt="2025-09-24T11:05:50.115" v="19" actId="1076"/>
-          <ac:picMkLst>
-            <pc:docMk/>
-            <pc:sldMk cId="1672918485" sldId="261"/>
-            <ac:picMk id="1026" creationId="{9637D37C-FAD2-5BD8-5ADB-A50D6FCE9CCB}"/>
-          </ac:picMkLst>
-        </pc:picChg>
-      </pc:sldChg>
-      <pc:sldChg chg="addSp delSp modSp add del mod">
-        <pc:chgData name="Martin Garrad" userId="29fa8137-b5d4-4adf-94e3-55aca812c4da" providerId="ADAL" clId="{FE7E3326-2F4E-5A39-AD8A-48BAAAFC5A20}" dt="2025-09-24T12:00:40.409" v="904" actId="6549"/>
-        <pc:sldMkLst>
-          <pc:docMk/>
-          <pc:sldMk cId="2580241657" sldId="262"/>
-        </pc:sldMkLst>
-        <pc:spChg chg="mod">
-          <ac:chgData name="Martin Garrad" userId="29fa8137-b5d4-4adf-94e3-55aca812c4da" providerId="ADAL" clId="{FE7E3326-2F4E-5A39-AD8A-48BAAAFC5A20}" dt="2025-09-24T12:00:40.409" v="904" actId="6549"/>
-          <ac:spMkLst>
-            <pc:docMk/>
-            <pc:sldMk cId="2580241657" sldId="262"/>
-            <ac:spMk id="3" creationId="{41BDC60F-2315-E18A-9F12-91AC58DF9BBB}"/>
-          </ac:spMkLst>
-        </pc:spChg>
-        <pc:grpChg chg="add mod">
-          <ac:chgData name="Martin Garrad" userId="29fa8137-b5d4-4adf-94e3-55aca812c4da" providerId="ADAL" clId="{FE7E3326-2F4E-5A39-AD8A-48BAAAFC5A20}" dt="2025-09-24T11:06:11.751" v="21"/>
-          <ac:grpSpMkLst>
-            <pc:docMk/>
-            <pc:sldMk cId="2580241657" sldId="262"/>
-            <ac:grpSpMk id="4" creationId="{BD73E7A1-0A80-4927-8E6A-C0E6021DE2AC}"/>
-          </ac:grpSpMkLst>
-        </pc:grpChg>
-        <pc:grpChg chg="del mod">
-          <ac:chgData name="Martin Garrad" userId="29fa8137-b5d4-4adf-94e3-55aca812c4da" providerId="ADAL" clId="{FE7E3326-2F4E-5A39-AD8A-48BAAAFC5A20}" dt="2025-09-24T11:06:04.924" v="20" actId="478"/>
-          <ac:grpSpMkLst>
-            <pc:docMk/>
-            <pc:sldMk cId="2580241657" sldId="262"/>
-            <ac:grpSpMk id="9" creationId="{34FF7881-03B7-7742-EED1-DE67B87F92B2}"/>
-          </ac:grpSpMkLst>
-        </pc:grpChg>
-        <pc:picChg chg="mod">
-          <ac:chgData name="Martin Garrad" userId="29fa8137-b5d4-4adf-94e3-55aca812c4da" providerId="ADAL" clId="{FE7E3326-2F4E-5A39-AD8A-48BAAAFC5A20}" dt="2025-09-24T11:06:11.751" v="21"/>
-          <ac:picMkLst>
-            <pc:docMk/>
-            <pc:sldMk cId="2580241657" sldId="262"/>
-            <ac:picMk id="5" creationId="{C8AEC52C-4ED3-767E-ECF2-71977915496E}"/>
-          </ac:picMkLst>
-        </pc:picChg>
-        <pc:picChg chg="mod">
-          <ac:chgData name="Martin Garrad" userId="29fa8137-b5d4-4adf-94e3-55aca812c4da" providerId="ADAL" clId="{FE7E3326-2F4E-5A39-AD8A-48BAAAFC5A20}" dt="2025-09-24T11:05:43.684" v="18" actId="1076"/>
-          <ac:picMkLst>
-            <pc:docMk/>
-            <pc:sldMk cId="2580241657" sldId="262"/>
-            <ac:picMk id="6" creationId="{993FEF4B-B144-AE43-C03C-07D6DCE5F129}"/>
-          </ac:picMkLst>
-        </pc:picChg>
-        <pc:picChg chg="mod">
-          <ac:chgData name="Martin Garrad" userId="29fa8137-b5d4-4adf-94e3-55aca812c4da" providerId="ADAL" clId="{FE7E3326-2F4E-5A39-AD8A-48BAAAFC5A20}" dt="2025-09-24T11:06:11.751" v="21"/>
-          <ac:picMkLst>
-            <pc:docMk/>
-            <pc:sldMk cId="2580241657" sldId="262"/>
-            <ac:picMk id="7" creationId="{0AF41498-AD21-95B9-5549-B723C81FAE73}"/>
-          </ac:picMkLst>
-        </pc:picChg>
-        <pc:picChg chg="mod">
-          <ac:chgData name="Martin Garrad" userId="29fa8137-b5d4-4adf-94e3-55aca812c4da" providerId="ADAL" clId="{FE7E3326-2F4E-5A39-AD8A-48BAAAFC5A20}" dt="2025-09-24T11:05:43.684" v="18" actId="1076"/>
-          <ac:picMkLst>
-            <pc:docMk/>
-            <pc:sldMk cId="2580241657" sldId="262"/>
-            <ac:picMk id="8" creationId="{180B4508-F0E7-F124-A9AE-6BC9C2D30945}"/>
-          </ac:picMkLst>
-        </pc:picChg>
-        <pc:picChg chg="mod">
-          <ac:chgData name="Martin Garrad" userId="29fa8137-b5d4-4adf-94e3-55aca812c4da" providerId="ADAL" clId="{FE7E3326-2F4E-5A39-AD8A-48BAAAFC5A20}" dt="2025-09-24T11:06:11.751" v="21"/>
-          <ac:picMkLst>
-            <pc:docMk/>
-            <pc:sldMk cId="2580241657" sldId="262"/>
-            <ac:picMk id="10" creationId="{AB8CC5B0-E25A-2029-0131-16F1A3B9263A}"/>
-          </ac:picMkLst>
-        </pc:picChg>
-        <pc:picChg chg="mod">
-          <ac:chgData name="Martin Garrad" userId="29fa8137-b5d4-4adf-94e3-55aca812c4da" providerId="ADAL" clId="{FE7E3326-2F4E-5A39-AD8A-48BAAAFC5A20}" dt="2025-09-24T11:05:43.684" v="18" actId="1076"/>
-          <ac:picMkLst>
-            <pc:docMk/>
-            <pc:sldMk cId="2580241657" sldId="262"/>
-            <ac:picMk id="1026" creationId="{8DFDDC24-9FCC-0539-DDE8-A521238F8BD8}"/>
-          </ac:picMkLst>
-        </pc:picChg>
-      </pc:sldChg>
-      <pc:sldChg chg="modSp mod">
-        <pc:chgData name="Martin Garrad" userId="29fa8137-b5d4-4adf-94e3-55aca812c4da" providerId="ADAL" clId="{FE7E3326-2F4E-5A39-AD8A-48BAAAFC5A20}" dt="2025-09-24T12:13:05.048" v="1064" actId="27636"/>
+        <pc:chgData name="Martin Garrad" userId="29fa8137-b5d4-4adf-94e3-55aca812c4da" providerId="ADAL" clId="{FE7E3326-2F4E-5A39-AD8A-48BAAAFC5A20}" dt="2026-09-17T14:12:43.116" v="222" actId="20577"/>
         <pc:sldMkLst>
           <pc:docMk/>
           <pc:sldMk cId="2547702290" sldId="263"/>
         </pc:sldMkLst>
         <pc:spChg chg="mod">
-          <ac:chgData name="Martin Garrad" userId="29fa8137-b5d4-4adf-94e3-55aca812c4da" providerId="ADAL" clId="{FE7E3326-2F4E-5A39-AD8A-48BAAAFC5A20}" dt="2025-09-24T12:13:05.048" v="1064" actId="27636"/>
+          <ac:chgData name="Martin Garrad" userId="29fa8137-b5d4-4adf-94e3-55aca812c4da" providerId="ADAL" clId="{FE7E3326-2F4E-5A39-AD8A-48BAAAFC5A20}" dt="2026-09-17T14:12:43.116" v="222" actId="20577"/>
           <ac:spMkLst>
             <pc:docMk/>
             <pc:sldMk cId="2547702290" sldId="263"/>
@@ -350,887 +210,293 @@
           </ac:spMkLst>
         </pc:spChg>
       </pc:sldChg>
-      <pc:sldChg chg="del">
-        <pc:chgData name="Martin Garrad" userId="29fa8137-b5d4-4adf-94e3-55aca812c4da" providerId="ADAL" clId="{FE7E3326-2F4E-5A39-AD8A-48BAAAFC5A20}" dt="2025-09-24T12:08:21.063" v="905" actId="2696"/>
+      <pc:sldChg chg="modSp mod">
+        <pc:chgData name="Martin Garrad" userId="29fa8137-b5d4-4adf-94e3-55aca812c4da" providerId="ADAL" clId="{FE7E3326-2F4E-5A39-AD8A-48BAAAFC5A20}" dt="2026-09-17T14:42:40.940" v="292" actId="20577"/>
         <pc:sldMkLst>
           <pc:docMk/>
-          <pc:sldMk cId="3117596316" sldId="264"/>
-        </pc:sldMkLst>
-      </pc:sldChg>
-      <pc:sldChg chg="modSp mod modNotesTx">
-        <pc:chgData name="Martin Garrad" userId="29fa8137-b5d4-4adf-94e3-55aca812c4da" providerId="ADAL" clId="{FE7E3326-2F4E-5A39-AD8A-48BAAAFC5A20}" dt="2025-09-24T12:28:39.827" v="1415" actId="20577"/>
-        <pc:sldMkLst>
-          <pc:docMk/>
-          <pc:sldMk cId="2832435519" sldId="265"/>
+          <pc:sldMk cId="878202596" sldId="272"/>
         </pc:sldMkLst>
         <pc:spChg chg="mod">
-          <ac:chgData name="Martin Garrad" userId="29fa8137-b5d4-4adf-94e3-55aca812c4da" providerId="ADAL" clId="{FE7E3326-2F4E-5A39-AD8A-48BAAAFC5A20}" dt="2025-09-24T12:17:54.083" v="1065"/>
+          <ac:chgData name="Martin Garrad" userId="29fa8137-b5d4-4adf-94e3-55aca812c4da" providerId="ADAL" clId="{FE7E3326-2F4E-5A39-AD8A-48BAAAFC5A20}" dt="2026-09-17T14:42:40.940" v="292" actId="20577"/>
           <ac:spMkLst>
             <pc:docMk/>
-            <pc:sldMk cId="2832435519" sldId="265"/>
-            <ac:spMk id="3" creationId="{300B7128-9998-0676-8CCA-F61932CA2DFA}"/>
+            <pc:sldMk cId="878202596" sldId="272"/>
+            <ac:spMk id="12" creationId="{E7E983B8-43D1-E770-C478-E4C99300AB4C}"/>
           </ac:spMkLst>
         </pc:spChg>
       </pc:sldChg>
-      <pc:sldChg chg="del">
-        <pc:chgData name="Martin Garrad" userId="29fa8137-b5d4-4adf-94e3-55aca812c4da" providerId="ADAL" clId="{FE7E3326-2F4E-5A39-AD8A-48BAAAFC5A20}" dt="2025-09-24T12:08:22.344" v="906" actId="2696"/>
+      <pc:sldChg chg="modSp mod">
+        <pc:chgData name="Martin Garrad" userId="29fa8137-b5d4-4adf-94e3-55aca812c4da" providerId="ADAL" clId="{FE7E3326-2F4E-5A39-AD8A-48BAAAFC5A20}" dt="2026-09-17T14:42:52.773" v="298" actId="20577"/>
         <pc:sldMkLst>
           <pc:docMk/>
-          <pc:sldMk cId="690423791" sldId="266"/>
-        </pc:sldMkLst>
-      </pc:sldChg>
-      <pc:sldChg chg="modSp mod">
-        <pc:chgData name="Martin Garrad" userId="29fa8137-b5d4-4adf-94e3-55aca812c4da" providerId="ADAL" clId="{FE7E3326-2F4E-5A39-AD8A-48BAAAFC5A20}" dt="2025-09-24T11:43:54.051" v="730" actId="27636"/>
-        <pc:sldMkLst>
-          <pc:docMk/>
-          <pc:sldMk cId="2927885972" sldId="267"/>
+          <pc:sldMk cId="3112048377" sldId="274"/>
         </pc:sldMkLst>
         <pc:spChg chg="mod">
-          <ac:chgData name="Martin Garrad" userId="29fa8137-b5d4-4adf-94e3-55aca812c4da" providerId="ADAL" clId="{FE7E3326-2F4E-5A39-AD8A-48BAAAFC5A20}" dt="2025-09-24T11:43:54.051" v="730" actId="27636"/>
+          <ac:chgData name="Martin Garrad" userId="29fa8137-b5d4-4adf-94e3-55aca812c4da" providerId="ADAL" clId="{FE7E3326-2F4E-5A39-AD8A-48BAAAFC5A20}" dt="2026-09-17T14:42:52.773" v="298" actId="20577"/>
           <ac:spMkLst>
             <pc:docMk/>
-            <pc:sldMk cId="2927885972" sldId="267"/>
-            <ac:spMk id="3" creationId="{3337B913-CFBE-5BDE-8AA4-2A678379DC88}"/>
+            <pc:sldMk cId="3112048377" sldId="274"/>
+            <ac:spMk id="12" creationId="{A808ECF5-5518-509A-A46E-5169D22A32F7}"/>
           </ac:spMkLst>
         </pc:spChg>
       </pc:sldChg>
-      <pc:sldChg chg="delSp modSp mod">
-        <pc:chgData name="Martin Garrad" userId="29fa8137-b5d4-4adf-94e3-55aca812c4da" providerId="ADAL" clId="{FE7E3326-2F4E-5A39-AD8A-48BAAAFC5A20}" dt="2025-09-24T12:31:14.351" v="1421" actId="20577"/>
+      <pc:sldChg chg="modSp mod">
+        <pc:chgData name="Martin Garrad" userId="29fa8137-b5d4-4adf-94e3-55aca812c4da" providerId="ADAL" clId="{FE7E3326-2F4E-5A39-AD8A-48BAAAFC5A20}" dt="2026-09-17T14:42:56.755" v="304" actId="20577"/>
         <pc:sldMkLst>
           <pc:docMk/>
-          <pc:sldMk cId="1781179640" sldId="271"/>
+          <pc:sldMk cId="3895602738" sldId="275"/>
         </pc:sldMkLst>
         <pc:spChg chg="mod">
-          <ac:chgData name="Martin Garrad" userId="29fa8137-b5d4-4adf-94e3-55aca812c4da" providerId="ADAL" clId="{FE7E3326-2F4E-5A39-AD8A-48BAAAFC5A20}" dt="2025-09-24T12:31:14.351" v="1421" actId="20577"/>
+          <ac:chgData name="Martin Garrad" userId="29fa8137-b5d4-4adf-94e3-55aca812c4da" providerId="ADAL" clId="{FE7E3326-2F4E-5A39-AD8A-48BAAAFC5A20}" dt="2026-09-17T14:42:56.755" v="304" actId="20577"/>
           <ac:spMkLst>
             <pc:docMk/>
-            <pc:sldMk cId="1781179640" sldId="271"/>
-            <ac:spMk id="40" creationId="{B8B756BA-E0B5-6531-0FCF-D53621651F67}"/>
-          </ac:spMkLst>
-        </pc:spChg>
-        <pc:picChg chg="del">
-          <ac:chgData name="Martin Garrad" userId="29fa8137-b5d4-4adf-94e3-55aca812c4da" providerId="ADAL" clId="{FE7E3326-2F4E-5A39-AD8A-48BAAAFC5A20}" dt="2025-09-24T12:31:07.541" v="1419" actId="478"/>
-          <ac:picMkLst>
-            <pc:docMk/>
-            <pc:sldMk cId="1781179640" sldId="271"/>
-            <ac:picMk id="41" creationId="{D11BDCCD-CDA8-C142-7492-6E3B0E7301C3}"/>
-          </ac:picMkLst>
-        </pc:picChg>
-      </pc:sldChg>
-      <pc:sldChg chg="modSp mod">
-        <pc:chgData name="Martin Garrad" userId="29fa8137-b5d4-4adf-94e3-55aca812c4da" providerId="ADAL" clId="{FE7E3326-2F4E-5A39-AD8A-48BAAAFC5A20}" dt="2025-09-24T12:35:40.866" v="1422" actId="20577"/>
-        <pc:sldMkLst>
-          <pc:docMk/>
-          <pc:sldMk cId="3809527063" sldId="297"/>
-        </pc:sldMkLst>
-        <pc:spChg chg="mod">
-          <ac:chgData name="Martin Garrad" userId="29fa8137-b5d4-4adf-94e3-55aca812c4da" providerId="ADAL" clId="{FE7E3326-2F4E-5A39-AD8A-48BAAAFC5A20}" dt="2025-09-24T12:35:40.866" v="1422" actId="20577"/>
-          <ac:spMkLst>
-            <pc:docMk/>
-            <pc:sldMk cId="3809527063" sldId="297"/>
-            <ac:spMk id="7" creationId="{85C88F60-A86C-E5E3-1EB7-EF66F9C8C3DD}"/>
+            <pc:sldMk cId="3895602738" sldId="275"/>
+            <ac:spMk id="12" creationId="{C720C38E-6F37-5680-BB3F-E927FEC8791B}"/>
           </ac:spMkLst>
         </pc:spChg>
       </pc:sldChg>
-      <pc:sldChg chg="addSp delSp modSp add mod">
-        <pc:chgData name="Martin Garrad" userId="29fa8137-b5d4-4adf-94e3-55aca812c4da" providerId="ADAL" clId="{FE7E3326-2F4E-5A39-AD8A-48BAAAFC5A20}" dt="2025-09-24T11:55:59.732" v="900" actId="208"/>
+      <pc:sldChg chg="modSp mod">
+        <pc:chgData name="Martin Garrad" userId="29fa8137-b5d4-4adf-94e3-55aca812c4da" providerId="ADAL" clId="{FE7E3326-2F4E-5A39-AD8A-48BAAAFC5A20}" dt="2026-09-17T15:24:13.968" v="339" actId="20577"/>
+        <pc:sldMkLst>
+          <pc:docMk/>
+          <pc:sldMk cId="1006599899" sldId="276"/>
+        </pc:sldMkLst>
+        <pc:spChg chg="mod">
+          <ac:chgData name="Martin Garrad" userId="29fa8137-b5d4-4adf-94e3-55aca812c4da" providerId="ADAL" clId="{FE7E3326-2F4E-5A39-AD8A-48BAAAFC5A20}" dt="2026-09-17T15:24:13.968" v="339" actId="20577"/>
+          <ac:spMkLst>
+            <pc:docMk/>
+            <pc:sldMk cId="1006599899" sldId="276"/>
+            <ac:spMk id="40" creationId="{23D99C2D-91D3-FA96-AFB7-F84D8657AA4D}"/>
+          </ac:spMkLst>
+        </pc:spChg>
+      </pc:sldChg>
+      <pc:sldChg chg="modSp mod">
+        <pc:chgData name="Martin Garrad" userId="29fa8137-b5d4-4adf-94e3-55aca812c4da" providerId="ADAL" clId="{FE7E3326-2F4E-5A39-AD8A-48BAAAFC5A20}" dt="2026-09-17T15:22:59.527" v="323" actId="20577"/>
+        <pc:sldMkLst>
+          <pc:docMk/>
+          <pc:sldMk cId="2583233967" sldId="277"/>
+        </pc:sldMkLst>
+        <pc:spChg chg="mod">
+          <ac:chgData name="Martin Garrad" userId="29fa8137-b5d4-4adf-94e3-55aca812c4da" providerId="ADAL" clId="{FE7E3326-2F4E-5A39-AD8A-48BAAAFC5A20}" dt="2026-09-17T15:22:59.527" v="323" actId="20577"/>
+          <ac:spMkLst>
+            <pc:docMk/>
+            <pc:sldMk cId="2583233967" sldId="277"/>
+            <ac:spMk id="40" creationId="{15CA1FA1-17D2-FF5E-732E-7A3FD853E838}"/>
+          </ac:spMkLst>
+        </pc:spChg>
+      </pc:sldChg>
+      <pc:sldChg chg="modSp mod">
+        <pc:chgData name="Martin Garrad" userId="29fa8137-b5d4-4adf-94e3-55aca812c4da" providerId="ADAL" clId="{FE7E3326-2F4E-5A39-AD8A-48BAAAFC5A20}" dt="2026-09-17T15:24:03.991" v="334" actId="5793"/>
+        <pc:sldMkLst>
+          <pc:docMk/>
+          <pc:sldMk cId="1581026259" sldId="278"/>
+        </pc:sldMkLst>
+        <pc:spChg chg="mod">
+          <ac:chgData name="Martin Garrad" userId="29fa8137-b5d4-4adf-94e3-55aca812c4da" providerId="ADAL" clId="{FE7E3326-2F4E-5A39-AD8A-48BAAAFC5A20}" dt="2026-09-17T15:24:03.991" v="334" actId="5793"/>
+          <ac:spMkLst>
+            <pc:docMk/>
+            <pc:sldMk cId="1581026259" sldId="278"/>
+            <ac:spMk id="40" creationId="{05137385-CA26-6F43-F6B6-F56781D05EAA}"/>
+          </ac:spMkLst>
+        </pc:spChg>
+      </pc:sldChg>
+      <pc:sldChg chg="modSp mod">
+        <pc:chgData name="Martin Garrad" userId="29fa8137-b5d4-4adf-94e3-55aca812c4da" providerId="ADAL" clId="{FE7E3326-2F4E-5A39-AD8A-48BAAAFC5A20}" dt="2026-09-17T15:24:22.418" v="343" actId="5793"/>
+        <pc:sldMkLst>
+          <pc:docMk/>
+          <pc:sldMk cId="3864897966" sldId="280"/>
+        </pc:sldMkLst>
+        <pc:spChg chg="mod">
+          <ac:chgData name="Martin Garrad" userId="29fa8137-b5d4-4adf-94e3-55aca812c4da" providerId="ADAL" clId="{FE7E3326-2F4E-5A39-AD8A-48BAAAFC5A20}" dt="2026-09-17T15:24:22.418" v="343" actId="5793"/>
+          <ac:spMkLst>
+            <pc:docMk/>
+            <pc:sldMk cId="3864897966" sldId="280"/>
+            <ac:spMk id="40" creationId="{68A13262-6060-8D41-95E1-E78928950998}"/>
+          </ac:spMkLst>
+        </pc:spChg>
+      </pc:sldChg>
+      <pc:sldChg chg="modSp mod">
+        <pc:chgData name="Martin Garrad" userId="29fa8137-b5d4-4adf-94e3-55aca812c4da" providerId="ADAL" clId="{FE7E3326-2F4E-5A39-AD8A-48BAAAFC5A20}" dt="2026-09-17T15:24:42.046" v="347" actId="5793"/>
+        <pc:sldMkLst>
+          <pc:docMk/>
+          <pc:sldMk cId="1089495760" sldId="282"/>
+        </pc:sldMkLst>
+        <pc:spChg chg="mod">
+          <ac:chgData name="Martin Garrad" userId="29fa8137-b5d4-4adf-94e3-55aca812c4da" providerId="ADAL" clId="{FE7E3326-2F4E-5A39-AD8A-48BAAAFC5A20}" dt="2026-09-17T15:24:42.046" v="347" actId="5793"/>
+          <ac:spMkLst>
+            <pc:docMk/>
+            <pc:sldMk cId="1089495760" sldId="282"/>
+            <ac:spMk id="40" creationId="{B3A01C1A-71C7-A2D5-C26E-F09CAED073B8}"/>
+          </ac:spMkLst>
+        </pc:spChg>
+      </pc:sldChg>
+      <pc:sldChg chg="modSp mod">
+        <pc:chgData name="Martin Garrad" userId="29fa8137-b5d4-4adf-94e3-55aca812c4da" providerId="ADAL" clId="{FE7E3326-2F4E-5A39-AD8A-48BAAAFC5A20}" dt="2026-09-17T14:42:07.726" v="280" actId="20577"/>
+        <pc:sldMkLst>
+          <pc:docMk/>
+          <pc:sldMk cId="1965968288" sldId="286"/>
+        </pc:sldMkLst>
+        <pc:spChg chg="mod">
+          <ac:chgData name="Martin Garrad" userId="29fa8137-b5d4-4adf-94e3-55aca812c4da" providerId="ADAL" clId="{FE7E3326-2F4E-5A39-AD8A-48BAAAFC5A20}" dt="2026-09-17T14:42:07.726" v="280" actId="20577"/>
+          <ac:spMkLst>
+            <pc:docMk/>
+            <pc:sldMk cId="1965968288" sldId="286"/>
+            <ac:spMk id="16" creationId="{B48700A9-002D-9BB1-F006-D319A9C96F4C}"/>
+          </ac:spMkLst>
+        </pc:spChg>
+      </pc:sldChg>
+      <pc:sldChg chg="modSp mod">
+        <pc:chgData name="Martin Garrad" userId="29fa8137-b5d4-4adf-94e3-55aca812c4da" providerId="ADAL" clId="{FE7E3326-2F4E-5A39-AD8A-48BAAAFC5A20}" dt="2026-09-17T15:22:39.859" v="320" actId="20577"/>
+        <pc:sldMkLst>
+          <pc:docMk/>
+          <pc:sldMk cId="2820390002" sldId="292"/>
+        </pc:sldMkLst>
+        <pc:spChg chg="mod">
+          <ac:chgData name="Martin Garrad" userId="29fa8137-b5d4-4adf-94e3-55aca812c4da" providerId="ADAL" clId="{FE7E3326-2F4E-5A39-AD8A-48BAAAFC5A20}" dt="2026-09-17T15:22:39.859" v="320" actId="20577"/>
+          <ac:spMkLst>
+            <pc:docMk/>
+            <pc:sldMk cId="2820390002" sldId="292"/>
+            <ac:spMk id="9" creationId="{D0315A2C-2D40-2CEF-2594-F725D749C02C}"/>
+          </ac:spMkLst>
+        </pc:spChg>
+      </pc:sldChg>
+      <pc:sldChg chg="addSp modSp mod">
+        <pc:chgData name="Martin Garrad" userId="29fa8137-b5d4-4adf-94e3-55aca812c4da" providerId="ADAL" clId="{FE7E3326-2F4E-5A39-AD8A-48BAAAFC5A20}" dt="2026-09-17T14:13:58.890" v="243" actId="1076"/>
         <pc:sldMkLst>
           <pc:docMk/>
           <pc:sldMk cId="704847650" sldId="298"/>
         </pc:sldMkLst>
-        <pc:spChg chg="mod">
-          <ac:chgData name="Martin Garrad" userId="29fa8137-b5d4-4adf-94e3-55aca812c4da" providerId="ADAL" clId="{FE7E3326-2F4E-5A39-AD8A-48BAAAFC5A20}" dt="2025-09-24T11:34:56.311" v="683" actId="1076"/>
+        <pc:spChg chg="add mod">
+          <ac:chgData name="Martin Garrad" userId="29fa8137-b5d4-4adf-94e3-55aca812c4da" providerId="ADAL" clId="{FE7E3326-2F4E-5A39-AD8A-48BAAAFC5A20}" dt="2026-09-17T14:13:20.696" v="226" actId="14100"/>
           <ac:spMkLst>
             <pc:docMk/>
             <pc:sldMk cId="704847650" sldId="298"/>
-            <ac:spMk id="3" creationId="{D53ADDAC-B5CC-5817-A153-E10BB106ED2E}"/>
+            <ac:spMk id="7" creationId="{A8CA58A2-57E6-1C23-31E1-64FC8322B906}"/>
           </ac:spMkLst>
         </pc:spChg>
         <pc:spChg chg="add mod">
-          <ac:chgData name="Martin Garrad" userId="29fa8137-b5d4-4adf-94e3-55aca812c4da" providerId="ADAL" clId="{FE7E3326-2F4E-5A39-AD8A-48BAAAFC5A20}" dt="2025-09-24T11:35:13.301" v="689" actId="13822"/>
+          <ac:chgData name="Martin Garrad" userId="29fa8137-b5d4-4adf-94e3-55aca812c4da" providerId="ADAL" clId="{FE7E3326-2F4E-5A39-AD8A-48BAAAFC5A20}" dt="2026-09-17T14:13:32.609" v="235" actId="20577"/>
           <ac:spMkLst>
             <pc:docMk/>
             <pc:sldMk cId="704847650" sldId="298"/>
-            <ac:spMk id="4" creationId="{7DC282DC-EDE1-5E91-95D7-FADAD1C763D1}"/>
+            <ac:spMk id="8" creationId="{9F324D12-2DCC-FF37-DAFF-865980FACEDC}"/>
           </ac:spMkLst>
         </pc:spChg>
         <pc:spChg chg="add mod">
-          <ac:chgData name="Martin Garrad" userId="29fa8137-b5d4-4adf-94e3-55aca812c4da" providerId="ADAL" clId="{FE7E3326-2F4E-5A39-AD8A-48BAAAFC5A20}" dt="2025-09-24T11:32:07.114" v="623" actId="408"/>
+          <ac:chgData name="Martin Garrad" userId="29fa8137-b5d4-4adf-94e3-55aca812c4da" providerId="ADAL" clId="{FE7E3326-2F4E-5A39-AD8A-48BAAAFC5A20}" dt="2026-09-17T14:13:45.108" v="240" actId="1076"/>
           <ac:spMkLst>
             <pc:docMk/>
             <pc:sldMk cId="704847650" sldId="298"/>
-            <ac:spMk id="5" creationId="{F92FA4B5-13E9-C3C7-CDEB-373B321516F5}"/>
+            <ac:spMk id="14" creationId="{891591C2-63D0-B84C-82A1-37702FA8A259}"/>
           </ac:spMkLst>
         </pc:spChg>
         <pc:spChg chg="add mod">
-          <ac:chgData name="Martin Garrad" userId="29fa8137-b5d4-4adf-94e3-55aca812c4da" providerId="ADAL" clId="{FE7E3326-2F4E-5A39-AD8A-48BAAAFC5A20}" dt="2025-09-24T11:32:07.114" v="623" actId="408"/>
+          <ac:chgData name="Martin Garrad" userId="29fa8137-b5d4-4adf-94e3-55aca812c4da" providerId="ADAL" clId="{FE7E3326-2F4E-5A39-AD8A-48BAAAFC5A20}" dt="2026-09-17T14:13:58.890" v="243" actId="1076"/>
           <ac:spMkLst>
             <pc:docMk/>
             <pc:sldMk cId="704847650" sldId="298"/>
-            <ac:spMk id="6" creationId="{FBD06FBB-D2AE-9CC5-17AA-63BFCA8F268F}"/>
+            <ac:spMk id="19" creationId="{34D6230D-4C37-FD7A-8E1B-EAB4FA1CFF4D}"/>
           </ac:spMkLst>
         </pc:spChg>
-        <pc:spChg chg="add del mod">
-          <ac:chgData name="Martin Garrad" userId="29fa8137-b5d4-4adf-94e3-55aca812c4da" providerId="ADAL" clId="{FE7E3326-2F4E-5A39-AD8A-48BAAAFC5A20}" dt="2025-09-24T11:28:41.259" v="511" actId="478"/>
-          <ac:spMkLst>
-            <pc:docMk/>
-            <pc:sldMk cId="704847650" sldId="298"/>
-            <ac:spMk id="7" creationId="{FE76EA0D-5A8E-BC46-93AD-BCAF1F90E4C7}"/>
-          </ac:spMkLst>
-        </pc:spChg>
-        <pc:spChg chg="add del mod">
-          <ac:chgData name="Martin Garrad" userId="29fa8137-b5d4-4adf-94e3-55aca812c4da" providerId="ADAL" clId="{FE7E3326-2F4E-5A39-AD8A-48BAAAFC5A20}" dt="2025-09-24T11:28:40.592" v="510" actId="478"/>
-          <ac:spMkLst>
-            <pc:docMk/>
-            <pc:sldMk cId="704847650" sldId="298"/>
-            <ac:spMk id="8" creationId="{EFA98751-CBF4-877C-5971-17CBA6FC97F8}"/>
-          </ac:spMkLst>
-        </pc:spChg>
-        <pc:spChg chg="add mod">
-          <ac:chgData name="Martin Garrad" userId="29fa8137-b5d4-4adf-94e3-55aca812c4da" providerId="ADAL" clId="{FE7E3326-2F4E-5A39-AD8A-48BAAAFC5A20}" dt="2025-09-24T11:32:07.114" v="623" actId="408"/>
-          <ac:spMkLst>
-            <pc:docMk/>
-            <pc:sldMk cId="704847650" sldId="298"/>
-            <ac:spMk id="9" creationId="{164133FC-A8A7-EFE0-0AF1-7E4012EB540F}"/>
-          </ac:spMkLst>
-        </pc:spChg>
-        <pc:spChg chg="add mod">
-          <ac:chgData name="Martin Garrad" userId="29fa8137-b5d4-4adf-94e3-55aca812c4da" providerId="ADAL" clId="{FE7E3326-2F4E-5A39-AD8A-48BAAAFC5A20}" dt="2025-09-24T11:34:58.300" v="684" actId="1076"/>
-          <ac:spMkLst>
-            <pc:docMk/>
-            <pc:sldMk cId="704847650" sldId="298"/>
-            <ac:spMk id="10" creationId="{B8119503-6F6B-79A1-8D84-4C15C5012FA6}"/>
-          </ac:spMkLst>
-        </pc:spChg>
-        <pc:spChg chg="add mod">
-          <ac:chgData name="Martin Garrad" userId="29fa8137-b5d4-4adf-94e3-55aca812c4da" providerId="ADAL" clId="{FE7E3326-2F4E-5A39-AD8A-48BAAAFC5A20}" dt="2025-09-24T11:35:27.938" v="691" actId="207"/>
-          <ac:spMkLst>
-            <pc:docMk/>
-            <pc:sldMk cId="704847650" sldId="298"/>
-            <ac:spMk id="11" creationId="{62AF060D-B84D-A90A-E6EF-B8634B339DE6}"/>
-          </ac:spMkLst>
-        </pc:spChg>
-        <pc:spChg chg="add mod">
-          <ac:chgData name="Martin Garrad" userId="29fa8137-b5d4-4adf-94e3-55aca812c4da" providerId="ADAL" clId="{FE7E3326-2F4E-5A39-AD8A-48BAAAFC5A20}" dt="2025-09-24T11:32:07.114" v="623" actId="408"/>
-          <ac:spMkLst>
-            <pc:docMk/>
-            <pc:sldMk cId="704847650" sldId="298"/>
-            <ac:spMk id="12" creationId="{7A587BBF-E600-5805-E596-CC8BDA3FA6BA}"/>
-          </ac:spMkLst>
-        </pc:spChg>
-        <pc:spChg chg="add mod">
-          <ac:chgData name="Martin Garrad" userId="29fa8137-b5d4-4adf-94e3-55aca812c4da" providerId="ADAL" clId="{FE7E3326-2F4E-5A39-AD8A-48BAAAFC5A20}" dt="2025-09-24T11:37:07.249" v="711" actId="14100"/>
-          <ac:spMkLst>
-            <pc:docMk/>
-            <pc:sldMk cId="704847650" sldId="298"/>
-            <ac:spMk id="13" creationId="{720F0724-92B1-01EB-746F-ABE00008E3B6}"/>
-          </ac:spMkLst>
-        </pc:spChg>
-        <pc:spChg chg="add del mod">
-          <ac:chgData name="Martin Garrad" userId="29fa8137-b5d4-4adf-94e3-55aca812c4da" providerId="ADAL" clId="{FE7E3326-2F4E-5A39-AD8A-48BAAAFC5A20}" dt="2025-09-24T11:29:43.523" v="545" actId="478"/>
-          <ac:spMkLst>
-            <pc:docMk/>
-            <pc:sldMk cId="704847650" sldId="298"/>
-            <ac:spMk id="14" creationId="{C034F3DB-304A-F3A0-E274-C3975FCA0474}"/>
-          </ac:spMkLst>
-        </pc:spChg>
-        <pc:spChg chg="add mod">
-          <ac:chgData name="Martin Garrad" userId="29fa8137-b5d4-4adf-94e3-55aca812c4da" providerId="ADAL" clId="{FE7E3326-2F4E-5A39-AD8A-48BAAAFC5A20}" dt="2025-09-24T11:35:27.938" v="691" actId="207"/>
-          <ac:spMkLst>
-            <pc:docMk/>
-            <pc:sldMk cId="704847650" sldId="298"/>
-            <ac:spMk id="15" creationId="{EAB1AAB0-4447-2007-22BE-0E59D4AB3761}"/>
-          </ac:spMkLst>
-        </pc:spChg>
-        <pc:spChg chg="add mod">
-          <ac:chgData name="Martin Garrad" userId="29fa8137-b5d4-4adf-94e3-55aca812c4da" providerId="ADAL" clId="{FE7E3326-2F4E-5A39-AD8A-48BAAAFC5A20}" dt="2025-09-24T11:34:30.718" v="675" actId="14100"/>
-          <ac:spMkLst>
-            <pc:docMk/>
-            <pc:sldMk cId="704847650" sldId="298"/>
-            <ac:spMk id="16" creationId="{93D972C1-B09C-F1BE-95E0-EF9FAEB01346}"/>
-          </ac:spMkLst>
-        </pc:spChg>
-        <pc:spChg chg="add mod">
-          <ac:chgData name="Martin Garrad" userId="29fa8137-b5d4-4adf-94e3-55aca812c4da" providerId="ADAL" clId="{FE7E3326-2F4E-5A39-AD8A-48BAAAFC5A20}" dt="2025-09-24T11:34:48.157" v="680" actId="1076"/>
-          <ac:spMkLst>
-            <pc:docMk/>
-            <pc:sldMk cId="704847650" sldId="298"/>
-            <ac:spMk id="17" creationId="{29DF9C24-2369-683B-6228-446F16F450FA}"/>
-          </ac:spMkLst>
-        </pc:spChg>
-        <pc:spChg chg="add mod">
-          <ac:chgData name="Martin Garrad" userId="29fa8137-b5d4-4adf-94e3-55aca812c4da" providerId="ADAL" clId="{FE7E3326-2F4E-5A39-AD8A-48BAAAFC5A20}" dt="2025-09-24T11:35:13.301" v="689" actId="13822"/>
-          <ac:spMkLst>
-            <pc:docMk/>
-            <pc:sldMk cId="704847650" sldId="298"/>
-            <ac:spMk id="18" creationId="{B18DE44C-B6BA-53DF-6EC1-CA9C83C7672A}"/>
-          </ac:spMkLst>
-        </pc:spChg>
-        <pc:cxnChg chg="add mod">
-          <ac:chgData name="Martin Garrad" userId="29fa8137-b5d4-4adf-94e3-55aca812c4da" providerId="ADAL" clId="{FE7E3326-2F4E-5A39-AD8A-48BAAAFC5A20}" dt="2025-09-24T11:38:45.695" v="727" actId="208"/>
-          <ac:cxnSpMkLst>
-            <pc:docMk/>
-            <pc:sldMk cId="704847650" sldId="298"/>
-            <ac:cxnSpMk id="20" creationId="{34551062-A526-7F5F-B07A-365A15F10CD8}"/>
-          </ac:cxnSpMkLst>
-        </pc:cxnChg>
-        <pc:cxnChg chg="add mod">
-          <ac:chgData name="Martin Garrad" userId="29fa8137-b5d4-4adf-94e3-55aca812c4da" providerId="ADAL" clId="{FE7E3326-2F4E-5A39-AD8A-48BAAAFC5A20}" dt="2025-09-24T11:38:45.695" v="727" actId="208"/>
-          <ac:cxnSpMkLst>
-            <pc:docMk/>
-            <pc:sldMk cId="704847650" sldId="298"/>
-            <ac:cxnSpMk id="22" creationId="{316F2114-8D03-A3E7-F4DE-5A54D38A9982}"/>
-          </ac:cxnSpMkLst>
-        </pc:cxnChg>
-        <pc:cxnChg chg="add mod">
-          <ac:chgData name="Martin Garrad" userId="29fa8137-b5d4-4adf-94e3-55aca812c4da" providerId="ADAL" clId="{FE7E3326-2F4E-5A39-AD8A-48BAAAFC5A20}" dt="2025-09-24T11:38:45.695" v="727" actId="208"/>
-          <ac:cxnSpMkLst>
-            <pc:docMk/>
-            <pc:sldMk cId="704847650" sldId="298"/>
-            <ac:cxnSpMk id="26" creationId="{F9570409-B41E-2321-459E-1B2964F01364}"/>
-          </ac:cxnSpMkLst>
-        </pc:cxnChg>
-        <pc:cxnChg chg="add mod">
-          <ac:chgData name="Martin Garrad" userId="29fa8137-b5d4-4adf-94e3-55aca812c4da" providerId="ADAL" clId="{FE7E3326-2F4E-5A39-AD8A-48BAAAFC5A20}" dt="2025-09-24T11:38:45.695" v="727" actId="208"/>
-          <ac:cxnSpMkLst>
-            <pc:docMk/>
-            <pc:sldMk cId="704847650" sldId="298"/>
-            <ac:cxnSpMk id="27" creationId="{1946BDF2-C122-B5EA-8B03-FB84999CE96F}"/>
-          </ac:cxnSpMkLst>
-        </pc:cxnChg>
-        <pc:cxnChg chg="add mod">
-          <ac:chgData name="Martin Garrad" userId="29fa8137-b5d4-4adf-94e3-55aca812c4da" providerId="ADAL" clId="{FE7E3326-2F4E-5A39-AD8A-48BAAAFC5A20}" dt="2025-09-24T11:38:45.695" v="727" actId="208"/>
-          <ac:cxnSpMkLst>
-            <pc:docMk/>
-            <pc:sldMk cId="704847650" sldId="298"/>
-            <ac:cxnSpMk id="28" creationId="{C15A48CF-B21F-5AFB-CD47-B47E419CA92C}"/>
-          </ac:cxnSpMkLst>
-        </pc:cxnChg>
-        <pc:cxnChg chg="add mod">
-          <ac:chgData name="Martin Garrad" userId="29fa8137-b5d4-4adf-94e3-55aca812c4da" providerId="ADAL" clId="{FE7E3326-2F4E-5A39-AD8A-48BAAAFC5A20}" dt="2025-09-24T11:38:45.695" v="727" actId="208"/>
-          <ac:cxnSpMkLst>
-            <pc:docMk/>
-            <pc:sldMk cId="704847650" sldId="298"/>
-            <ac:cxnSpMk id="29" creationId="{6EAF4841-07A0-A92D-63FF-D490F7B58887}"/>
-          </ac:cxnSpMkLst>
-        </pc:cxnChg>
-        <pc:cxnChg chg="add mod">
-          <ac:chgData name="Martin Garrad" userId="29fa8137-b5d4-4adf-94e3-55aca812c4da" providerId="ADAL" clId="{FE7E3326-2F4E-5A39-AD8A-48BAAAFC5A20}" dt="2025-09-24T11:55:59.732" v="900" actId="208"/>
-          <ac:cxnSpMkLst>
-            <pc:docMk/>
-            <pc:sldMk cId="704847650" sldId="298"/>
-            <ac:cxnSpMk id="31" creationId="{807AA584-FA03-39FE-14E0-33C6017CD827}"/>
-          </ac:cxnSpMkLst>
-        </pc:cxnChg>
-        <pc:cxnChg chg="add mod">
-          <ac:chgData name="Martin Garrad" userId="29fa8137-b5d4-4adf-94e3-55aca812c4da" providerId="ADAL" clId="{FE7E3326-2F4E-5A39-AD8A-48BAAAFC5A20}" dt="2025-09-24T11:38:45.695" v="727" actId="208"/>
-          <ac:cxnSpMkLst>
-            <pc:docMk/>
-            <pc:sldMk cId="704847650" sldId="298"/>
-            <ac:cxnSpMk id="32" creationId="{D134B90F-23D1-0B25-B395-A1AC0251A44A}"/>
-          </ac:cxnSpMkLst>
-        </pc:cxnChg>
-        <pc:cxnChg chg="add mod">
-          <ac:chgData name="Martin Garrad" userId="29fa8137-b5d4-4adf-94e3-55aca812c4da" providerId="ADAL" clId="{FE7E3326-2F4E-5A39-AD8A-48BAAAFC5A20}" dt="2025-09-24T11:38:45.695" v="727" actId="208"/>
-          <ac:cxnSpMkLst>
-            <pc:docMk/>
-            <pc:sldMk cId="704847650" sldId="298"/>
-            <ac:cxnSpMk id="33" creationId="{4AB84D02-A7A2-D07F-2AAE-13DD39F3B271}"/>
-          </ac:cxnSpMkLst>
-        </pc:cxnChg>
-        <pc:cxnChg chg="add mod">
-          <ac:chgData name="Martin Garrad" userId="29fa8137-b5d4-4adf-94e3-55aca812c4da" providerId="ADAL" clId="{FE7E3326-2F4E-5A39-AD8A-48BAAAFC5A20}" dt="2025-09-24T11:34:52.186" v="682"/>
-          <ac:cxnSpMkLst>
-            <pc:docMk/>
-            <pc:sldMk cId="704847650" sldId="298"/>
-            <ac:cxnSpMk id="35" creationId="{81B566A8-4BF7-D04F-A533-C8B5118D76E4}"/>
-          </ac:cxnSpMkLst>
-        </pc:cxnChg>
-        <pc:cxnChg chg="add mod">
-          <ac:chgData name="Martin Garrad" userId="29fa8137-b5d4-4adf-94e3-55aca812c4da" providerId="ADAL" clId="{FE7E3326-2F4E-5A39-AD8A-48BAAAFC5A20}" dt="2025-09-24T11:35:01.997" v="686" actId="1076"/>
-          <ac:cxnSpMkLst>
-            <pc:docMk/>
-            <pc:sldMk cId="704847650" sldId="298"/>
-            <ac:cxnSpMk id="36" creationId="{C91877BD-4655-E742-1E3A-8BAFB5441D9F}"/>
-          </ac:cxnSpMkLst>
-        </pc:cxnChg>
-        <pc:cxnChg chg="add mod">
-          <ac:chgData name="Martin Garrad" userId="29fa8137-b5d4-4adf-94e3-55aca812c4da" providerId="ADAL" clId="{FE7E3326-2F4E-5A39-AD8A-48BAAAFC5A20}" dt="2025-09-24T11:35:05.524" v="688" actId="1076"/>
-          <ac:cxnSpMkLst>
-            <pc:docMk/>
-            <pc:sldMk cId="704847650" sldId="298"/>
-            <ac:cxnSpMk id="37" creationId="{FB86D970-3DE9-1C40-4F8F-57223C6BD2C9}"/>
-          </ac:cxnSpMkLst>
-        </pc:cxnChg>
-        <pc:cxnChg chg="add mod">
-          <ac:chgData name="Martin Garrad" userId="29fa8137-b5d4-4adf-94e3-55aca812c4da" providerId="ADAL" clId="{FE7E3326-2F4E-5A39-AD8A-48BAAAFC5A20}" dt="2025-09-24T11:36:02.986" v="695" actId="14100"/>
-          <ac:cxnSpMkLst>
-            <pc:docMk/>
-            <pc:sldMk cId="704847650" sldId="298"/>
-            <ac:cxnSpMk id="39" creationId="{23D123E2-82BB-0CF2-CD64-17F392C554BD}"/>
-          </ac:cxnSpMkLst>
-        </pc:cxnChg>
-        <pc:cxnChg chg="add mod">
-          <ac:chgData name="Martin Garrad" userId="29fa8137-b5d4-4adf-94e3-55aca812c4da" providerId="ADAL" clId="{FE7E3326-2F4E-5A39-AD8A-48BAAAFC5A20}" dt="2025-09-24T11:38:45.695" v="727" actId="208"/>
-          <ac:cxnSpMkLst>
-            <pc:docMk/>
-            <pc:sldMk cId="704847650" sldId="298"/>
-            <ac:cxnSpMk id="41" creationId="{69302D18-CD1D-2814-8CDD-390E25F81AC4}"/>
-          </ac:cxnSpMkLst>
-        </pc:cxnChg>
-        <pc:cxnChg chg="add mod">
-          <ac:chgData name="Martin Garrad" userId="29fa8137-b5d4-4adf-94e3-55aca812c4da" providerId="ADAL" clId="{FE7E3326-2F4E-5A39-AD8A-48BAAAFC5A20}" dt="2025-09-24T11:37:15.366" v="715" actId="1038"/>
-          <ac:cxnSpMkLst>
-            <pc:docMk/>
-            <pc:sldMk cId="704847650" sldId="298"/>
-            <ac:cxnSpMk id="45" creationId="{4FE03817-AE61-5242-F6BA-47F958ACE063}"/>
-          </ac:cxnSpMkLst>
-        </pc:cxnChg>
-        <pc:cxnChg chg="add mod">
-          <ac:chgData name="Martin Garrad" userId="29fa8137-b5d4-4adf-94e3-55aca812c4da" providerId="ADAL" clId="{FE7E3326-2F4E-5A39-AD8A-48BAAAFC5A20}" dt="2025-09-24T11:37:40.830" v="719" actId="1076"/>
-          <ac:cxnSpMkLst>
-            <pc:docMk/>
-            <pc:sldMk cId="704847650" sldId="298"/>
-            <ac:cxnSpMk id="50" creationId="{6A4625DB-25B5-D432-2952-CCF6F842F117}"/>
-          </ac:cxnSpMkLst>
-        </pc:cxnChg>
-        <pc:cxnChg chg="add mod">
-          <ac:chgData name="Martin Garrad" userId="29fa8137-b5d4-4adf-94e3-55aca812c4da" providerId="ADAL" clId="{FE7E3326-2F4E-5A39-AD8A-48BAAAFC5A20}" dt="2025-09-24T11:38:45.695" v="727" actId="208"/>
-          <ac:cxnSpMkLst>
-            <pc:docMk/>
-            <pc:sldMk cId="704847650" sldId="298"/>
-            <ac:cxnSpMk id="52" creationId="{B4AB78D4-3236-69C1-03B9-859BF42104B5}"/>
-          </ac:cxnSpMkLst>
-        </pc:cxnChg>
       </pc:sldChg>
-      <pc:sldChg chg="add">
-        <pc:chgData name="Martin Garrad" userId="29fa8137-b5d4-4adf-94e3-55aca812c4da" providerId="ADAL" clId="{FE7E3326-2F4E-5A39-AD8A-48BAAAFC5A20}" dt="2025-09-24T11:43:48.225" v="728" actId="2890"/>
-        <pc:sldMkLst>
-          <pc:docMk/>
-          <pc:sldMk cId="843374860" sldId="299"/>
-        </pc:sldMkLst>
-      </pc:sldChg>
-      <pc:sldChg chg="addSp delSp modSp add mod">
-        <pc:chgData name="Martin Garrad" userId="29fa8137-b5d4-4adf-94e3-55aca812c4da" providerId="ADAL" clId="{FE7E3326-2F4E-5A39-AD8A-48BAAAFC5A20}" dt="2025-09-24T11:53:28.661" v="864" actId="1076"/>
+      <pc:sldChg chg="addSp modSp">
+        <pc:chgData name="Martin Garrad" userId="29fa8137-b5d4-4adf-94e3-55aca812c4da" providerId="ADAL" clId="{FE7E3326-2F4E-5A39-AD8A-48BAAAFC5A20}" dt="2026-09-17T15:26:09.726" v="353"/>
         <pc:sldMkLst>
           <pc:docMk/>
           <pc:sldMk cId="3926886840" sldId="300"/>
         </pc:sldMkLst>
-        <pc:spChg chg="add del mod">
-          <ac:chgData name="Martin Garrad" userId="29fa8137-b5d4-4adf-94e3-55aca812c4da" providerId="ADAL" clId="{FE7E3326-2F4E-5A39-AD8A-48BAAAFC5A20}" dt="2025-09-24T11:49:24.919" v="734" actId="478"/>
+        <pc:spChg chg="add mod">
+          <ac:chgData name="Martin Garrad" userId="29fa8137-b5d4-4adf-94e3-55aca812c4da" providerId="ADAL" clId="{FE7E3326-2F4E-5A39-AD8A-48BAAAFC5A20}" dt="2026-09-17T15:26:09.726" v="353"/>
           <ac:spMkLst>
             <pc:docMk/>
             <pc:sldMk cId="3926886840" sldId="300"/>
-            <ac:spMk id="7" creationId="{AE698CD4-F7E9-2529-128E-4F9785C33B5C}"/>
+            <ac:spMk id="7" creationId="{81F696E2-EBD7-663A-64F3-F73DAE77D18E}"/>
           </ac:spMkLst>
         </pc:spChg>
-        <pc:spChg chg="add del mod">
-          <ac:chgData name="Martin Garrad" userId="29fa8137-b5d4-4adf-94e3-55aca812c4da" providerId="ADAL" clId="{FE7E3326-2F4E-5A39-AD8A-48BAAAFC5A20}" dt="2025-09-24T11:49:38.336" v="737" actId="478"/>
+        <pc:spChg chg="add mod">
+          <ac:chgData name="Martin Garrad" userId="29fa8137-b5d4-4adf-94e3-55aca812c4da" providerId="ADAL" clId="{FE7E3326-2F4E-5A39-AD8A-48BAAAFC5A20}" dt="2026-09-17T15:26:09.726" v="353"/>
           <ac:spMkLst>
             <pc:docMk/>
             <pc:sldMk cId="3926886840" sldId="300"/>
-            <ac:spMk id="8" creationId="{27EFC986-6D91-903F-937F-BFDB88FE8582}"/>
+            <ac:spMk id="8" creationId="{53BFE3B1-0DE0-1E19-D42D-CD24664CB10C}"/>
           </ac:spMkLst>
         </pc:spChg>
-        <pc:spChg chg="del">
-          <ac:chgData name="Martin Garrad" userId="29fa8137-b5d4-4adf-94e3-55aca812c4da" providerId="ADAL" clId="{FE7E3326-2F4E-5A39-AD8A-48BAAAFC5A20}" dt="2025-09-24T11:51:17.435" v="743" actId="478"/>
+        <pc:spChg chg="add mod">
+          <ac:chgData name="Martin Garrad" userId="29fa8137-b5d4-4adf-94e3-55aca812c4da" providerId="ADAL" clId="{FE7E3326-2F4E-5A39-AD8A-48BAAAFC5A20}" dt="2026-09-17T15:26:09.726" v="353"/>
           <ac:spMkLst>
             <pc:docMk/>
             <pc:sldMk cId="3926886840" sldId="300"/>
-            <ac:spMk id="10" creationId="{4548070F-8052-B809-083B-671E7625B587}"/>
+            <ac:spMk id="10" creationId="{B54313CE-5741-8026-8EB0-5CE5BAE9B35A}"/>
           </ac:spMkLst>
         </pc:spChg>
-        <pc:spChg chg="add del mod">
-          <ac:chgData name="Martin Garrad" userId="29fa8137-b5d4-4adf-94e3-55aca812c4da" providerId="ADAL" clId="{FE7E3326-2F4E-5A39-AD8A-48BAAAFC5A20}" dt="2025-09-24T11:50:40.299" v="740" actId="478"/>
+        <pc:spChg chg="add mod">
+          <ac:chgData name="Martin Garrad" userId="29fa8137-b5d4-4adf-94e3-55aca812c4da" providerId="ADAL" clId="{FE7E3326-2F4E-5A39-AD8A-48BAAAFC5A20}" dt="2026-09-17T15:26:09.726" v="353"/>
           <ac:spMkLst>
             <pc:docMk/>
             <pc:sldMk cId="3926886840" sldId="300"/>
-            <ac:spMk id="14" creationId="{D68E9591-69C0-2E04-B3AD-89B5DC8E3AD8}"/>
+            <ac:spMk id="14" creationId="{4F78B87C-3148-ED77-3391-5597E25F291A}"/>
           </ac:spMkLst>
         </pc:spChg>
-        <pc:spChg chg="mod">
-          <ac:chgData name="Martin Garrad" userId="29fa8137-b5d4-4adf-94e3-55aca812c4da" providerId="ADAL" clId="{FE7E3326-2F4E-5A39-AD8A-48BAAAFC5A20}" dt="2025-09-24T11:52:41.935" v="851" actId="1076"/>
-          <ac:spMkLst>
-            <pc:docMk/>
-            <pc:sldMk cId="3926886840" sldId="300"/>
-            <ac:spMk id="18" creationId="{130D2E1E-7D6E-565D-DD97-7F0470318855}"/>
-          </ac:spMkLst>
-        </pc:spChg>
-        <pc:spChg chg="add mod">
-          <ac:chgData name="Martin Garrad" userId="29fa8137-b5d4-4adf-94e3-55aca812c4da" providerId="ADAL" clId="{FE7E3326-2F4E-5A39-AD8A-48BAAAFC5A20}" dt="2025-09-24T11:51:33.065" v="761" actId="20577"/>
-          <ac:spMkLst>
-            <pc:docMk/>
-            <pc:sldMk cId="3926886840" sldId="300"/>
-            <ac:spMk id="19" creationId="{A3353916-2170-51C0-E568-08E23F1CA200}"/>
-          </ac:spMkLst>
-        </pc:spChg>
-        <pc:spChg chg="add mod">
-          <ac:chgData name="Martin Garrad" userId="29fa8137-b5d4-4adf-94e3-55aca812c4da" providerId="ADAL" clId="{FE7E3326-2F4E-5A39-AD8A-48BAAAFC5A20}" dt="2025-09-24T11:52:09.087" v="797" actId="14100"/>
-          <ac:spMkLst>
-            <pc:docMk/>
-            <pc:sldMk cId="3926886840" sldId="300"/>
-            <ac:spMk id="21" creationId="{5E683000-B2D4-1D08-61E0-CC80163BC30B}"/>
-          </ac:spMkLst>
-        </pc:spChg>
-        <pc:spChg chg="add mod">
-          <ac:chgData name="Martin Garrad" userId="29fa8137-b5d4-4adf-94e3-55aca812c4da" providerId="ADAL" clId="{FE7E3326-2F4E-5A39-AD8A-48BAAAFC5A20}" dt="2025-09-24T11:53:00.045" v="855" actId="1076"/>
-          <ac:spMkLst>
-            <pc:docMk/>
-            <pc:sldMk cId="3926886840" sldId="300"/>
-            <ac:spMk id="23" creationId="{8FBF1C1E-75B6-BE61-FFF2-B33C3065A15E}"/>
-          </ac:spMkLst>
-        </pc:spChg>
-        <pc:spChg chg="add mod">
-          <ac:chgData name="Martin Garrad" userId="29fa8137-b5d4-4adf-94e3-55aca812c4da" providerId="ADAL" clId="{FE7E3326-2F4E-5A39-AD8A-48BAAAFC5A20}" dt="2025-09-24T11:53:04.042" v="856" actId="1076"/>
-          <ac:spMkLst>
-            <pc:docMk/>
-            <pc:sldMk cId="3926886840" sldId="300"/>
-            <ac:spMk id="24" creationId="{ECCEAE1D-25B9-2E4C-4A40-19585D4B7991}"/>
-          </ac:spMkLst>
-        </pc:spChg>
-        <pc:cxnChg chg="add mod">
-          <ac:chgData name="Martin Garrad" userId="29fa8137-b5d4-4adf-94e3-55aca812c4da" providerId="ADAL" clId="{FE7E3326-2F4E-5A39-AD8A-48BAAAFC5A20}" dt="2025-09-24T11:52:56.416" v="854" actId="1076"/>
-          <ac:cxnSpMkLst>
-            <pc:docMk/>
-            <pc:sldMk cId="3926886840" sldId="300"/>
-            <ac:cxnSpMk id="25" creationId="{5DD11AB1-ED71-EA33-8EEA-6487804F2C5F}"/>
-          </ac:cxnSpMkLst>
-        </pc:cxnChg>
-        <pc:cxnChg chg="add mod">
-          <ac:chgData name="Martin Garrad" userId="29fa8137-b5d4-4adf-94e3-55aca812c4da" providerId="ADAL" clId="{FE7E3326-2F4E-5A39-AD8A-48BAAAFC5A20}" dt="2025-09-24T11:53:17.541" v="860" actId="14100"/>
-          <ac:cxnSpMkLst>
-            <pc:docMk/>
-            <pc:sldMk cId="3926886840" sldId="300"/>
-            <ac:cxnSpMk id="30" creationId="{5781F7F3-BF39-0117-D998-09ABE195439C}"/>
-          </ac:cxnSpMkLst>
-        </pc:cxnChg>
-        <pc:cxnChg chg="mod">
-          <ac:chgData name="Martin Garrad" userId="29fa8137-b5d4-4adf-94e3-55aca812c4da" providerId="ADAL" clId="{FE7E3326-2F4E-5A39-AD8A-48BAAAFC5A20}" dt="2025-09-24T11:52:51.214" v="852" actId="208"/>
-          <ac:cxnSpMkLst>
-            <pc:docMk/>
-            <pc:sldMk cId="3926886840" sldId="300"/>
-            <ac:cxnSpMk id="31" creationId="{C22BB892-946F-E3C7-E4F7-947F5C47E7AB}"/>
-          </ac:cxnSpMkLst>
-        </pc:cxnChg>
-        <pc:cxnChg chg="add mod">
-          <ac:chgData name="Martin Garrad" userId="29fa8137-b5d4-4adf-94e3-55aca812c4da" providerId="ADAL" clId="{FE7E3326-2F4E-5A39-AD8A-48BAAAFC5A20}" dt="2025-09-24T11:53:28.661" v="864" actId="1076"/>
-          <ac:cxnSpMkLst>
-            <pc:docMk/>
-            <pc:sldMk cId="3926886840" sldId="300"/>
-            <ac:cxnSpMk id="38" creationId="{AE77609B-082C-A7B4-AB4B-78CFE17BCBB7}"/>
-          </ac:cxnSpMkLst>
-        </pc:cxnChg>
       </pc:sldChg>
-      <pc:sldChg chg="add del">
-        <pc:chgData name="Martin Garrad" userId="29fa8137-b5d4-4adf-94e3-55aca812c4da" providerId="ADAL" clId="{FE7E3326-2F4E-5A39-AD8A-48BAAAFC5A20}" dt="2025-09-24T11:51:11.669" v="742" actId="2696"/>
-        <pc:sldMkLst>
-          <pc:docMk/>
-          <pc:sldMk cId="852105429" sldId="301"/>
-        </pc:sldMkLst>
-      </pc:sldChg>
-      <pc:sldChg chg="addSp delSp modSp add mod">
-        <pc:chgData name="Martin Garrad" userId="29fa8137-b5d4-4adf-94e3-55aca812c4da" providerId="ADAL" clId="{FE7E3326-2F4E-5A39-AD8A-48BAAAFC5A20}" dt="2025-09-24T11:54:58.998" v="899" actId="12789"/>
+      <pc:sldChg chg="ord">
+        <pc:chgData name="Martin Garrad" userId="29fa8137-b5d4-4adf-94e3-55aca812c4da" providerId="ADAL" clId="{FE7E3326-2F4E-5A39-AD8A-48BAAAFC5A20}" dt="2026-09-17T14:15:18.834" v="244" actId="20578"/>
         <pc:sldMkLst>
           <pc:docMk/>
           <pc:sldMk cId="3765792024" sldId="301"/>
         </pc:sldMkLst>
-        <pc:spChg chg="del mod">
-          <ac:chgData name="Martin Garrad" userId="29fa8137-b5d4-4adf-94e3-55aca812c4da" providerId="ADAL" clId="{FE7E3326-2F4E-5A39-AD8A-48BAAAFC5A20}" dt="2025-09-24T11:53:48.334" v="867" actId="478"/>
-          <ac:spMkLst>
-            <pc:docMk/>
-            <pc:sldMk cId="3765792024" sldId="301"/>
-            <ac:spMk id="5" creationId="{E0DFA1DB-DA0C-E152-76EA-2DA546D582F4}"/>
-          </ac:spMkLst>
-        </pc:spChg>
-        <pc:spChg chg="mod">
-          <ac:chgData name="Martin Garrad" userId="29fa8137-b5d4-4adf-94e3-55aca812c4da" providerId="ADAL" clId="{FE7E3326-2F4E-5A39-AD8A-48BAAAFC5A20}" dt="2025-09-24T11:54:58.998" v="899" actId="12789"/>
-          <ac:spMkLst>
-            <pc:docMk/>
-            <pc:sldMk cId="3765792024" sldId="301"/>
-            <ac:spMk id="6" creationId="{32CC9F86-C414-3853-1DF1-0764D227AD7F}"/>
-          </ac:spMkLst>
-        </pc:spChg>
-        <pc:spChg chg="add mod">
-          <ac:chgData name="Martin Garrad" userId="29fa8137-b5d4-4adf-94e3-55aca812c4da" providerId="ADAL" clId="{FE7E3326-2F4E-5A39-AD8A-48BAAAFC5A20}" dt="2025-09-24T11:54:58.998" v="899" actId="12789"/>
-          <ac:spMkLst>
-            <pc:docMk/>
-            <pc:sldMk cId="3765792024" sldId="301"/>
-            <ac:spMk id="7" creationId="{52FBC4F4-A0D3-1682-B5B7-BD6E5C8B2212}"/>
-          </ac:spMkLst>
-        </pc:spChg>
-        <pc:spChg chg="mod">
-          <ac:chgData name="Martin Garrad" userId="29fa8137-b5d4-4adf-94e3-55aca812c4da" providerId="ADAL" clId="{FE7E3326-2F4E-5A39-AD8A-48BAAAFC5A20}" dt="2025-09-24T11:54:58.998" v="899" actId="12789"/>
-          <ac:spMkLst>
-            <pc:docMk/>
-            <pc:sldMk cId="3765792024" sldId="301"/>
-            <ac:spMk id="9" creationId="{569A2EF3-A350-9184-C222-37F82810B639}"/>
-          </ac:spMkLst>
-        </pc:spChg>
-        <pc:spChg chg="del">
-          <ac:chgData name="Martin Garrad" userId="29fa8137-b5d4-4adf-94e3-55aca812c4da" providerId="ADAL" clId="{FE7E3326-2F4E-5A39-AD8A-48BAAAFC5A20}" dt="2025-09-24T11:54:07.056" v="882" actId="478"/>
-          <ac:spMkLst>
-            <pc:docMk/>
-            <pc:sldMk cId="3765792024" sldId="301"/>
-            <ac:spMk id="11" creationId="{3C7785B9-EF95-A691-6A4E-3C5F2C67B187}"/>
-          </ac:spMkLst>
-        </pc:spChg>
-        <pc:spChg chg="del">
-          <ac:chgData name="Martin Garrad" userId="29fa8137-b5d4-4adf-94e3-55aca812c4da" providerId="ADAL" clId="{FE7E3326-2F4E-5A39-AD8A-48BAAAFC5A20}" dt="2025-09-24T11:54:08.516" v="883" actId="478"/>
-          <ac:spMkLst>
-            <pc:docMk/>
-            <pc:sldMk cId="3765792024" sldId="301"/>
-            <ac:spMk id="12" creationId="{679C3E3F-C929-2F3A-A344-60FE943920E7}"/>
-          </ac:spMkLst>
-        </pc:spChg>
-        <pc:spChg chg="mod">
-          <ac:chgData name="Martin Garrad" userId="29fa8137-b5d4-4adf-94e3-55aca812c4da" providerId="ADAL" clId="{FE7E3326-2F4E-5A39-AD8A-48BAAAFC5A20}" dt="2025-09-24T11:54:58.998" v="899" actId="12789"/>
-          <ac:spMkLst>
-            <pc:docMk/>
-            <pc:sldMk cId="3765792024" sldId="301"/>
-            <ac:spMk id="13" creationId="{37CB827C-B373-1A29-CEDD-EBEDA5028B0E}"/>
-          </ac:spMkLst>
-        </pc:spChg>
-        <pc:spChg chg="del">
-          <ac:chgData name="Martin Garrad" userId="29fa8137-b5d4-4adf-94e3-55aca812c4da" providerId="ADAL" clId="{FE7E3326-2F4E-5A39-AD8A-48BAAAFC5A20}" dt="2025-09-24T11:54:51.402" v="898" actId="478"/>
-          <ac:spMkLst>
-            <pc:docMk/>
-            <pc:sldMk cId="3765792024" sldId="301"/>
-            <ac:spMk id="15" creationId="{3BEBF157-65D4-FF9D-EAB9-800B1969AFD4}"/>
-          </ac:spMkLst>
-        </pc:spChg>
-        <pc:spChg chg="del">
-          <ac:chgData name="Martin Garrad" userId="29fa8137-b5d4-4adf-94e3-55aca812c4da" providerId="ADAL" clId="{FE7E3326-2F4E-5A39-AD8A-48BAAAFC5A20}" dt="2025-09-24T11:54:51.402" v="898" actId="478"/>
-          <ac:spMkLst>
-            <pc:docMk/>
-            <pc:sldMk cId="3765792024" sldId="301"/>
-            <ac:spMk id="16" creationId="{2ABF8661-1096-4509-E2BC-33010F5D7818}"/>
-          </ac:spMkLst>
-        </pc:spChg>
-        <pc:spChg chg="del">
-          <ac:chgData name="Martin Garrad" userId="29fa8137-b5d4-4adf-94e3-55aca812c4da" providerId="ADAL" clId="{FE7E3326-2F4E-5A39-AD8A-48BAAAFC5A20}" dt="2025-09-24T11:54:51.402" v="898" actId="478"/>
-          <ac:spMkLst>
-            <pc:docMk/>
-            <pc:sldMk cId="3765792024" sldId="301"/>
-            <ac:spMk id="17" creationId="{681F9906-0B69-B25F-E30E-C42EFA0358BD}"/>
-          </ac:spMkLst>
-        </pc:spChg>
-        <pc:spChg chg="mod">
-          <ac:chgData name="Martin Garrad" userId="29fa8137-b5d4-4adf-94e3-55aca812c4da" providerId="ADAL" clId="{FE7E3326-2F4E-5A39-AD8A-48BAAAFC5A20}" dt="2025-09-24T11:54:58.998" v="899" actId="12789"/>
-          <ac:spMkLst>
-            <pc:docMk/>
-            <pc:sldMk cId="3765792024" sldId="301"/>
-            <ac:spMk id="18" creationId="{9BA30C45-F29A-6574-B8E3-9214A8AD2610}"/>
-          </ac:spMkLst>
-        </pc:spChg>
-        <pc:spChg chg="del">
-          <ac:chgData name="Martin Garrad" userId="29fa8137-b5d4-4adf-94e3-55aca812c4da" providerId="ADAL" clId="{FE7E3326-2F4E-5A39-AD8A-48BAAAFC5A20}" dt="2025-09-24T11:54:51.402" v="898" actId="478"/>
-          <ac:spMkLst>
-            <pc:docMk/>
-            <pc:sldMk cId="3765792024" sldId="301"/>
-            <ac:spMk id="19" creationId="{8507CBA2-3A66-462C-1E05-0E519AF751A8}"/>
-          </ac:spMkLst>
-        </pc:spChg>
-        <pc:spChg chg="del">
-          <ac:chgData name="Martin Garrad" userId="29fa8137-b5d4-4adf-94e3-55aca812c4da" providerId="ADAL" clId="{FE7E3326-2F4E-5A39-AD8A-48BAAAFC5A20}" dt="2025-09-24T11:54:51.402" v="898" actId="478"/>
-          <ac:spMkLst>
-            <pc:docMk/>
-            <pc:sldMk cId="3765792024" sldId="301"/>
-            <ac:spMk id="21" creationId="{FF00F40E-5E95-6015-C259-A3FE7AEA5D40}"/>
-          </ac:spMkLst>
-        </pc:spChg>
-        <pc:spChg chg="del">
-          <ac:chgData name="Martin Garrad" userId="29fa8137-b5d4-4adf-94e3-55aca812c4da" providerId="ADAL" clId="{FE7E3326-2F4E-5A39-AD8A-48BAAAFC5A20}" dt="2025-09-24T11:54:51.402" v="898" actId="478"/>
-          <ac:spMkLst>
-            <pc:docMk/>
-            <pc:sldMk cId="3765792024" sldId="301"/>
-            <ac:spMk id="23" creationId="{2AAF34E5-E943-5189-BC4A-8093096339B4}"/>
-          </ac:spMkLst>
-        </pc:spChg>
-        <pc:spChg chg="del">
-          <ac:chgData name="Martin Garrad" userId="29fa8137-b5d4-4adf-94e3-55aca812c4da" providerId="ADAL" clId="{FE7E3326-2F4E-5A39-AD8A-48BAAAFC5A20}" dt="2025-09-24T11:54:51.402" v="898" actId="478"/>
-          <ac:spMkLst>
-            <pc:docMk/>
-            <pc:sldMk cId="3765792024" sldId="301"/>
-            <ac:spMk id="24" creationId="{7426F19D-F64B-B998-F4EF-A152D28A6A45}"/>
-          </ac:spMkLst>
-        </pc:spChg>
-        <pc:cxnChg chg="add mod">
-          <ac:chgData name="Martin Garrad" userId="29fa8137-b5d4-4adf-94e3-55aca812c4da" providerId="ADAL" clId="{FE7E3326-2F4E-5A39-AD8A-48BAAAFC5A20}" dt="2025-09-24T11:54:58.998" v="899" actId="12789"/>
-          <ac:cxnSpMkLst>
-            <pc:docMk/>
-            <pc:sldMk cId="3765792024" sldId="301"/>
-            <ac:cxnSpMk id="8" creationId="{03B971EF-6EC3-B04D-DAD7-F60C64FD61DF}"/>
-          </ac:cxnSpMkLst>
-        </pc:cxnChg>
-        <pc:cxnChg chg="mod">
-          <ac:chgData name="Martin Garrad" userId="29fa8137-b5d4-4adf-94e3-55aca812c4da" providerId="ADAL" clId="{FE7E3326-2F4E-5A39-AD8A-48BAAAFC5A20}" dt="2025-09-24T11:54:58.998" v="899" actId="12789"/>
-          <ac:cxnSpMkLst>
-            <pc:docMk/>
-            <pc:sldMk cId="3765792024" sldId="301"/>
-            <ac:cxnSpMk id="20" creationId="{B7F966EF-9DFD-3E5D-6C17-B32251857242}"/>
-          </ac:cxnSpMkLst>
-        </pc:cxnChg>
-        <pc:cxnChg chg="mod">
-          <ac:chgData name="Martin Garrad" userId="29fa8137-b5d4-4adf-94e3-55aca812c4da" providerId="ADAL" clId="{FE7E3326-2F4E-5A39-AD8A-48BAAAFC5A20}" dt="2025-09-24T11:54:58.998" v="899" actId="12789"/>
-          <ac:cxnSpMkLst>
-            <pc:docMk/>
-            <pc:sldMk cId="3765792024" sldId="301"/>
-            <ac:cxnSpMk id="22" creationId="{88D0AFD8-040B-89D7-F652-E0AC01E3E863}"/>
-          </ac:cxnSpMkLst>
-        </pc:cxnChg>
-        <pc:cxnChg chg="mod">
-          <ac:chgData name="Martin Garrad" userId="29fa8137-b5d4-4adf-94e3-55aca812c4da" providerId="ADAL" clId="{FE7E3326-2F4E-5A39-AD8A-48BAAAFC5A20}" dt="2025-09-24T11:54:58.998" v="899" actId="12789"/>
-          <ac:cxnSpMkLst>
-            <pc:docMk/>
-            <pc:sldMk cId="3765792024" sldId="301"/>
-            <ac:cxnSpMk id="26" creationId="{93CC1D0D-2EBF-CA36-5A28-946DF8B5DBF2}"/>
-          </ac:cxnSpMkLst>
-        </pc:cxnChg>
-        <pc:cxnChg chg="del">
-          <ac:chgData name="Martin Garrad" userId="29fa8137-b5d4-4adf-94e3-55aca812c4da" providerId="ADAL" clId="{FE7E3326-2F4E-5A39-AD8A-48BAAAFC5A20}" dt="2025-09-24T11:54:12.707" v="887" actId="478"/>
-          <ac:cxnSpMkLst>
-            <pc:docMk/>
-            <pc:sldMk cId="3765792024" sldId="301"/>
-            <ac:cxnSpMk id="27" creationId="{74A5B904-DAE3-0F6E-1FCC-F87E93FD4971}"/>
-          </ac:cxnSpMkLst>
-        </pc:cxnChg>
-        <pc:cxnChg chg="del">
-          <ac:chgData name="Martin Garrad" userId="29fa8137-b5d4-4adf-94e3-55aca812c4da" providerId="ADAL" clId="{FE7E3326-2F4E-5A39-AD8A-48BAAAFC5A20}" dt="2025-09-24T11:54:17.442" v="890" actId="478"/>
-          <ac:cxnSpMkLst>
-            <pc:docMk/>
-            <pc:sldMk cId="3765792024" sldId="301"/>
-            <ac:cxnSpMk id="28" creationId="{1AB9875B-7F84-E2E6-3EFE-E1CBE6FA0BDE}"/>
-          </ac:cxnSpMkLst>
-        </pc:cxnChg>
-        <pc:cxnChg chg="del">
-          <ac:chgData name="Martin Garrad" userId="29fa8137-b5d4-4adf-94e3-55aca812c4da" providerId="ADAL" clId="{FE7E3326-2F4E-5A39-AD8A-48BAAAFC5A20}" dt="2025-09-24T11:54:11.273" v="886" actId="478"/>
-          <ac:cxnSpMkLst>
-            <pc:docMk/>
-            <pc:sldMk cId="3765792024" sldId="301"/>
-            <ac:cxnSpMk id="29" creationId="{19578762-89FC-A643-8AA2-9C347FAD93A0}"/>
-          </ac:cxnSpMkLst>
-        </pc:cxnChg>
-        <pc:cxnChg chg="del">
-          <ac:chgData name="Martin Garrad" userId="29fa8137-b5d4-4adf-94e3-55aca812c4da" providerId="ADAL" clId="{FE7E3326-2F4E-5A39-AD8A-48BAAAFC5A20}" dt="2025-09-24T11:54:16.573" v="889" actId="478"/>
-          <ac:cxnSpMkLst>
-            <pc:docMk/>
-            <pc:sldMk cId="3765792024" sldId="301"/>
-            <ac:cxnSpMk id="31" creationId="{8DDD32DC-6565-FF64-B5B5-D2F3A09E84DA}"/>
-          </ac:cxnSpMkLst>
-        </pc:cxnChg>
-        <pc:cxnChg chg="del">
-          <ac:chgData name="Martin Garrad" userId="29fa8137-b5d4-4adf-94e3-55aca812c4da" providerId="ADAL" clId="{FE7E3326-2F4E-5A39-AD8A-48BAAAFC5A20}" dt="2025-09-24T11:54:51.402" v="898" actId="478"/>
-          <ac:cxnSpMkLst>
-            <pc:docMk/>
-            <pc:sldMk cId="3765792024" sldId="301"/>
-            <ac:cxnSpMk id="32" creationId="{085874BD-BFC9-D711-73FB-FC549E148693}"/>
-          </ac:cxnSpMkLst>
-        </pc:cxnChg>
-        <pc:cxnChg chg="del">
-          <ac:chgData name="Martin Garrad" userId="29fa8137-b5d4-4adf-94e3-55aca812c4da" providerId="ADAL" clId="{FE7E3326-2F4E-5A39-AD8A-48BAAAFC5A20}" dt="2025-09-24T11:54:51.402" v="898" actId="478"/>
-          <ac:cxnSpMkLst>
-            <pc:docMk/>
-            <pc:sldMk cId="3765792024" sldId="301"/>
-            <ac:cxnSpMk id="36" creationId="{4395FD17-E59F-ECE1-1E0E-0BC97E1D4F5D}"/>
-          </ac:cxnSpMkLst>
-        </pc:cxnChg>
-        <pc:cxnChg chg="mod">
-          <ac:chgData name="Martin Garrad" userId="29fa8137-b5d4-4adf-94e3-55aca812c4da" providerId="ADAL" clId="{FE7E3326-2F4E-5A39-AD8A-48BAAAFC5A20}" dt="2025-09-24T11:54:58.998" v="899" actId="12789"/>
-          <ac:cxnSpMkLst>
-            <pc:docMk/>
-            <pc:sldMk cId="3765792024" sldId="301"/>
-            <ac:cxnSpMk id="38" creationId="{D9D604DF-A66B-5735-1F5C-E61721CD2E4F}"/>
-          </ac:cxnSpMkLst>
-        </pc:cxnChg>
-        <pc:cxnChg chg="del">
-          <ac:chgData name="Martin Garrad" userId="29fa8137-b5d4-4adf-94e3-55aca812c4da" providerId="ADAL" clId="{FE7E3326-2F4E-5A39-AD8A-48BAAAFC5A20}" dt="2025-09-24T11:54:10.587" v="885" actId="478"/>
-          <ac:cxnSpMkLst>
-            <pc:docMk/>
-            <pc:sldMk cId="3765792024" sldId="301"/>
-            <ac:cxnSpMk id="39" creationId="{8434E539-2C14-BA52-0614-52DFCBABB395}"/>
-          </ac:cxnSpMkLst>
-        </pc:cxnChg>
-        <pc:cxnChg chg="del">
-          <ac:chgData name="Martin Garrad" userId="29fa8137-b5d4-4adf-94e3-55aca812c4da" providerId="ADAL" clId="{FE7E3326-2F4E-5A39-AD8A-48BAAAFC5A20}" dt="2025-09-24T11:54:09.610" v="884" actId="478"/>
-          <ac:cxnSpMkLst>
-            <pc:docMk/>
-            <pc:sldMk cId="3765792024" sldId="301"/>
-            <ac:cxnSpMk id="41" creationId="{84DAA8A6-A1FB-FC5C-20E7-1366EBD3DB75}"/>
-          </ac:cxnSpMkLst>
-        </pc:cxnChg>
-        <pc:cxnChg chg="del">
-          <ac:chgData name="Martin Garrad" userId="29fa8137-b5d4-4adf-94e3-55aca812c4da" providerId="ADAL" clId="{FE7E3326-2F4E-5A39-AD8A-48BAAAFC5A20}" dt="2025-09-24T11:54:51.402" v="898" actId="478"/>
-          <ac:cxnSpMkLst>
-            <pc:docMk/>
-            <pc:sldMk cId="3765792024" sldId="301"/>
-            <ac:cxnSpMk id="45" creationId="{307C0BBD-E4DE-14A8-1AE6-ECE032F8CFD6}"/>
-          </ac:cxnSpMkLst>
-        </pc:cxnChg>
       </pc:sldChg>
-      <pc:sldChg chg="addSp delSp modSp add mod">
-        <pc:chgData name="Martin Garrad" userId="29fa8137-b5d4-4adf-94e3-55aca812c4da" providerId="ADAL" clId="{FE7E3326-2F4E-5A39-AD8A-48BAAAFC5A20}" dt="2025-09-24T12:35:47.826" v="1423" actId="20577"/>
-        <pc:sldMkLst>
-          <pc:docMk/>
-          <pc:sldMk cId="3329769779" sldId="302"/>
-        </pc:sldMkLst>
-        <pc:spChg chg="mod">
-          <ac:chgData name="Martin Garrad" userId="29fa8137-b5d4-4adf-94e3-55aca812c4da" providerId="ADAL" clId="{FE7E3326-2F4E-5A39-AD8A-48BAAAFC5A20}" dt="2025-09-24T12:35:47.826" v="1423" actId="20577"/>
-          <ac:spMkLst>
-            <pc:docMk/>
-            <pc:sldMk cId="3329769779" sldId="302"/>
-            <ac:spMk id="7" creationId="{52F7D07C-605F-0789-D6E5-F480E86D0E9A}"/>
-          </ac:spMkLst>
-        </pc:spChg>
-        <pc:spChg chg="mod">
-          <ac:chgData name="Martin Garrad" userId="29fa8137-b5d4-4adf-94e3-55aca812c4da" providerId="ADAL" clId="{FE7E3326-2F4E-5A39-AD8A-48BAAAFC5A20}" dt="2025-09-24T12:24:47.348" v="1200"/>
-          <ac:spMkLst>
-            <pc:docMk/>
-            <pc:sldMk cId="3329769779" sldId="302"/>
-            <ac:spMk id="8" creationId="{983B35AE-5CD7-73D3-1F26-313B640EBB98}"/>
-          </ac:spMkLst>
-        </pc:spChg>
-        <pc:spChg chg="del">
-          <ac:chgData name="Martin Garrad" userId="29fa8137-b5d4-4adf-94e3-55aca812c4da" providerId="ADAL" clId="{FE7E3326-2F4E-5A39-AD8A-48BAAAFC5A20}" dt="2025-09-24T12:22:32.795" v="1190" actId="478"/>
-          <ac:spMkLst>
-            <pc:docMk/>
-            <pc:sldMk cId="3329769779" sldId="302"/>
-            <ac:spMk id="9" creationId="{55C7AAFF-8AB8-B374-5DFE-2600D77D1518}"/>
-          </ac:spMkLst>
-        </pc:spChg>
-        <pc:spChg chg="mod">
-          <ac:chgData name="Martin Garrad" userId="29fa8137-b5d4-4adf-94e3-55aca812c4da" providerId="ADAL" clId="{FE7E3326-2F4E-5A39-AD8A-48BAAAFC5A20}" dt="2025-09-24T12:24:47.348" v="1200"/>
-          <ac:spMkLst>
-            <pc:docMk/>
-            <pc:sldMk cId="3329769779" sldId="302"/>
-            <ac:spMk id="10" creationId="{79CFF80B-345F-E631-5985-8653B699455A}"/>
-          </ac:spMkLst>
-        </pc:spChg>
-        <pc:spChg chg="mod">
-          <ac:chgData name="Martin Garrad" userId="29fa8137-b5d4-4adf-94e3-55aca812c4da" providerId="ADAL" clId="{FE7E3326-2F4E-5A39-AD8A-48BAAAFC5A20}" dt="2025-09-24T12:24:47.348" v="1200"/>
-          <ac:spMkLst>
-            <pc:docMk/>
-            <pc:sldMk cId="3329769779" sldId="302"/>
-            <ac:spMk id="15" creationId="{2570723E-883F-7D0C-1E10-4AAEC40D792B}"/>
-          </ac:spMkLst>
-        </pc:spChg>
-        <pc:spChg chg="mod">
-          <ac:chgData name="Martin Garrad" userId="29fa8137-b5d4-4adf-94e3-55aca812c4da" providerId="ADAL" clId="{FE7E3326-2F4E-5A39-AD8A-48BAAAFC5A20}" dt="2025-09-24T12:24:47.348" v="1200"/>
-          <ac:spMkLst>
-            <pc:docMk/>
-            <pc:sldMk cId="3329769779" sldId="302"/>
-            <ac:spMk id="16" creationId="{B8882A41-C50F-83F8-3558-0B7AC8C16441}"/>
-          </ac:spMkLst>
-        </pc:spChg>
-        <pc:spChg chg="mod">
-          <ac:chgData name="Martin Garrad" userId="29fa8137-b5d4-4adf-94e3-55aca812c4da" providerId="ADAL" clId="{FE7E3326-2F4E-5A39-AD8A-48BAAAFC5A20}" dt="2025-09-24T12:24:47.348" v="1200"/>
-          <ac:spMkLst>
-            <pc:docMk/>
-            <pc:sldMk cId="3329769779" sldId="302"/>
-            <ac:spMk id="17" creationId="{AACADB45-A1D1-5B4E-2C8A-758D7F74380B}"/>
-          </ac:spMkLst>
-        </pc:spChg>
-        <pc:spChg chg="mod">
-          <ac:chgData name="Martin Garrad" userId="29fa8137-b5d4-4adf-94e3-55aca812c4da" providerId="ADAL" clId="{FE7E3326-2F4E-5A39-AD8A-48BAAAFC5A20}" dt="2025-09-24T12:24:47.348" v="1200"/>
-          <ac:spMkLst>
-            <pc:docMk/>
-            <pc:sldMk cId="3329769779" sldId="302"/>
-            <ac:spMk id="18" creationId="{6A9076C2-B149-4D56-2B6D-42B15EB4178F}"/>
-          </ac:spMkLst>
-        </pc:spChg>
-        <pc:spChg chg="mod">
-          <ac:chgData name="Martin Garrad" userId="29fa8137-b5d4-4adf-94e3-55aca812c4da" providerId="ADAL" clId="{FE7E3326-2F4E-5A39-AD8A-48BAAAFC5A20}" dt="2025-09-24T12:24:47.348" v="1200"/>
-          <ac:spMkLst>
-            <pc:docMk/>
-            <pc:sldMk cId="3329769779" sldId="302"/>
-            <ac:spMk id="19" creationId="{285A0A7D-2836-127F-B9B7-2929E618583A}"/>
-          </ac:spMkLst>
-        </pc:spChg>
-        <pc:spChg chg="mod">
-          <ac:chgData name="Martin Garrad" userId="29fa8137-b5d4-4adf-94e3-55aca812c4da" providerId="ADAL" clId="{FE7E3326-2F4E-5A39-AD8A-48BAAAFC5A20}" dt="2025-09-24T12:24:47.348" v="1200"/>
-          <ac:spMkLst>
-            <pc:docMk/>
-            <pc:sldMk cId="3329769779" sldId="302"/>
-            <ac:spMk id="22" creationId="{51C82E45-7FE4-EF64-86AF-9A3E8E7BC040}"/>
-          </ac:spMkLst>
-        </pc:spChg>
-        <pc:spChg chg="mod">
-          <ac:chgData name="Martin Garrad" userId="29fa8137-b5d4-4adf-94e3-55aca812c4da" providerId="ADAL" clId="{FE7E3326-2F4E-5A39-AD8A-48BAAAFC5A20}" dt="2025-09-24T12:24:47.348" v="1200"/>
-          <ac:spMkLst>
-            <pc:docMk/>
-            <pc:sldMk cId="3329769779" sldId="302"/>
-            <ac:spMk id="25" creationId="{9F570706-8C19-C693-3FD7-596E046ABA54}"/>
-          </ac:spMkLst>
-        </pc:spChg>
-        <pc:spChg chg="mod">
-          <ac:chgData name="Martin Garrad" userId="29fa8137-b5d4-4adf-94e3-55aca812c4da" providerId="ADAL" clId="{FE7E3326-2F4E-5A39-AD8A-48BAAAFC5A20}" dt="2025-09-24T12:24:47.348" v="1200"/>
-          <ac:spMkLst>
-            <pc:docMk/>
-            <pc:sldMk cId="3329769779" sldId="302"/>
-            <ac:spMk id="26" creationId="{84DE6233-922D-9ECB-4BCA-C6904408B728}"/>
-          </ac:spMkLst>
-        </pc:spChg>
-        <pc:grpChg chg="mod">
-          <ac:chgData name="Martin Garrad" userId="29fa8137-b5d4-4adf-94e3-55aca812c4da" providerId="ADAL" clId="{FE7E3326-2F4E-5A39-AD8A-48BAAAFC5A20}" dt="2025-09-24T12:24:58.975" v="1202" actId="14100"/>
-          <ac:grpSpMkLst>
-            <pc:docMk/>
-            <pc:sldMk cId="3329769779" sldId="302"/>
-            <ac:grpSpMk id="6" creationId="{9C2AFD8E-2DBF-8C17-0E3D-B9296810448E}"/>
-          </ac:grpSpMkLst>
-        </pc:grpChg>
-        <pc:picChg chg="del">
-          <ac:chgData name="Martin Garrad" userId="29fa8137-b5d4-4adf-94e3-55aca812c4da" providerId="ADAL" clId="{FE7E3326-2F4E-5A39-AD8A-48BAAAFC5A20}" dt="2025-09-24T12:22:30.259" v="1189" actId="478"/>
-          <ac:picMkLst>
-            <pc:docMk/>
-            <pc:sldMk cId="3329769779" sldId="302"/>
-            <ac:picMk id="3" creationId="{9615E968-F316-8D16-DA56-3868EB746FFC}"/>
-          </ac:picMkLst>
-        </pc:picChg>
-        <pc:picChg chg="del">
-          <ac:chgData name="Martin Garrad" userId="29fa8137-b5d4-4adf-94e3-55aca812c4da" providerId="ADAL" clId="{FE7E3326-2F4E-5A39-AD8A-48BAAAFC5A20}" dt="2025-09-24T12:22:29.641" v="1188" actId="478"/>
-          <ac:picMkLst>
-            <pc:docMk/>
-            <pc:sldMk cId="3329769779" sldId="302"/>
-            <ac:picMk id="4" creationId="{D256C1F4-812A-0373-39D9-9949C9547BFA}"/>
-          </ac:picMkLst>
-        </pc:picChg>
-        <pc:picChg chg="del">
-          <ac:chgData name="Martin Garrad" userId="29fa8137-b5d4-4adf-94e3-55aca812c4da" providerId="ADAL" clId="{FE7E3326-2F4E-5A39-AD8A-48BAAAFC5A20}" dt="2025-09-24T12:22:29.244" v="1187" actId="478"/>
-          <ac:picMkLst>
-            <pc:docMk/>
-            <pc:sldMk cId="3329769779" sldId="302"/>
-            <ac:picMk id="5" creationId="{9B6D120D-E65C-7312-76BD-8BB68AE4A4FB}"/>
-          </ac:picMkLst>
-        </pc:picChg>
-        <pc:picChg chg="add del mod">
-          <ac:chgData name="Martin Garrad" userId="29fa8137-b5d4-4adf-94e3-55aca812c4da" providerId="ADAL" clId="{FE7E3326-2F4E-5A39-AD8A-48BAAAFC5A20}" dt="2025-09-24T12:24:09.500" v="1199" actId="478"/>
-          <ac:picMkLst>
-            <pc:docMk/>
-            <pc:sldMk cId="3329769779" sldId="302"/>
-            <ac:picMk id="1026" creationId="{43C3F063-8CFF-666F-87C0-FD50FC21E8AF}"/>
-          </ac:picMkLst>
-        </pc:picChg>
-      </pc:sldChg>
-      <pc:sldChg chg="modSp add mod">
-        <pc:chgData name="Martin Garrad" userId="29fa8137-b5d4-4adf-94e3-55aca812c4da" providerId="ADAL" clId="{FE7E3326-2F4E-5A39-AD8A-48BAAAFC5A20}" dt="2025-09-24T12:31:04.359" v="1418" actId="6549"/>
+      <pc:sldChg chg="modSp mod">
+        <pc:chgData name="Martin Garrad" userId="29fa8137-b5d4-4adf-94e3-55aca812c4da" providerId="ADAL" clId="{FE7E3326-2F4E-5A39-AD8A-48BAAAFC5A20}" dt="2026-09-17T15:23:18.517" v="328" actId="20577"/>
         <pc:sldMkLst>
           <pc:docMk/>
           <pc:sldMk cId="337175999" sldId="303"/>
         </pc:sldMkLst>
         <pc:spChg chg="mod">
-          <ac:chgData name="Martin Garrad" userId="29fa8137-b5d4-4adf-94e3-55aca812c4da" providerId="ADAL" clId="{FE7E3326-2F4E-5A39-AD8A-48BAAAFC5A20}" dt="2025-09-24T12:31:04.359" v="1418" actId="6549"/>
+          <ac:chgData name="Martin Garrad" userId="29fa8137-b5d4-4adf-94e3-55aca812c4da" providerId="ADAL" clId="{FE7E3326-2F4E-5A39-AD8A-48BAAAFC5A20}" dt="2026-09-17T15:23:18.517" v="328" actId="20577"/>
           <ac:spMkLst>
             <pc:docMk/>
             <pc:sldMk cId="337175999" sldId="303"/>
             <ac:spMk id="40" creationId="{7680F1C2-933E-0BC7-A088-1EB69406BACC}"/>
           </ac:spMkLst>
         </pc:spChg>
+        <pc:picChg chg="mod">
+          <ac:chgData name="Martin Garrad" userId="29fa8137-b5d4-4adf-94e3-55aca812c4da" providerId="ADAL" clId="{FE7E3326-2F4E-5A39-AD8A-48BAAAFC5A20}" dt="2026-09-17T14:22:28.127" v="268" actId="1076"/>
+          <ac:picMkLst>
+            <pc:docMk/>
+            <pc:sldMk cId="337175999" sldId="303"/>
+            <ac:picMk id="41" creationId="{C6912690-0B8D-E770-EE3E-889E8AE2ADE5}"/>
+          </ac:picMkLst>
+        </pc:picChg>
       </pc:sldChg>
-      <pc:sldChg chg="add">
-        <pc:chgData name="Martin Garrad" userId="29fa8137-b5d4-4adf-94e3-55aca812c4da" providerId="ADAL" clId="{FE7E3326-2F4E-5A39-AD8A-48BAAAFC5A20}" dt="2025-09-24T12:30:59.145" v="1417" actId="2890"/>
+      <pc:sldChg chg="modSp mod">
+        <pc:chgData name="Martin Garrad" userId="29fa8137-b5d4-4adf-94e3-55aca812c4da" providerId="ADAL" clId="{FE7E3326-2F4E-5A39-AD8A-48BAAAFC5A20}" dt="2026-09-17T15:22:57.026" v="322" actId="20577"/>
         <pc:sldMkLst>
           <pc:docMk/>
           <pc:sldMk cId="3497437243" sldId="304"/>
         </pc:sldMkLst>
+        <pc:spChg chg="mod">
+          <ac:chgData name="Martin Garrad" userId="29fa8137-b5d4-4adf-94e3-55aca812c4da" providerId="ADAL" clId="{FE7E3326-2F4E-5A39-AD8A-48BAAAFC5A20}" dt="2026-09-17T15:22:57.026" v="322" actId="20577"/>
+          <ac:spMkLst>
+            <pc:docMk/>
+            <pc:sldMk cId="3497437243" sldId="304"/>
+            <ac:spMk id="40" creationId="{2B8F822F-739F-97B0-066F-737AB5E38D8F}"/>
+          </ac:spMkLst>
+        </pc:spChg>
+      </pc:sldChg>
+      <pc:sldChg chg="modSp mod">
+        <pc:chgData name="Martin Garrad" userId="29fa8137-b5d4-4adf-94e3-55aca812c4da" providerId="ADAL" clId="{FE7E3326-2F4E-5A39-AD8A-48BAAAFC5A20}" dt="2026-09-17T15:24:57.936" v="352" actId="20577"/>
+        <pc:sldMkLst>
+          <pc:docMk/>
+          <pc:sldMk cId="1496779790" sldId="307"/>
+        </pc:sldMkLst>
+        <pc:spChg chg="mod">
+          <ac:chgData name="Martin Garrad" userId="29fa8137-b5d4-4adf-94e3-55aca812c4da" providerId="ADAL" clId="{FE7E3326-2F4E-5A39-AD8A-48BAAAFC5A20}" dt="2026-09-17T15:24:57.936" v="352" actId="20577"/>
+          <ac:spMkLst>
+            <pc:docMk/>
+            <pc:sldMk cId="1496779790" sldId="307"/>
+            <ac:spMk id="40" creationId="{4762B84B-7569-4BA9-C640-E8971A65F392}"/>
+          </ac:spMkLst>
+        </pc:spChg>
       </pc:sldChg>
     </pc:docChg>
   </pc:docChgLst>
@@ -1319,7 +585,7 @@
           <a:p>
             <a:fld id="{822FFC1C-5262-4543-9BBE-0C5AA43086FB}" type="datetimeFigureOut">
               <a:rPr lang="en-US" smtClean="0"/>
-              <a:t>9/24/25</a:t>
+              <a:t>9/17/26</a:t>
             </a:fld>
             <a:endParaRPr lang="en-US"/>
           </a:p>
@@ -1742,7 +1008,7 @@
           <a:p>
             <a:fld id="{CB69EED5-87EA-774C-9B10-AE639F696C4C}" type="slidenum">
               <a:rPr lang="en-US" smtClean="0"/>
-              <a:t>6</a:t>
+              <a:t>5</a:t>
             </a:fld>
             <a:endParaRPr lang="en-US"/>
           </a:p>
@@ -1826,7 +1092,7 @@
           <a:p>
             <a:fld id="{CB69EED5-87EA-774C-9B10-AE639F696C4C}" type="slidenum">
               <a:rPr lang="en-US" smtClean="0"/>
-              <a:t>11</a:t>
+              <a:t>10</a:t>
             </a:fld>
             <a:endParaRPr lang="en-US"/>
           </a:p>
@@ -1997,7 +1263,7 @@
           <a:p>
             <a:fld id="{CB69EED5-87EA-774C-9B10-AE639F696C4C}" type="slidenum">
               <a:rPr lang="en-US" smtClean="0"/>
-              <a:t>39</a:t>
+              <a:t>41</a:t>
             </a:fld>
             <a:endParaRPr lang="en-US"/>
           </a:p>
@@ -2105,7 +1371,7 @@
           <a:p>
             <a:fld id="{CB69EED5-87EA-774C-9B10-AE639F696C4C}" type="slidenum">
               <a:rPr lang="en-US" smtClean="0"/>
-              <a:t>40</a:t>
+              <a:t>42</a:t>
             </a:fld>
             <a:endParaRPr lang="en-US"/>
           </a:p>
@@ -2273,7 +1539,7 @@
           <a:p>
             <a:fld id="{12CB69F8-D140-384A-AC86-0BBD87A381F0}" type="datetimeFigureOut">
               <a:rPr lang="en-US" smtClean="0"/>
-              <a:t>9/24/25</a:t>
+              <a:t>9/17/26</a:t>
             </a:fld>
             <a:endParaRPr lang="en-US"/>
           </a:p>
@@ -2473,7 +1739,7 @@
           <a:p>
             <a:fld id="{12CB69F8-D140-384A-AC86-0BBD87A381F0}" type="datetimeFigureOut">
               <a:rPr lang="en-US" smtClean="0"/>
-              <a:t>9/24/25</a:t>
+              <a:t>9/17/26</a:t>
             </a:fld>
             <a:endParaRPr lang="en-US"/>
           </a:p>
@@ -2683,7 +1949,7 @@
           <a:p>
             <a:fld id="{12CB69F8-D140-384A-AC86-0BBD87A381F0}" type="datetimeFigureOut">
               <a:rPr lang="en-US" smtClean="0"/>
-              <a:t>9/24/25</a:t>
+              <a:t>9/17/26</a:t>
             </a:fld>
             <a:endParaRPr lang="en-US"/>
           </a:p>
@@ -2883,7 +2149,7 @@
           <a:p>
             <a:fld id="{12CB69F8-D140-384A-AC86-0BBD87A381F0}" type="datetimeFigureOut">
               <a:rPr lang="en-US" smtClean="0"/>
-              <a:t>9/24/25</a:t>
+              <a:t>9/17/26</a:t>
             </a:fld>
             <a:endParaRPr lang="en-US"/>
           </a:p>
@@ -3159,7 +2425,7 @@
           <a:p>
             <a:fld id="{12CB69F8-D140-384A-AC86-0BBD87A381F0}" type="datetimeFigureOut">
               <a:rPr lang="en-US" smtClean="0"/>
-              <a:t>9/24/25</a:t>
+              <a:t>9/17/26</a:t>
             </a:fld>
             <a:endParaRPr lang="en-US"/>
           </a:p>
@@ -3427,7 +2693,7 @@
           <a:p>
             <a:fld id="{12CB69F8-D140-384A-AC86-0BBD87A381F0}" type="datetimeFigureOut">
               <a:rPr lang="en-US" smtClean="0"/>
-              <a:t>9/24/25</a:t>
+              <a:t>9/17/26</a:t>
             </a:fld>
             <a:endParaRPr lang="en-US"/>
           </a:p>
@@ -3842,7 +3108,7 @@
           <a:p>
             <a:fld id="{12CB69F8-D140-384A-AC86-0BBD87A381F0}" type="datetimeFigureOut">
               <a:rPr lang="en-US" smtClean="0"/>
-              <a:t>9/24/25</a:t>
+              <a:t>9/17/26</a:t>
             </a:fld>
             <a:endParaRPr lang="en-US"/>
           </a:p>
@@ -3984,7 +3250,7 @@
           <a:p>
             <a:fld id="{12CB69F8-D140-384A-AC86-0BBD87A381F0}" type="datetimeFigureOut">
               <a:rPr lang="en-US" smtClean="0"/>
-              <a:t>9/24/25</a:t>
+              <a:t>9/17/26</a:t>
             </a:fld>
             <a:endParaRPr lang="en-US"/>
           </a:p>
@@ -4097,7 +3363,7 @@
           <a:p>
             <a:fld id="{12CB69F8-D140-384A-AC86-0BBD87A381F0}" type="datetimeFigureOut">
               <a:rPr lang="en-US" smtClean="0"/>
-              <a:t>9/24/25</a:t>
+              <a:t>9/17/26</a:t>
             </a:fld>
             <a:endParaRPr lang="en-US"/>
           </a:p>
@@ -4410,7 +3676,7 @@
           <a:p>
             <a:fld id="{12CB69F8-D140-384A-AC86-0BBD87A381F0}" type="datetimeFigureOut">
               <a:rPr lang="en-US" smtClean="0"/>
-              <a:t>9/24/25</a:t>
+              <a:t>9/17/26</a:t>
             </a:fld>
             <a:endParaRPr lang="en-US"/>
           </a:p>
@@ -4699,7 +3965,7 @@
           <a:p>
             <a:fld id="{12CB69F8-D140-384A-AC86-0BBD87A381F0}" type="datetimeFigureOut">
               <a:rPr lang="en-US" smtClean="0"/>
-              <a:t>9/24/25</a:t>
+              <a:t>9/17/26</a:t>
             </a:fld>
             <a:endParaRPr lang="en-US"/>
           </a:p>
@@ -4942,7 +4208,7 @@
           <a:p>
             <a:fld id="{12CB69F8-D140-384A-AC86-0BBD87A381F0}" type="datetimeFigureOut">
               <a:rPr lang="en-US" smtClean="0"/>
-              <a:t>9/24/25</a:t>
+              <a:t>9/17/26</a:t>
             </a:fld>
             <a:endParaRPr lang="en-US"/>
           </a:p>
@@ -5410,7 +4676,7 @@
           <a:p>
             <a:r>
               <a:rPr lang="en-US" dirty="0"/>
-              <a:t>Computer programming and algorithms 25/26</a:t>
+              <a:t>Computer programming and algorithms 26/27</a:t>
             </a:r>
           </a:p>
           <a:p>
@@ -5442,7 +4708,7 @@
         <p:cNvPr id="1" name="">
           <a:extLst>
             <a:ext uri="{FF2B5EF4-FFF2-40B4-BE49-F238E27FC236}">
-              <a16:creationId xmlns:a16="http://schemas.microsoft.com/office/drawing/2014/main" id="{DD6FAD40-F7E2-0D67-FBAC-42FBFE829EBD}"/>
+              <a16:creationId xmlns:a16="http://schemas.microsoft.com/office/drawing/2014/main" id="{88DCBFB1-0857-988C-4047-4A2521C7CCEB}"/>
             </a:ext>
           </a:extLst>
         </p:cNvPr>
@@ -5462,7 +4728,7 @@
           <p:cNvPr id="2" name="Title 1">
             <a:extLst>
               <a:ext uri="{FF2B5EF4-FFF2-40B4-BE49-F238E27FC236}">
-                <a16:creationId xmlns:a16="http://schemas.microsoft.com/office/drawing/2014/main" id="{4C02B6B2-70E0-48BA-73D7-D240286C4F77}"/>
+                <a16:creationId xmlns:a16="http://schemas.microsoft.com/office/drawing/2014/main" id="{4A528524-C52B-E556-60D4-D9A2717B63BF}"/>
               </a:ext>
             </a:extLst>
           </p:cNvPr>
@@ -5490,7 +4756,7 @@
           <p:cNvPr id="3" name="Content Placeholder 2">
             <a:extLst>
               <a:ext uri="{FF2B5EF4-FFF2-40B4-BE49-F238E27FC236}">
-                <a16:creationId xmlns:a16="http://schemas.microsoft.com/office/drawing/2014/main" id="{D53ADDAC-B5CC-5817-A153-E10BB106ED2E}"/>
+                <a16:creationId xmlns:a16="http://schemas.microsoft.com/office/drawing/2014/main" id="{F96A6F84-FF5F-C22E-C169-997C265EF58A}"/>
               </a:ext>
             </a:extLst>
           </p:cNvPr>
@@ -5546,7 +4812,7 @@
           <p:cNvPr id="4" name="Rounded Rectangle 3">
             <a:extLst>
               <a:ext uri="{FF2B5EF4-FFF2-40B4-BE49-F238E27FC236}">
-                <a16:creationId xmlns:a16="http://schemas.microsoft.com/office/drawing/2014/main" id="{7DC282DC-EDE1-5E91-95D7-FADAD1C763D1}"/>
+                <a16:creationId xmlns:a16="http://schemas.microsoft.com/office/drawing/2014/main" id="{55212863-A943-37B7-6FF6-1C8C2259EB6A}"/>
               </a:ext>
             </a:extLst>
           </p:cNvPr>
@@ -5593,7 +4859,7 @@
           <p:cNvPr id="5" name="Rectangle 4">
             <a:extLst>
               <a:ext uri="{FF2B5EF4-FFF2-40B4-BE49-F238E27FC236}">
-                <a16:creationId xmlns:a16="http://schemas.microsoft.com/office/drawing/2014/main" id="{F92FA4B5-13E9-C3C7-CDEB-373B321516F5}"/>
+                <a16:creationId xmlns:a16="http://schemas.microsoft.com/office/drawing/2014/main" id="{4CBCD867-9F53-22DC-7616-C422FA9DCC94}"/>
               </a:ext>
             </a:extLst>
           </p:cNvPr>
@@ -5642,7 +4908,7 @@
           <p:cNvPr id="6" name="Rectangle 5">
             <a:extLst>
               <a:ext uri="{FF2B5EF4-FFF2-40B4-BE49-F238E27FC236}">
-                <a16:creationId xmlns:a16="http://schemas.microsoft.com/office/drawing/2014/main" id="{FBD06FBB-D2AE-9CC5-17AA-63BFCA8F268F}"/>
+                <a16:creationId xmlns:a16="http://schemas.microsoft.com/office/drawing/2014/main" id="{21D2C4C3-E667-DF6F-9BF5-1013CD72E16E}"/>
               </a:ext>
             </a:extLst>
           </p:cNvPr>
@@ -5691,7 +4957,7 @@
           <p:cNvPr id="9" name="Rectangle 8">
             <a:extLst>
               <a:ext uri="{FF2B5EF4-FFF2-40B4-BE49-F238E27FC236}">
-                <a16:creationId xmlns:a16="http://schemas.microsoft.com/office/drawing/2014/main" id="{164133FC-A8A7-EFE0-0AF1-7E4012EB540F}"/>
+                <a16:creationId xmlns:a16="http://schemas.microsoft.com/office/drawing/2014/main" id="{DE48C099-C1FD-3E62-06EB-57D58852BD43}"/>
               </a:ext>
             </a:extLst>
           </p:cNvPr>
@@ -5737,59 +5003,10 @@
       </p:sp>
       <p:sp>
         <p:nvSpPr>
-          <p:cNvPr id="10" name="Rectangle 9">
-            <a:extLst>
-              <a:ext uri="{FF2B5EF4-FFF2-40B4-BE49-F238E27FC236}">
-                <a16:creationId xmlns:a16="http://schemas.microsoft.com/office/drawing/2014/main" id="{B8119503-6F6B-79A1-8D84-4C15C5012FA6}"/>
-              </a:ext>
-            </a:extLst>
-          </p:cNvPr>
-          <p:cNvSpPr/>
-          <p:nvPr/>
-        </p:nvSpPr>
-        <p:spPr>
-          <a:xfrm>
-            <a:off x="2776755" y="4205148"/>
-            <a:ext cx="1077788" cy="923192"/>
-          </a:xfrm>
-          <a:prstGeom prst="rect">
-            <a:avLst/>
-          </a:prstGeom>
-        </p:spPr>
-        <p:style>
-          <a:lnRef idx="2">
-            <a:schemeClr val="accent1">
-              <a:shade val="15000"/>
-            </a:schemeClr>
-          </a:lnRef>
-          <a:fillRef idx="1">
-            <a:schemeClr val="accent1"/>
-          </a:fillRef>
-          <a:effectRef idx="0">
-            <a:schemeClr val="accent1"/>
-          </a:effectRef>
-          <a:fontRef idx="minor">
-            <a:schemeClr val="lt1"/>
-          </a:fontRef>
-        </p:style>
-        <p:txBody>
-          <a:bodyPr rtlCol="0" anchor="ctr"/>
-          <a:lstStyle/>
-          <a:p>
-            <a:pPr algn="ctr"/>
-            <a:r>
-              <a:rPr lang="en-US" dirty="0"/>
-              <a:t>Add milk</a:t>
-            </a:r>
-          </a:p>
-        </p:txBody>
-      </p:sp>
-      <p:sp>
-        <p:nvSpPr>
           <p:cNvPr id="11" name="Decision 10">
             <a:extLst>
               <a:ext uri="{FF2B5EF4-FFF2-40B4-BE49-F238E27FC236}">
-                <a16:creationId xmlns:a16="http://schemas.microsoft.com/office/drawing/2014/main" id="{62AF060D-B84D-A90A-E6EF-B8634B339DE6}"/>
+                <a16:creationId xmlns:a16="http://schemas.microsoft.com/office/drawing/2014/main" id="{FFBE2043-8B6B-E4C9-7651-E0AA4F027AED}"/>
               </a:ext>
             </a:extLst>
           </p:cNvPr>
@@ -5841,7 +5058,7 @@
           <p:cNvPr id="12" name="Rectangle 11">
             <a:extLst>
               <a:ext uri="{FF2B5EF4-FFF2-40B4-BE49-F238E27FC236}">
-                <a16:creationId xmlns:a16="http://schemas.microsoft.com/office/drawing/2014/main" id="{7A587BBF-E600-5805-E596-CC8BDA3FA6BA}"/>
+                <a16:creationId xmlns:a16="http://schemas.microsoft.com/office/drawing/2014/main" id="{7C6CB1C2-9774-5011-75CE-3CDC8E233A55}"/>
               </a:ext>
             </a:extLst>
           </p:cNvPr>
@@ -5890,7 +5107,7 @@
           <p:cNvPr id="13" name="Rectangle 12">
             <a:extLst>
               <a:ext uri="{FF2B5EF4-FFF2-40B4-BE49-F238E27FC236}">
-                <a16:creationId xmlns:a16="http://schemas.microsoft.com/office/drawing/2014/main" id="{720F0724-92B1-01EB-746F-ABE00008E3B6}"/>
+                <a16:creationId xmlns:a16="http://schemas.microsoft.com/office/drawing/2014/main" id="{D8499CEE-1FBB-F8C7-8A42-3BFAB003449A}"/>
               </a:ext>
             </a:extLst>
           </p:cNvPr>
@@ -5939,7 +5156,7 @@
           <p:cNvPr id="15" name="Decision 14">
             <a:extLst>
               <a:ext uri="{FF2B5EF4-FFF2-40B4-BE49-F238E27FC236}">
-                <a16:creationId xmlns:a16="http://schemas.microsoft.com/office/drawing/2014/main" id="{EAB1AAB0-4447-2007-22BE-0E59D4AB3761}"/>
+                <a16:creationId xmlns:a16="http://schemas.microsoft.com/office/drawing/2014/main" id="{4F5D41A1-A0FA-8E17-0AB6-863F99A0E3F0}"/>
               </a:ext>
             </a:extLst>
           </p:cNvPr>
@@ -5991,7 +5208,7 @@
           <p:cNvPr id="16" name="Rectangle 15">
             <a:extLst>
               <a:ext uri="{FF2B5EF4-FFF2-40B4-BE49-F238E27FC236}">
-                <a16:creationId xmlns:a16="http://schemas.microsoft.com/office/drawing/2014/main" id="{93D972C1-B09C-F1BE-95E0-EF9FAEB01346}"/>
+                <a16:creationId xmlns:a16="http://schemas.microsoft.com/office/drawing/2014/main" id="{290851C4-DA9B-67CE-B764-D47C704A01EF}"/>
               </a:ext>
             </a:extLst>
           </p:cNvPr>
@@ -6040,7 +5257,7 @@
           <p:cNvPr id="17" name="Rectangle 16">
             <a:extLst>
               <a:ext uri="{FF2B5EF4-FFF2-40B4-BE49-F238E27FC236}">
-                <a16:creationId xmlns:a16="http://schemas.microsoft.com/office/drawing/2014/main" id="{29DF9C24-2369-683B-6228-446F16F450FA}"/>
+                <a16:creationId xmlns:a16="http://schemas.microsoft.com/office/drawing/2014/main" id="{563838C6-2B20-7DD8-95B7-68A79F85D2E5}"/>
               </a:ext>
             </a:extLst>
           </p:cNvPr>
@@ -6089,7 +5306,7 @@
           <p:cNvPr id="18" name="Rounded Rectangle 17">
             <a:extLst>
               <a:ext uri="{FF2B5EF4-FFF2-40B4-BE49-F238E27FC236}">
-                <a16:creationId xmlns:a16="http://schemas.microsoft.com/office/drawing/2014/main" id="{B18DE44C-B6BA-53DF-6EC1-CA9C83C7672A}"/>
+                <a16:creationId xmlns:a16="http://schemas.microsoft.com/office/drawing/2014/main" id="{130D2E1E-7D6E-565D-DD97-7F0470318855}"/>
               </a:ext>
             </a:extLst>
           </p:cNvPr>
@@ -6098,7 +5315,7 @@
         </p:nvSpPr>
         <p:spPr>
           <a:xfrm>
-            <a:off x="752110" y="4341082"/>
+            <a:off x="4167268" y="5768447"/>
             <a:ext cx="1397977" cy="465992"/>
           </a:xfrm>
           <a:prstGeom prst="roundRect">
@@ -6136,7 +5353,7 @@
           <p:cNvPr id="20" name="Straight Arrow Connector 19">
             <a:extLst>
               <a:ext uri="{FF2B5EF4-FFF2-40B4-BE49-F238E27FC236}">
-                <a16:creationId xmlns:a16="http://schemas.microsoft.com/office/drawing/2014/main" id="{34551062-A526-7F5F-B07A-365A15F10CD8}"/>
+                <a16:creationId xmlns:a16="http://schemas.microsoft.com/office/drawing/2014/main" id="{DF08D3B6-3D2B-B493-18FD-77DBB6F923F7}"/>
               </a:ext>
             </a:extLst>
           </p:cNvPr>
@@ -6180,7 +5397,7 @@
           <p:cNvPr id="22" name="Straight Arrow Connector 21">
             <a:extLst>
               <a:ext uri="{FF2B5EF4-FFF2-40B4-BE49-F238E27FC236}">
-                <a16:creationId xmlns:a16="http://schemas.microsoft.com/office/drawing/2014/main" id="{316F2114-8D03-A3E7-F4DE-5A54D38A9982}"/>
+                <a16:creationId xmlns:a16="http://schemas.microsoft.com/office/drawing/2014/main" id="{ADD3603C-32C8-D8A7-4C14-E8AAC46DF886}"/>
               </a:ext>
             </a:extLst>
           </p:cNvPr>
@@ -6224,7 +5441,7 @@
           <p:cNvPr id="26" name="Straight Arrow Connector 25">
             <a:extLst>
               <a:ext uri="{FF2B5EF4-FFF2-40B4-BE49-F238E27FC236}">
-                <a16:creationId xmlns:a16="http://schemas.microsoft.com/office/drawing/2014/main" id="{F9570409-B41E-2321-459E-1B2964F01364}"/>
+                <a16:creationId xmlns:a16="http://schemas.microsoft.com/office/drawing/2014/main" id="{4C428C1C-CCFF-FAE1-FDDA-4EDB2968D79A}"/>
               </a:ext>
             </a:extLst>
           </p:cNvPr>
@@ -6268,7 +5485,7 @@
           <p:cNvPr id="27" name="Straight Arrow Connector 26">
             <a:extLst>
               <a:ext uri="{FF2B5EF4-FFF2-40B4-BE49-F238E27FC236}">
-                <a16:creationId xmlns:a16="http://schemas.microsoft.com/office/drawing/2014/main" id="{1946BDF2-C122-B5EA-8B03-FB84999CE96F}"/>
+                <a16:creationId xmlns:a16="http://schemas.microsoft.com/office/drawing/2014/main" id="{BBE7CA64-DEE4-86EA-369C-9BAC1EEA394D}"/>
               </a:ext>
             </a:extLst>
           </p:cNvPr>
@@ -6312,7 +5529,7 @@
           <p:cNvPr id="28" name="Straight Arrow Connector 27">
             <a:extLst>
               <a:ext uri="{FF2B5EF4-FFF2-40B4-BE49-F238E27FC236}">
-                <a16:creationId xmlns:a16="http://schemas.microsoft.com/office/drawing/2014/main" id="{C15A48CF-B21F-5AFB-CD47-B47E419CA92C}"/>
+                <a16:creationId xmlns:a16="http://schemas.microsoft.com/office/drawing/2014/main" id="{9940A01A-9DA0-E7B9-0C96-AB57C9182A66}"/>
               </a:ext>
             </a:extLst>
           </p:cNvPr>
@@ -6356,7 +5573,7 @@
           <p:cNvPr id="29" name="Straight Arrow Connector 28">
             <a:extLst>
               <a:ext uri="{FF2B5EF4-FFF2-40B4-BE49-F238E27FC236}">
-                <a16:creationId xmlns:a16="http://schemas.microsoft.com/office/drawing/2014/main" id="{6EAF4841-07A0-A92D-63FF-D490F7B58887}"/>
+                <a16:creationId xmlns:a16="http://schemas.microsoft.com/office/drawing/2014/main" id="{940F9387-9834-9382-A4C2-CD4715201AAE}"/>
               </a:ext>
             </a:extLst>
           </p:cNvPr>
@@ -6400,7 +5617,7 @@
           <p:cNvPr id="31" name="Straight Arrow Connector 30">
             <a:extLst>
               <a:ext uri="{FF2B5EF4-FFF2-40B4-BE49-F238E27FC236}">
-                <a16:creationId xmlns:a16="http://schemas.microsoft.com/office/drawing/2014/main" id="{807AA584-FA03-39FE-14E0-33C6017CD827}"/>
+                <a16:creationId xmlns:a16="http://schemas.microsoft.com/office/drawing/2014/main" id="{C22BB892-946F-E3C7-E4F7-947F5C47E7AB}"/>
               </a:ext>
             </a:extLst>
           </p:cNvPr>
@@ -6444,7 +5661,7 @@
           <p:cNvPr id="32" name="Straight Arrow Connector 31">
             <a:extLst>
               <a:ext uri="{FF2B5EF4-FFF2-40B4-BE49-F238E27FC236}">
-                <a16:creationId xmlns:a16="http://schemas.microsoft.com/office/drawing/2014/main" id="{D134B90F-23D1-0B25-B395-A1AC0251A44A}"/>
+                <a16:creationId xmlns:a16="http://schemas.microsoft.com/office/drawing/2014/main" id="{77410BC2-DF65-836B-9673-57F3A6DCE37B}"/>
               </a:ext>
             </a:extLst>
           </p:cNvPr>
@@ -6488,7 +5705,7 @@
           <p:cNvPr id="33" name="Straight Arrow Connector 32">
             <a:extLst>
               <a:ext uri="{FF2B5EF4-FFF2-40B4-BE49-F238E27FC236}">
-                <a16:creationId xmlns:a16="http://schemas.microsoft.com/office/drawing/2014/main" id="{4AB84D02-A7A2-D07F-2AAE-13DD39F3B271}"/>
+                <a16:creationId xmlns:a16="http://schemas.microsoft.com/office/drawing/2014/main" id="{1ED1C10C-31DE-6F71-F7E6-C4371A576E16}"/>
               </a:ext>
             </a:extLst>
           </p:cNvPr>
@@ -6532,7 +5749,7 @@
           <p:cNvPr id="36" name="Straight Arrow Connector 35">
             <a:extLst>
               <a:ext uri="{FF2B5EF4-FFF2-40B4-BE49-F238E27FC236}">
-                <a16:creationId xmlns:a16="http://schemas.microsoft.com/office/drawing/2014/main" id="{C91877BD-4655-E742-1E3A-8BAFB5441D9F}"/>
+                <a16:creationId xmlns:a16="http://schemas.microsoft.com/office/drawing/2014/main" id="{5CE19E5F-2300-3A09-8B0C-A7A9BE62E86D}"/>
               </a:ext>
             </a:extLst>
           </p:cNvPr>
@@ -6576,7 +5793,7 @@
           <p:cNvPr id="37" name="Straight Arrow Connector 36">
             <a:extLst>
               <a:ext uri="{FF2B5EF4-FFF2-40B4-BE49-F238E27FC236}">
-                <a16:creationId xmlns:a16="http://schemas.microsoft.com/office/drawing/2014/main" id="{FB86D970-3DE9-1C40-4F8F-57223C6BD2C9}"/>
+                <a16:creationId xmlns:a16="http://schemas.microsoft.com/office/drawing/2014/main" id="{C1BA1B7D-FD8A-DA63-0FA0-A456053C97AC}"/>
               </a:ext>
             </a:extLst>
           </p:cNvPr>
@@ -6620,7 +5837,7 @@
           <p:cNvPr id="39" name="Straight Connector 38">
             <a:extLst>
               <a:ext uri="{FF2B5EF4-FFF2-40B4-BE49-F238E27FC236}">
-                <a16:creationId xmlns:a16="http://schemas.microsoft.com/office/drawing/2014/main" id="{23D123E2-82BB-0CF2-CD64-17F392C554BD}"/>
+                <a16:creationId xmlns:a16="http://schemas.microsoft.com/office/drawing/2014/main" id="{C0FB1F7B-6982-22DF-60A5-2CA62EA8C959}"/>
               </a:ext>
             </a:extLst>
           </p:cNvPr>
@@ -6663,7 +5880,7 @@
           <p:cNvPr id="41" name="Straight Connector 40">
             <a:extLst>
               <a:ext uri="{FF2B5EF4-FFF2-40B4-BE49-F238E27FC236}">
-                <a16:creationId xmlns:a16="http://schemas.microsoft.com/office/drawing/2014/main" id="{69302D18-CD1D-2814-8CDD-390E25F81AC4}"/>
+                <a16:creationId xmlns:a16="http://schemas.microsoft.com/office/drawing/2014/main" id="{78857C21-FF34-8127-2AAF-8FA3FB7507A0}"/>
               </a:ext>
             </a:extLst>
           </p:cNvPr>
@@ -6706,7 +5923,7 @@
           <p:cNvPr id="45" name="Straight Arrow Connector 44">
             <a:extLst>
               <a:ext uri="{FF2B5EF4-FFF2-40B4-BE49-F238E27FC236}">
-                <a16:creationId xmlns:a16="http://schemas.microsoft.com/office/drawing/2014/main" id="{4FE03817-AE61-5242-F6BA-47F958ACE063}"/>
+                <a16:creationId xmlns:a16="http://schemas.microsoft.com/office/drawing/2014/main" id="{7509C28F-A4CA-F845-3C1D-196C32739D60}"/>
               </a:ext>
             </a:extLst>
           </p:cNvPr>
@@ -6750,1368 +5967,6 @@
           <p:cNvPr id="50" name="Straight Connector 49">
             <a:extLst>
               <a:ext uri="{FF2B5EF4-FFF2-40B4-BE49-F238E27FC236}">
-                <a16:creationId xmlns:a16="http://schemas.microsoft.com/office/drawing/2014/main" id="{6A4625DB-25B5-D432-2952-CCF6F842F117}"/>
-              </a:ext>
-            </a:extLst>
-          </p:cNvPr>
-          <p:cNvCxnSpPr>
-            <a:cxnSpLocks/>
-          </p:cNvCxnSpPr>
-          <p:nvPr/>
-        </p:nvCxnSpPr>
-        <p:spPr>
-          <a:xfrm>
-            <a:off x="7800962" y="6342730"/>
-            <a:ext cx="519642" cy="0"/>
-          </a:xfrm>
-          <a:prstGeom prst="line">
-            <a:avLst/>
-          </a:prstGeom>
-          <a:ln w="76200">
-            <a:solidFill>
-              <a:schemeClr val="accent6"/>
-            </a:solidFill>
-          </a:ln>
-        </p:spPr>
-        <p:style>
-          <a:lnRef idx="2">
-            <a:schemeClr val="accent1"/>
-          </a:lnRef>
-          <a:fillRef idx="0">
-            <a:schemeClr val="accent1"/>
-          </a:fillRef>
-          <a:effectRef idx="1">
-            <a:schemeClr val="accent1"/>
-          </a:effectRef>
-          <a:fontRef idx="minor">
-            <a:schemeClr val="tx1"/>
-          </a:fontRef>
-        </p:style>
-      </p:cxnSp>
-      <p:cxnSp>
-        <p:nvCxnSpPr>
-          <p:cNvPr id="52" name="Straight Arrow Connector 51">
-            <a:extLst>
-              <a:ext uri="{FF2B5EF4-FFF2-40B4-BE49-F238E27FC236}">
-                <a16:creationId xmlns:a16="http://schemas.microsoft.com/office/drawing/2014/main" id="{B4AB78D4-3236-69C1-03B9-859BF42104B5}"/>
-              </a:ext>
-            </a:extLst>
-          </p:cNvPr>
-          <p:cNvCxnSpPr>
-            <a:cxnSpLocks/>
-          </p:cNvCxnSpPr>
-          <p:nvPr/>
-        </p:nvCxnSpPr>
-        <p:spPr>
-          <a:xfrm flipH="1" flipV="1">
-            <a:off x="7599776" y="5128340"/>
-            <a:ext cx="712658" cy="1214390"/>
-          </a:xfrm>
-          <a:prstGeom prst="straightConnector1">
-            <a:avLst/>
-          </a:prstGeom>
-          <a:ln w="76200">
-            <a:solidFill>
-              <a:schemeClr val="accent6"/>
-            </a:solidFill>
-            <a:tailEnd type="triangle"/>
-          </a:ln>
-        </p:spPr>
-        <p:style>
-          <a:lnRef idx="2">
-            <a:schemeClr val="accent1"/>
-          </a:lnRef>
-          <a:fillRef idx="0">
-            <a:schemeClr val="accent1"/>
-          </a:fillRef>
-          <a:effectRef idx="1">
-            <a:schemeClr val="accent1"/>
-          </a:effectRef>
-          <a:fontRef idx="minor">
-            <a:schemeClr val="tx1"/>
-          </a:fontRef>
-        </p:style>
-      </p:cxnSp>
-    </p:spTree>
-    <p:extLst>
-      <p:ext uri="{BB962C8B-B14F-4D97-AF65-F5344CB8AC3E}">
-        <p14:creationId xmlns:p14="http://schemas.microsoft.com/office/powerpoint/2010/main" val="704847650"/>
-      </p:ext>
-    </p:extLst>
-  </p:cSld>
-  <p:clrMapOvr>
-    <a:masterClrMapping/>
-  </p:clrMapOvr>
-</p:sld>
-</file>
-
-<file path=ppt/slides/slide11.xml><?xml version="1.0" encoding="utf-8"?>
-<p:sld xmlns:a="http://schemas.openxmlformats.org/drawingml/2006/main" xmlns:r="http://schemas.openxmlformats.org/officeDocument/2006/relationships" xmlns:p="http://schemas.openxmlformats.org/presentationml/2006/main">
-  <p:cSld>
-    <p:spTree>
-      <p:nvGrpSpPr>
-        <p:cNvPr id="1" name="">
-          <a:extLst>
-            <a:ext uri="{FF2B5EF4-FFF2-40B4-BE49-F238E27FC236}">
-              <a16:creationId xmlns:a16="http://schemas.microsoft.com/office/drawing/2014/main" id="{88DCBFB1-0857-988C-4047-4A2521C7CCEB}"/>
-            </a:ext>
-          </a:extLst>
-        </p:cNvPr>
-        <p:cNvGrpSpPr/>
-        <p:nvPr/>
-      </p:nvGrpSpPr>
-      <p:grpSpPr>
-        <a:xfrm>
-          <a:off x="0" y="0"/>
-          <a:ext cx="0" cy="0"/>
-          <a:chOff x="0" y="0"/>
-          <a:chExt cx="0" cy="0"/>
-        </a:xfrm>
-      </p:grpSpPr>
-      <p:sp>
-        <p:nvSpPr>
-          <p:cNvPr id="2" name="Title 1">
-            <a:extLst>
-              <a:ext uri="{FF2B5EF4-FFF2-40B4-BE49-F238E27FC236}">
-                <a16:creationId xmlns:a16="http://schemas.microsoft.com/office/drawing/2014/main" id="{4A528524-C52B-E556-60D4-D9A2717B63BF}"/>
-              </a:ext>
-            </a:extLst>
-          </p:cNvPr>
-          <p:cNvSpPr>
-            <a:spLocks noGrp="1"/>
-          </p:cNvSpPr>
-          <p:nvPr>
-            <p:ph type="title"/>
-          </p:nvPr>
-        </p:nvSpPr>
-        <p:spPr/>
-        <p:txBody>
-          <a:bodyPr/>
-          <a:lstStyle/>
-          <a:p>
-            <a:r>
-              <a:rPr lang="en-US" dirty="0"/>
-              <a:t>Designing algorithms</a:t>
-            </a:r>
-          </a:p>
-        </p:txBody>
-      </p:sp>
-      <p:sp>
-        <p:nvSpPr>
-          <p:cNvPr id="3" name="Content Placeholder 2">
-            <a:extLst>
-              <a:ext uri="{FF2B5EF4-FFF2-40B4-BE49-F238E27FC236}">
-                <a16:creationId xmlns:a16="http://schemas.microsoft.com/office/drawing/2014/main" id="{F96A6F84-FF5F-C22E-C169-997C265EF58A}"/>
-              </a:ext>
-            </a:extLst>
-          </p:cNvPr>
-          <p:cNvSpPr>
-            <a:spLocks noGrp="1"/>
-          </p:cNvSpPr>
-          <p:nvPr>
-            <p:ph idx="1"/>
-          </p:nvPr>
-        </p:nvSpPr>
-        <p:spPr>
-          <a:xfrm>
-            <a:off x="752110" y="1704025"/>
-            <a:ext cx="10515600" cy="4351338"/>
-          </a:xfrm>
-        </p:spPr>
-        <p:txBody>
-          <a:bodyPr>
-            <a:normAutofit/>
-          </a:bodyPr>
-          <a:lstStyle/>
-          <a:p>
-            <a:pPr marL="0" indent="0">
-              <a:buNone/>
-            </a:pPr>
-            <a:r>
-              <a:rPr lang="en-US" dirty="0"/>
-              <a:t>Example:  An algorithm for making a cup of tea.</a:t>
-            </a:r>
-          </a:p>
-          <a:p>
-            <a:pPr marL="0" indent="0">
-              <a:buNone/>
-            </a:pPr>
-            <a:endParaRPr lang="en-US" dirty="0"/>
-          </a:p>
-          <a:p>
-            <a:pPr marL="0" indent="0">
-              <a:buNone/>
-            </a:pPr>
-            <a:endParaRPr lang="en-US" dirty="0"/>
-          </a:p>
-          <a:p>
-            <a:pPr marL="0" indent="0">
-              <a:buNone/>
-            </a:pPr>
-            <a:endParaRPr lang="en-US" dirty="0"/>
-          </a:p>
-        </p:txBody>
-      </p:sp>
-      <p:sp>
-        <p:nvSpPr>
-          <p:cNvPr id="4" name="Rounded Rectangle 3">
-            <a:extLst>
-              <a:ext uri="{FF2B5EF4-FFF2-40B4-BE49-F238E27FC236}">
-                <a16:creationId xmlns:a16="http://schemas.microsoft.com/office/drawing/2014/main" id="{55212863-A943-37B7-6FF6-1C8C2259EB6A}"/>
-              </a:ext>
-            </a:extLst>
-          </p:cNvPr>
-          <p:cNvSpPr/>
-          <p:nvPr/>
-        </p:nvSpPr>
-        <p:spPr>
-          <a:xfrm>
-            <a:off x="838200" y="2583533"/>
-            <a:ext cx="1247773" cy="465992"/>
-          </a:xfrm>
-          <a:prstGeom prst="roundRect">
-            <a:avLst/>
-          </a:prstGeom>
-        </p:spPr>
-        <p:style>
-          <a:lnRef idx="2">
-            <a:schemeClr val="accent6"/>
-          </a:lnRef>
-          <a:fillRef idx="1">
-            <a:schemeClr val="lt1"/>
-          </a:fillRef>
-          <a:effectRef idx="0">
-            <a:schemeClr val="accent6"/>
-          </a:effectRef>
-          <a:fontRef idx="minor">
-            <a:schemeClr val="dk1"/>
-          </a:fontRef>
-        </p:style>
-        <p:txBody>
-          <a:bodyPr rtlCol="0" anchor="ctr"/>
-          <a:lstStyle/>
-          <a:p>
-            <a:pPr algn="ctr"/>
-            <a:r>
-              <a:rPr lang="en-US" dirty="0"/>
-              <a:t>Make tea</a:t>
-            </a:r>
-          </a:p>
-        </p:txBody>
-      </p:sp>
-      <p:sp>
-        <p:nvSpPr>
-          <p:cNvPr id="5" name="Rectangle 4">
-            <a:extLst>
-              <a:ext uri="{FF2B5EF4-FFF2-40B4-BE49-F238E27FC236}">
-                <a16:creationId xmlns:a16="http://schemas.microsoft.com/office/drawing/2014/main" id="{4CBCD867-9F53-22DC-7616-C422FA9DCC94}"/>
-              </a:ext>
-            </a:extLst>
-          </p:cNvPr>
-          <p:cNvSpPr/>
-          <p:nvPr/>
-        </p:nvSpPr>
-        <p:spPr>
-          <a:xfrm>
-            <a:off x="2776755" y="2354933"/>
-            <a:ext cx="1247773" cy="923192"/>
-          </a:xfrm>
-          <a:prstGeom prst="rect">
-            <a:avLst/>
-          </a:prstGeom>
-        </p:spPr>
-        <p:style>
-          <a:lnRef idx="2">
-            <a:schemeClr val="accent1">
-              <a:shade val="15000"/>
-            </a:schemeClr>
-          </a:lnRef>
-          <a:fillRef idx="1">
-            <a:schemeClr val="accent1"/>
-          </a:fillRef>
-          <a:effectRef idx="0">
-            <a:schemeClr val="accent1"/>
-          </a:effectRef>
-          <a:fontRef idx="minor">
-            <a:schemeClr val="lt1"/>
-          </a:fontRef>
-        </p:style>
-        <p:txBody>
-          <a:bodyPr rtlCol="0" anchor="ctr"/>
-          <a:lstStyle/>
-          <a:p>
-            <a:pPr algn="ctr"/>
-            <a:r>
-              <a:rPr lang="en-US" dirty="0"/>
-              <a:t>Fill kettle with water</a:t>
-            </a:r>
-          </a:p>
-        </p:txBody>
-      </p:sp>
-      <p:sp>
-        <p:nvSpPr>
-          <p:cNvPr id="6" name="Rectangle 5">
-            <a:extLst>
-              <a:ext uri="{FF2B5EF4-FFF2-40B4-BE49-F238E27FC236}">
-                <a16:creationId xmlns:a16="http://schemas.microsoft.com/office/drawing/2014/main" id="{21D2C4C3-E667-DF6F-9BF5-1013CD72E16E}"/>
-              </a:ext>
-            </a:extLst>
-          </p:cNvPr>
-          <p:cNvSpPr/>
-          <p:nvPr/>
-        </p:nvSpPr>
-        <p:spPr>
-          <a:xfrm>
-            <a:off x="4715310" y="2365131"/>
-            <a:ext cx="943709" cy="923192"/>
-          </a:xfrm>
-          <a:prstGeom prst="rect">
-            <a:avLst/>
-          </a:prstGeom>
-        </p:spPr>
-        <p:style>
-          <a:lnRef idx="2">
-            <a:schemeClr val="accent1">
-              <a:shade val="15000"/>
-            </a:schemeClr>
-          </a:lnRef>
-          <a:fillRef idx="1">
-            <a:schemeClr val="accent1"/>
-          </a:fillRef>
-          <a:effectRef idx="0">
-            <a:schemeClr val="accent1"/>
-          </a:effectRef>
-          <a:fontRef idx="minor">
-            <a:schemeClr val="lt1"/>
-          </a:fontRef>
-        </p:style>
-        <p:txBody>
-          <a:bodyPr rtlCol="0" anchor="ctr"/>
-          <a:lstStyle/>
-          <a:p>
-            <a:pPr algn="ctr"/>
-            <a:r>
-              <a:rPr lang="en-US" dirty="0"/>
-              <a:t>Turn on kettle</a:t>
-            </a:r>
-          </a:p>
-        </p:txBody>
-      </p:sp>
-      <p:sp>
-        <p:nvSpPr>
-          <p:cNvPr id="9" name="Rectangle 8">
-            <a:extLst>
-              <a:ext uri="{FF2B5EF4-FFF2-40B4-BE49-F238E27FC236}">
-                <a16:creationId xmlns:a16="http://schemas.microsoft.com/office/drawing/2014/main" id="{DE48C099-C1FD-3E62-06EB-57D58852BD43}"/>
-              </a:ext>
-            </a:extLst>
-          </p:cNvPr>
-          <p:cNvSpPr/>
-          <p:nvPr/>
-        </p:nvSpPr>
-        <p:spPr>
-          <a:xfrm>
-            <a:off x="6349801" y="2386929"/>
-            <a:ext cx="1249975" cy="923192"/>
-          </a:xfrm>
-          <a:prstGeom prst="rect">
-            <a:avLst/>
-          </a:prstGeom>
-        </p:spPr>
-        <p:style>
-          <a:lnRef idx="2">
-            <a:schemeClr val="accent1">
-              <a:shade val="15000"/>
-            </a:schemeClr>
-          </a:lnRef>
-          <a:fillRef idx="1">
-            <a:schemeClr val="accent1"/>
-          </a:fillRef>
-          <a:effectRef idx="0">
-            <a:schemeClr val="accent1"/>
-          </a:effectRef>
-          <a:fontRef idx="minor">
-            <a:schemeClr val="lt1"/>
-          </a:fontRef>
-        </p:style>
-        <p:txBody>
-          <a:bodyPr rtlCol="0" anchor="ctr"/>
-          <a:lstStyle/>
-          <a:p>
-            <a:pPr algn="ctr"/>
-            <a:r>
-              <a:rPr lang="en-US" dirty="0"/>
-              <a:t>Put teabag in cup</a:t>
-            </a:r>
-          </a:p>
-        </p:txBody>
-      </p:sp>
-      <p:sp>
-        <p:nvSpPr>
-          <p:cNvPr id="11" name="Decision 10">
-            <a:extLst>
-              <a:ext uri="{FF2B5EF4-FFF2-40B4-BE49-F238E27FC236}">
-                <a16:creationId xmlns:a16="http://schemas.microsoft.com/office/drawing/2014/main" id="{FFBE2043-8B6B-E4C9-7651-E0AA4F027AED}"/>
-              </a:ext>
-            </a:extLst>
-          </p:cNvPr>
-          <p:cNvSpPr/>
-          <p:nvPr/>
-        </p:nvSpPr>
-        <p:spPr>
-          <a:xfrm>
-            <a:off x="8290558" y="2023023"/>
-            <a:ext cx="1673472" cy="1587012"/>
-          </a:xfrm>
-          <a:prstGeom prst="flowChartDecision">
-            <a:avLst/>
-          </a:prstGeom>
-          <a:solidFill>
-            <a:schemeClr val="accent2"/>
-          </a:solidFill>
-        </p:spPr>
-        <p:style>
-          <a:lnRef idx="2">
-            <a:schemeClr val="accent1">
-              <a:shade val="15000"/>
-            </a:schemeClr>
-          </a:lnRef>
-          <a:fillRef idx="1">
-            <a:schemeClr val="accent1"/>
-          </a:fillRef>
-          <a:effectRef idx="0">
-            <a:schemeClr val="accent1"/>
-          </a:effectRef>
-          <a:fontRef idx="minor">
-            <a:schemeClr val="lt1"/>
-          </a:fontRef>
-        </p:style>
-        <p:txBody>
-          <a:bodyPr rtlCol="0" anchor="ctr"/>
-          <a:lstStyle/>
-          <a:p>
-            <a:pPr algn="ctr"/>
-            <a:r>
-              <a:rPr lang="en-US" dirty="0"/>
-              <a:t>Has kettle boiled?</a:t>
-            </a:r>
-          </a:p>
-        </p:txBody>
-      </p:sp>
-      <p:sp>
-        <p:nvSpPr>
-          <p:cNvPr id="12" name="Rectangle 11">
-            <a:extLst>
-              <a:ext uri="{FF2B5EF4-FFF2-40B4-BE49-F238E27FC236}">
-                <a16:creationId xmlns:a16="http://schemas.microsoft.com/office/drawing/2014/main" id="{7C6CB1C2-9774-5011-75CE-3CDC8E233A55}"/>
-              </a:ext>
-            </a:extLst>
-          </p:cNvPr>
-          <p:cNvSpPr/>
-          <p:nvPr/>
-        </p:nvSpPr>
-        <p:spPr>
-          <a:xfrm>
-            <a:off x="10654811" y="2386929"/>
-            <a:ext cx="1397977" cy="923192"/>
-          </a:xfrm>
-          <a:prstGeom prst="rect">
-            <a:avLst/>
-          </a:prstGeom>
-        </p:spPr>
-        <p:style>
-          <a:lnRef idx="2">
-            <a:schemeClr val="accent1">
-              <a:shade val="15000"/>
-            </a:schemeClr>
-          </a:lnRef>
-          <a:fillRef idx="1">
-            <a:schemeClr val="accent1"/>
-          </a:fillRef>
-          <a:effectRef idx="0">
-            <a:schemeClr val="accent1"/>
-          </a:effectRef>
-          <a:fontRef idx="minor">
-            <a:schemeClr val="lt1"/>
-          </a:fontRef>
-        </p:style>
-        <p:txBody>
-          <a:bodyPr rtlCol="0" anchor="ctr"/>
-          <a:lstStyle/>
-          <a:p>
-            <a:pPr algn="ctr"/>
-            <a:r>
-              <a:rPr lang="en-US" dirty="0"/>
-              <a:t>Wait 30 seconds</a:t>
-            </a:r>
-          </a:p>
-        </p:txBody>
-      </p:sp>
-      <p:sp>
-        <p:nvSpPr>
-          <p:cNvPr id="13" name="Rectangle 12">
-            <a:extLst>
-              <a:ext uri="{FF2B5EF4-FFF2-40B4-BE49-F238E27FC236}">
-                <a16:creationId xmlns:a16="http://schemas.microsoft.com/office/drawing/2014/main" id="{D8499CEE-1FBB-F8C7-8A42-3BFAB003449A}"/>
-              </a:ext>
-            </a:extLst>
-          </p:cNvPr>
-          <p:cNvSpPr/>
-          <p:nvPr/>
-        </p:nvSpPr>
-        <p:spPr>
-          <a:xfrm>
-            <a:off x="8629981" y="4230783"/>
-            <a:ext cx="1196301" cy="923192"/>
-          </a:xfrm>
-          <a:prstGeom prst="rect">
-            <a:avLst/>
-          </a:prstGeom>
-        </p:spPr>
-        <p:style>
-          <a:lnRef idx="2">
-            <a:schemeClr val="accent1">
-              <a:shade val="15000"/>
-            </a:schemeClr>
-          </a:lnRef>
-          <a:fillRef idx="1">
-            <a:schemeClr val="accent1"/>
-          </a:fillRef>
-          <a:effectRef idx="0">
-            <a:schemeClr val="accent1"/>
-          </a:effectRef>
-          <a:fontRef idx="minor">
-            <a:schemeClr val="lt1"/>
-          </a:fontRef>
-        </p:style>
-        <p:txBody>
-          <a:bodyPr rtlCol="0" anchor="ctr"/>
-          <a:lstStyle/>
-          <a:p>
-            <a:pPr algn="ctr"/>
-            <a:r>
-              <a:rPr lang="en-US" dirty="0"/>
-              <a:t>Pour water into cup</a:t>
-            </a:r>
-          </a:p>
-        </p:txBody>
-      </p:sp>
-      <p:sp>
-        <p:nvSpPr>
-          <p:cNvPr id="15" name="Decision 14">
-            <a:extLst>
-              <a:ext uri="{FF2B5EF4-FFF2-40B4-BE49-F238E27FC236}">
-                <a16:creationId xmlns:a16="http://schemas.microsoft.com/office/drawing/2014/main" id="{4F5D41A1-A0FA-8E17-0AB6-863F99A0E3F0}"/>
-              </a:ext>
-            </a:extLst>
-          </p:cNvPr>
-          <p:cNvSpPr/>
-          <p:nvPr/>
-        </p:nvSpPr>
-        <p:spPr>
-          <a:xfrm>
-            <a:off x="6077387" y="3874295"/>
-            <a:ext cx="1983396" cy="1587012"/>
-          </a:xfrm>
-          <a:prstGeom prst="flowChartDecision">
-            <a:avLst/>
-          </a:prstGeom>
-          <a:solidFill>
-            <a:schemeClr val="accent2"/>
-          </a:solidFill>
-        </p:spPr>
-        <p:style>
-          <a:lnRef idx="2">
-            <a:schemeClr val="accent1">
-              <a:shade val="15000"/>
-            </a:schemeClr>
-          </a:lnRef>
-          <a:fillRef idx="1">
-            <a:schemeClr val="accent1"/>
-          </a:fillRef>
-          <a:effectRef idx="0">
-            <a:schemeClr val="accent1"/>
-          </a:effectRef>
-          <a:fontRef idx="minor">
-            <a:schemeClr val="lt1"/>
-          </a:fontRef>
-        </p:style>
-        <p:txBody>
-          <a:bodyPr rtlCol="0" anchor="ctr"/>
-          <a:lstStyle/>
-          <a:p>
-            <a:pPr algn="ctr"/>
-            <a:r>
-              <a:rPr lang="en-US" dirty="0"/>
-              <a:t>Has tea steeped?</a:t>
-            </a:r>
-          </a:p>
-        </p:txBody>
-      </p:sp>
-      <p:sp>
-        <p:nvSpPr>
-          <p:cNvPr id="16" name="Rectangle 15">
-            <a:extLst>
-              <a:ext uri="{FF2B5EF4-FFF2-40B4-BE49-F238E27FC236}">
-                <a16:creationId xmlns:a16="http://schemas.microsoft.com/office/drawing/2014/main" id="{290851C4-DA9B-67CE-B764-D47C704A01EF}"/>
-              </a:ext>
-            </a:extLst>
-          </p:cNvPr>
-          <p:cNvSpPr/>
-          <p:nvPr/>
-        </p:nvSpPr>
-        <p:spPr>
-          <a:xfrm>
-            <a:off x="6370095" y="6025481"/>
-            <a:ext cx="1397977" cy="612711"/>
-          </a:xfrm>
-          <a:prstGeom prst="rect">
-            <a:avLst/>
-          </a:prstGeom>
-        </p:spPr>
-        <p:style>
-          <a:lnRef idx="2">
-            <a:schemeClr val="accent1">
-              <a:shade val="15000"/>
-            </a:schemeClr>
-          </a:lnRef>
-          <a:fillRef idx="1">
-            <a:schemeClr val="accent1"/>
-          </a:fillRef>
-          <a:effectRef idx="0">
-            <a:schemeClr val="accent1"/>
-          </a:effectRef>
-          <a:fontRef idx="minor">
-            <a:schemeClr val="lt1"/>
-          </a:fontRef>
-        </p:style>
-        <p:txBody>
-          <a:bodyPr rtlCol="0" anchor="ctr"/>
-          <a:lstStyle/>
-          <a:p>
-            <a:pPr algn="ctr"/>
-            <a:r>
-              <a:rPr lang="en-US" dirty="0"/>
-              <a:t>Wait 10 seconds</a:t>
-            </a:r>
-          </a:p>
-        </p:txBody>
-      </p:sp>
-      <p:sp>
-        <p:nvSpPr>
-          <p:cNvPr id="17" name="Rectangle 16">
-            <a:extLst>
-              <a:ext uri="{FF2B5EF4-FFF2-40B4-BE49-F238E27FC236}">
-                <a16:creationId xmlns:a16="http://schemas.microsoft.com/office/drawing/2014/main" id="{563838C6-2B20-7DD8-95B7-68A79F85D2E5}"/>
-              </a:ext>
-            </a:extLst>
-          </p:cNvPr>
-          <p:cNvSpPr/>
-          <p:nvPr/>
-        </p:nvSpPr>
-        <p:spPr>
-          <a:xfrm>
-            <a:off x="4513562" y="4206205"/>
-            <a:ext cx="994627" cy="923192"/>
-          </a:xfrm>
-          <a:prstGeom prst="rect">
-            <a:avLst/>
-          </a:prstGeom>
-        </p:spPr>
-        <p:style>
-          <a:lnRef idx="2">
-            <a:schemeClr val="accent1">
-              <a:shade val="15000"/>
-            </a:schemeClr>
-          </a:lnRef>
-          <a:fillRef idx="1">
-            <a:schemeClr val="accent1"/>
-          </a:fillRef>
-          <a:effectRef idx="0">
-            <a:schemeClr val="accent1"/>
-          </a:effectRef>
-          <a:fontRef idx="minor">
-            <a:schemeClr val="lt1"/>
-          </a:fontRef>
-        </p:style>
-        <p:txBody>
-          <a:bodyPr rtlCol="0" anchor="ctr"/>
-          <a:lstStyle/>
-          <a:p>
-            <a:pPr algn="ctr"/>
-            <a:r>
-              <a:rPr lang="en-US" dirty="0"/>
-              <a:t>Remove teabag</a:t>
-            </a:r>
-          </a:p>
-        </p:txBody>
-      </p:sp>
-      <p:sp>
-        <p:nvSpPr>
-          <p:cNvPr id="18" name="Rounded Rectangle 17">
-            <a:extLst>
-              <a:ext uri="{FF2B5EF4-FFF2-40B4-BE49-F238E27FC236}">
-                <a16:creationId xmlns:a16="http://schemas.microsoft.com/office/drawing/2014/main" id="{130D2E1E-7D6E-565D-DD97-7F0470318855}"/>
-              </a:ext>
-            </a:extLst>
-          </p:cNvPr>
-          <p:cNvSpPr/>
-          <p:nvPr/>
-        </p:nvSpPr>
-        <p:spPr>
-          <a:xfrm>
-            <a:off x="4167268" y="5768447"/>
-            <a:ext cx="1397977" cy="465992"/>
-          </a:xfrm>
-          <a:prstGeom prst="roundRect">
-            <a:avLst/>
-          </a:prstGeom>
-        </p:spPr>
-        <p:style>
-          <a:lnRef idx="2">
-            <a:schemeClr val="accent6"/>
-          </a:lnRef>
-          <a:fillRef idx="1">
-            <a:schemeClr val="lt1"/>
-          </a:fillRef>
-          <a:effectRef idx="0">
-            <a:schemeClr val="accent6"/>
-          </a:effectRef>
-          <a:fontRef idx="minor">
-            <a:schemeClr val="dk1"/>
-          </a:fontRef>
-        </p:style>
-        <p:txBody>
-          <a:bodyPr rtlCol="0" anchor="ctr"/>
-          <a:lstStyle/>
-          <a:p>
-            <a:pPr algn="ctr"/>
-            <a:r>
-              <a:rPr lang="en-US" dirty="0"/>
-              <a:t>Tea is made</a:t>
-            </a:r>
-          </a:p>
-        </p:txBody>
-      </p:sp>
-      <p:cxnSp>
-        <p:nvCxnSpPr>
-          <p:cNvPr id="20" name="Straight Arrow Connector 19">
-            <a:extLst>
-              <a:ext uri="{FF2B5EF4-FFF2-40B4-BE49-F238E27FC236}">
-                <a16:creationId xmlns:a16="http://schemas.microsoft.com/office/drawing/2014/main" id="{DF08D3B6-3D2B-B493-18FD-77DBB6F923F7}"/>
-              </a:ext>
-            </a:extLst>
-          </p:cNvPr>
-          <p:cNvCxnSpPr>
-            <a:cxnSpLocks/>
-          </p:cNvCxnSpPr>
-          <p:nvPr/>
-        </p:nvCxnSpPr>
-        <p:spPr>
-          <a:xfrm>
-            <a:off x="2154115" y="2826727"/>
-            <a:ext cx="585057" cy="0"/>
-          </a:xfrm>
-          <a:prstGeom prst="straightConnector1">
-            <a:avLst/>
-          </a:prstGeom>
-          <a:ln w="76200">
-            <a:solidFill>
-              <a:schemeClr val="accent6"/>
-            </a:solidFill>
-            <a:tailEnd type="triangle"/>
-          </a:ln>
-        </p:spPr>
-        <p:style>
-          <a:lnRef idx="2">
-            <a:schemeClr val="accent1"/>
-          </a:lnRef>
-          <a:fillRef idx="0">
-            <a:schemeClr val="accent1"/>
-          </a:fillRef>
-          <a:effectRef idx="1">
-            <a:schemeClr val="accent1"/>
-          </a:effectRef>
-          <a:fontRef idx="minor">
-            <a:schemeClr val="tx1"/>
-          </a:fontRef>
-        </p:style>
-      </p:cxnSp>
-      <p:cxnSp>
-        <p:nvCxnSpPr>
-          <p:cNvPr id="22" name="Straight Arrow Connector 21">
-            <a:extLst>
-              <a:ext uri="{FF2B5EF4-FFF2-40B4-BE49-F238E27FC236}">
-                <a16:creationId xmlns:a16="http://schemas.microsoft.com/office/drawing/2014/main" id="{ADD3603C-32C8-D8A7-4C14-E8AAC46DF886}"/>
-              </a:ext>
-            </a:extLst>
-          </p:cNvPr>
-          <p:cNvCxnSpPr>
-            <a:cxnSpLocks/>
-          </p:cNvCxnSpPr>
-          <p:nvPr/>
-        </p:nvCxnSpPr>
-        <p:spPr>
-          <a:xfrm>
-            <a:off x="4088423" y="2820865"/>
-            <a:ext cx="599343" cy="0"/>
-          </a:xfrm>
-          <a:prstGeom prst="straightConnector1">
-            <a:avLst/>
-          </a:prstGeom>
-          <a:ln w="76200">
-            <a:solidFill>
-              <a:schemeClr val="accent6"/>
-            </a:solidFill>
-            <a:tailEnd type="triangle"/>
-          </a:ln>
-        </p:spPr>
-        <p:style>
-          <a:lnRef idx="2">
-            <a:schemeClr val="accent1"/>
-          </a:lnRef>
-          <a:fillRef idx="0">
-            <a:schemeClr val="accent1"/>
-          </a:fillRef>
-          <a:effectRef idx="1">
-            <a:schemeClr val="accent1"/>
-          </a:effectRef>
-          <a:fontRef idx="minor">
-            <a:schemeClr val="tx1"/>
-          </a:fontRef>
-        </p:style>
-      </p:cxnSp>
-      <p:cxnSp>
-        <p:nvCxnSpPr>
-          <p:cNvPr id="26" name="Straight Arrow Connector 25">
-            <a:extLst>
-              <a:ext uri="{FF2B5EF4-FFF2-40B4-BE49-F238E27FC236}">
-                <a16:creationId xmlns:a16="http://schemas.microsoft.com/office/drawing/2014/main" id="{4C428C1C-CCFF-FAE1-FDDA-4EDB2968D79A}"/>
-              </a:ext>
-            </a:extLst>
-          </p:cNvPr>
-          <p:cNvCxnSpPr>
-            <a:cxnSpLocks/>
-          </p:cNvCxnSpPr>
-          <p:nvPr/>
-        </p:nvCxnSpPr>
-        <p:spPr>
-          <a:xfrm>
-            <a:off x="5715290" y="2820865"/>
-            <a:ext cx="599343" cy="0"/>
-          </a:xfrm>
-          <a:prstGeom prst="straightConnector1">
-            <a:avLst/>
-          </a:prstGeom>
-          <a:ln w="76200">
-            <a:solidFill>
-              <a:schemeClr val="accent6"/>
-            </a:solidFill>
-            <a:tailEnd type="triangle"/>
-          </a:ln>
-        </p:spPr>
-        <p:style>
-          <a:lnRef idx="2">
-            <a:schemeClr val="accent1"/>
-          </a:lnRef>
-          <a:fillRef idx="0">
-            <a:schemeClr val="accent1"/>
-          </a:fillRef>
-          <a:effectRef idx="1">
-            <a:schemeClr val="accent1"/>
-          </a:effectRef>
-          <a:fontRef idx="minor">
-            <a:schemeClr val="tx1"/>
-          </a:fontRef>
-        </p:style>
-      </p:cxnSp>
-      <p:cxnSp>
-        <p:nvCxnSpPr>
-          <p:cNvPr id="27" name="Straight Arrow Connector 26">
-            <a:extLst>
-              <a:ext uri="{FF2B5EF4-FFF2-40B4-BE49-F238E27FC236}">
-                <a16:creationId xmlns:a16="http://schemas.microsoft.com/office/drawing/2014/main" id="{BBE7CA64-DEE4-86EA-369C-9BAC1EEA394D}"/>
-              </a:ext>
-            </a:extLst>
-          </p:cNvPr>
-          <p:cNvCxnSpPr>
-            <a:cxnSpLocks/>
-          </p:cNvCxnSpPr>
-          <p:nvPr/>
-        </p:nvCxnSpPr>
-        <p:spPr>
-          <a:xfrm>
-            <a:off x="7656047" y="2820865"/>
-            <a:ext cx="599343" cy="0"/>
-          </a:xfrm>
-          <a:prstGeom prst="straightConnector1">
-            <a:avLst/>
-          </a:prstGeom>
-          <a:ln w="76200">
-            <a:solidFill>
-              <a:schemeClr val="accent6"/>
-            </a:solidFill>
-            <a:tailEnd type="triangle"/>
-          </a:ln>
-        </p:spPr>
-        <p:style>
-          <a:lnRef idx="2">
-            <a:schemeClr val="accent1"/>
-          </a:lnRef>
-          <a:fillRef idx="0">
-            <a:schemeClr val="accent1"/>
-          </a:fillRef>
-          <a:effectRef idx="1">
-            <a:schemeClr val="accent1"/>
-          </a:effectRef>
-          <a:fontRef idx="minor">
-            <a:schemeClr val="tx1"/>
-          </a:fontRef>
-        </p:style>
-      </p:cxnSp>
-      <p:cxnSp>
-        <p:nvCxnSpPr>
-          <p:cNvPr id="28" name="Straight Arrow Connector 27">
-            <a:extLst>
-              <a:ext uri="{FF2B5EF4-FFF2-40B4-BE49-F238E27FC236}">
-                <a16:creationId xmlns:a16="http://schemas.microsoft.com/office/drawing/2014/main" id="{9940A01A-9DA0-E7B9-0C96-AB57C9182A66}"/>
-              </a:ext>
-            </a:extLst>
-          </p:cNvPr>
-          <p:cNvCxnSpPr>
-            <a:cxnSpLocks/>
-          </p:cNvCxnSpPr>
-          <p:nvPr/>
-        </p:nvCxnSpPr>
-        <p:spPr>
-          <a:xfrm>
-            <a:off x="10055468" y="2820865"/>
-            <a:ext cx="599343" cy="0"/>
-          </a:xfrm>
-          <a:prstGeom prst="straightConnector1">
-            <a:avLst/>
-          </a:prstGeom>
-          <a:ln w="76200">
-            <a:solidFill>
-              <a:schemeClr val="accent6"/>
-            </a:solidFill>
-            <a:tailEnd type="triangle"/>
-          </a:ln>
-        </p:spPr>
-        <p:style>
-          <a:lnRef idx="2">
-            <a:schemeClr val="accent1"/>
-          </a:lnRef>
-          <a:fillRef idx="0">
-            <a:schemeClr val="accent1"/>
-          </a:fillRef>
-          <a:effectRef idx="1">
-            <a:schemeClr val="accent1"/>
-          </a:effectRef>
-          <a:fontRef idx="minor">
-            <a:schemeClr val="tx1"/>
-          </a:fontRef>
-        </p:style>
-      </p:cxnSp>
-      <p:cxnSp>
-        <p:nvCxnSpPr>
-          <p:cNvPr id="29" name="Straight Arrow Connector 28">
-            <a:extLst>
-              <a:ext uri="{FF2B5EF4-FFF2-40B4-BE49-F238E27FC236}">
-                <a16:creationId xmlns:a16="http://schemas.microsoft.com/office/drawing/2014/main" id="{940F9387-9834-9382-A4C2-CD4715201AAE}"/>
-              </a:ext>
-            </a:extLst>
-          </p:cNvPr>
-          <p:cNvCxnSpPr>
-            <a:cxnSpLocks/>
-          </p:cNvCxnSpPr>
-          <p:nvPr/>
-        </p:nvCxnSpPr>
-        <p:spPr>
-          <a:xfrm>
-            <a:off x="9139600" y="1469598"/>
-            <a:ext cx="0" cy="442180"/>
-          </a:xfrm>
-          <a:prstGeom prst="straightConnector1">
-            <a:avLst/>
-          </a:prstGeom>
-          <a:ln w="76200">
-            <a:solidFill>
-              <a:schemeClr val="accent6"/>
-            </a:solidFill>
-            <a:tailEnd type="triangle"/>
-          </a:ln>
-        </p:spPr>
-        <p:style>
-          <a:lnRef idx="2">
-            <a:schemeClr val="accent1"/>
-          </a:lnRef>
-          <a:fillRef idx="0">
-            <a:schemeClr val="accent1"/>
-          </a:fillRef>
-          <a:effectRef idx="1">
-            <a:schemeClr val="accent1"/>
-          </a:effectRef>
-          <a:fontRef idx="minor">
-            <a:schemeClr val="tx1"/>
-          </a:fontRef>
-        </p:style>
-      </p:cxnSp>
-      <p:cxnSp>
-        <p:nvCxnSpPr>
-          <p:cNvPr id="31" name="Straight Arrow Connector 30">
-            <a:extLst>
-              <a:ext uri="{FF2B5EF4-FFF2-40B4-BE49-F238E27FC236}">
-                <a16:creationId xmlns:a16="http://schemas.microsoft.com/office/drawing/2014/main" id="{C22BB892-946F-E3C7-E4F7-947F5C47E7AB}"/>
-              </a:ext>
-            </a:extLst>
-          </p:cNvPr>
-          <p:cNvCxnSpPr>
-            <a:cxnSpLocks/>
-          </p:cNvCxnSpPr>
-          <p:nvPr/>
-        </p:nvCxnSpPr>
-        <p:spPr>
-          <a:xfrm>
-            <a:off x="9127294" y="3653205"/>
-            <a:ext cx="0" cy="442180"/>
-          </a:xfrm>
-          <a:prstGeom prst="straightConnector1">
-            <a:avLst/>
-          </a:prstGeom>
-          <a:ln w="76200">
-            <a:solidFill>
-              <a:schemeClr val="accent6"/>
-            </a:solidFill>
-            <a:tailEnd type="triangle"/>
-          </a:ln>
-        </p:spPr>
-        <p:style>
-          <a:lnRef idx="2">
-            <a:schemeClr val="accent1"/>
-          </a:lnRef>
-          <a:fillRef idx="0">
-            <a:schemeClr val="accent1"/>
-          </a:fillRef>
-          <a:effectRef idx="1">
-            <a:schemeClr val="accent1"/>
-          </a:effectRef>
-          <a:fontRef idx="minor">
-            <a:schemeClr val="tx1"/>
-          </a:fontRef>
-        </p:style>
-      </p:cxnSp>
-      <p:cxnSp>
-        <p:nvCxnSpPr>
-          <p:cNvPr id="32" name="Straight Arrow Connector 31">
-            <a:extLst>
-              <a:ext uri="{FF2B5EF4-FFF2-40B4-BE49-F238E27FC236}">
-                <a16:creationId xmlns:a16="http://schemas.microsoft.com/office/drawing/2014/main" id="{77410BC2-DF65-836B-9673-57F3A6DCE37B}"/>
-              </a:ext>
-            </a:extLst>
-          </p:cNvPr>
-          <p:cNvCxnSpPr>
-            <a:cxnSpLocks/>
-          </p:cNvCxnSpPr>
-          <p:nvPr/>
-        </p:nvCxnSpPr>
-        <p:spPr>
-          <a:xfrm>
-            <a:off x="7069084" y="5494277"/>
-            <a:ext cx="0" cy="442180"/>
-          </a:xfrm>
-          <a:prstGeom prst="straightConnector1">
-            <a:avLst/>
-          </a:prstGeom>
-          <a:ln w="76200">
-            <a:solidFill>
-              <a:schemeClr val="accent6"/>
-            </a:solidFill>
-            <a:tailEnd type="triangle"/>
-          </a:ln>
-        </p:spPr>
-        <p:style>
-          <a:lnRef idx="2">
-            <a:schemeClr val="accent1"/>
-          </a:lnRef>
-          <a:fillRef idx="0">
-            <a:schemeClr val="accent1"/>
-          </a:fillRef>
-          <a:effectRef idx="1">
-            <a:schemeClr val="accent1"/>
-          </a:effectRef>
-          <a:fontRef idx="minor">
-            <a:schemeClr val="tx1"/>
-          </a:fontRef>
-        </p:style>
-      </p:cxnSp>
-      <p:cxnSp>
-        <p:nvCxnSpPr>
-          <p:cNvPr id="33" name="Straight Arrow Connector 32">
-            <a:extLst>
-              <a:ext uri="{FF2B5EF4-FFF2-40B4-BE49-F238E27FC236}">
-                <a16:creationId xmlns:a16="http://schemas.microsoft.com/office/drawing/2014/main" id="{1ED1C10C-31DE-6F71-F7E6-C4371A576E16}"/>
-              </a:ext>
-            </a:extLst>
-          </p:cNvPr>
-          <p:cNvCxnSpPr>
-            <a:cxnSpLocks/>
-          </p:cNvCxnSpPr>
-          <p:nvPr/>
-        </p:nvCxnSpPr>
-        <p:spPr>
-          <a:xfrm flipH="1">
-            <a:off x="5607515" y="4667801"/>
-            <a:ext cx="407446" cy="0"/>
-          </a:xfrm>
-          <a:prstGeom prst="straightConnector1">
-            <a:avLst/>
-          </a:prstGeom>
-          <a:ln w="76200">
-            <a:solidFill>
-              <a:schemeClr val="accent6"/>
-            </a:solidFill>
-            <a:tailEnd type="triangle"/>
-          </a:ln>
-        </p:spPr>
-        <p:style>
-          <a:lnRef idx="2">
-            <a:schemeClr val="accent1"/>
-          </a:lnRef>
-          <a:fillRef idx="0">
-            <a:schemeClr val="accent1"/>
-          </a:fillRef>
-          <a:effectRef idx="1">
-            <a:schemeClr val="accent1"/>
-          </a:effectRef>
-          <a:fontRef idx="minor">
-            <a:schemeClr val="tx1"/>
-          </a:fontRef>
-        </p:style>
-      </p:cxnSp>
-      <p:cxnSp>
-        <p:nvCxnSpPr>
-          <p:cNvPr id="36" name="Straight Arrow Connector 35">
-            <a:extLst>
-              <a:ext uri="{FF2B5EF4-FFF2-40B4-BE49-F238E27FC236}">
-                <a16:creationId xmlns:a16="http://schemas.microsoft.com/office/drawing/2014/main" id="{5CE19E5F-2300-3A09-8B0C-A7A9BE62E86D}"/>
-              </a:ext>
-            </a:extLst>
-          </p:cNvPr>
-          <p:cNvCxnSpPr>
-            <a:cxnSpLocks/>
-          </p:cNvCxnSpPr>
-          <p:nvPr/>
-        </p:nvCxnSpPr>
-        <p:spPr>
-          <a:xfrm flipH="1">
-            <a:off x="3980648" y="4616007"/>
-            <a:ext cx="407446" cy="0"/>
-          </a:xfrm>
-          <a:prstGeom prst="straightConnector1">
-            <a:avLst/>
-          </a:prstGeom>
-          <a:ln w="76200">
-            <a:solidFill>
-              <a:schemeClr val="accent6"/>
-            </a:solidFill>
-            <a:tailEnd type="triangle"/>
-          </a:ln>
-        </p:spPr>
-        <p:style>
-          <a:lnRef idx="2">
-            <a:schemeClr val="accent1"/>
-          </a:lnRef>
-          <a:fillRef idx="0">
-            <a:schemeClr val="accent1"/>
-          </a:fillRef>
-          <a:effectRef idx="1">
-            <a:schemeClr val="accent1"/>
-          </a:effectRef>
-          <a:fontRef idx="minor">
-            <a:schemeClr val="tx1"/>
-          </a:fontRef>
-        </p:style>
-      </p:cxnSp>
-      <p:cxnSp>
-        <p:nvCxnSpPr>
-          <p:cNvPr id="37" name="Straight Arrow Connector 36">
-            <a:extLst>
-              <a:ext uri="{FF2B5EF4-FFF2-40B4-BE49-F238E27FC236}">
-                <a16:creationId xmlns:a16="http://schemas.microsoft.com/office/drawing/2014/main" id="{C1BA1B7D-FD8A-DA63-0FA0-A456053C97AC}"/>
-              </a:ext>
-            </a:extLst>
-          </p:cNvPr>
-          <p:cNvCxnSpPr>
-            <a:cxnSpLocks/>
-          </p:cNvCxnSpPr>
-          <p:nvPr/>
-        </p:nvCxnSpPr>
-        <p:spPr>
-          <a:xfrm flipH="1">
-            <a:off x="2254166" y="4574078"/>
-            <a:ext cx="407446" cy="0"/>
-          </a:xfrm>
-          <a:prstGeom prst="straightConnector1">
-            <a:avLst/>
-          </a:prstGeom>
-          <a:ln w="76200">
-            <a:solidFill>
-              <a:schemeClr val="accent6"/>
-            </a:solidFill>
-            <a:tailEnd type="triangle"/>
-          </a:ln>
-        </p:spPr>
-        <p:style>
-          <a:lnRef idx="2">
-            <a:schemeClr val="accent1"/>
-          </a:lnRef>
-          <a:fillRef idx="0">
-            <a:schemeClr val="accent1"/>
-          </a:fillRef>
-          <a:effectRef idx="1">
-            <a:schemeClr val="accent1"/>
-          </a:effectRef>
-          <a:fontRef idx="minor">
-            <a:schemeClr val="tx1"/>
-          </a:fontRef>
-        </p:style>
-      </p:cxnSp>
-      <p:cxnSp>
-        <p:nvCxnSpPr>
-          <p:cNvPr id="39" name="Straight Connector 38">
-            <a:extLst>
-              <a:ext uri="{FF2B5EF4-FFF2-40B4-BE49-F238E27FC236}">
-                <a16:creationId xmlns:a16="http://schemas.microsoft.com/office/drawing/2014/main" id="{C0FB1F7B-6982-22DF-60A5-2CA62EA8C959}"/>
-              </a:ext>
-            </a:extLst>
-          </p:cNvPr>
-          <p:cNvCxnSpPr>
-            <a:cxnSpLocks/>
-          </p:cNvCxnSpPr>
-          <p:nvPr/>
-        </p:nvCxnSpPr>
-        <p:spPr>
-          <a:xfrm flipV="1">
-            <a:off x="11267710" y="1469598"/>
-            <a:ext cx="0" cy="802665"/>
-          </a:xfrm>
-          <a:prstGeom prst="line">
-            <a:avLst/>
-          </a:prstGeom>
-          <a:ln w="76200">
-            <a:solidFill>
-              <a:schemeClr val="accent6"/>
-            </a:solidFill>
-          </a:ln>
-        </p:spPr>
-        <p:style>
-          <a:lnRef idx="2">
-            <a:schemeClr val="accent1"/>
-          </a:lnRef>
-          <a:fillRef idx="0">
-            <a:schemeClr val="accent1"/>
-          </a:fillRef>
-          <a:effectRef idx="1">
-            <a:schemeClr val="accent1"/>
-          </a:effectRef>
-          <a:fontRef idx="minor">
-            <a:schemeClr val="tx1"/>
-          </a:fontRef>
-        </p:style>
-      </p:cxnSp>
-      <p:cxnSp>
-        <p:nvCxnSpPr>
-          <p:cNvPr id="41" name="Straight Connector 40">
-            <a:extLst>
-              <a:ext uri="{FF2B5EF4-FFF2-40B4-BE49-F238E27FC236}">
-                <a16:creationId xmlns:a16="http://schemas.microsoft.com/office/drawing/2014/main" id="{78857C21-FF34-8127-2AAF-8FA3FB7507A0}"/>
-              </a:ext>
-            </a:extLst>
-          </p:cNvPr>
-          <p:cNvCxnSpPr>
-            <a:cxnSpLocks/>
-          </p:cNvCxnSpPr>
-          <p:nvPr/>
-        </p:nvCxnSpPr>
-        <p:spPr>
-          <a:xfrm>
-            <a:off x="9127294" y="1501472"/>
-            <a:ext cx="2140416" cy="0"/>
-          </a:xfrm>
-          <a:prstGeom prst="line">
-            <a:avLst/>
-          </a:prstGeom>
-          <a:ln w="76200">
-            <a:solidFill>
-              <a:schemeClr val="accent6"/>
-            </a:solidFill>
-          </a:ln>
-        </p:spPr>
-        <p:style>
-          <a:lnRef idx="2">
-            <a:schemeClr val="accent1"/>
-          </a:lnRef>
-          <a:fillRef idx="0">
-            <a:schemeClr val="accent1"/>
-          </a:fillRef>
-          <a:effectRef idx="1">
-            <a:schemeClr val="accent1"/>
-          </a:effectRef>
-          <a:fontRef idx="minor">
-            <a:schemeClr val="tx1"/>
-          </a:fontRef>
-        </p:style>
-      </p:cxnSp>
-      <p:cxnSp>
-        <p:nvCxnSpPr>
-          <p:cNvPr id="45" name="Straight Arrow Connector 44">
-            <a:extLst>
-              <a:ext uri="{FF2B5EF4-FFF2-40B4-BE49-F238E27FC236}">
-                <a16:creationId xmlns:a16="http://schemas.microsoft.com/office/drawing/2014/main" id="{7509C28F-A4CA-F845-3C1D-196C32739D60}"/>
-              </a:ext>
-            </a:extLst>
-          </p:cNvPr>
-          <p:cNvCxnSpPr>
-            <a:cxnSpLocks/>
-          </p:cNvCxnSpPr>
-          <p:nvPr/>
-        </p:nvCxnSpPr>
-        <p:spPr>
-          <a:xfrm flipH="1">
-            <a:off x="8118365" y="4667801"/>
-            <a:ext cx="437055" cy="0"/>
-          </a:xfrm>
-          <a:prstGeom prst="straightConnector1">
-            <a:avLst/>
-          </a:prstGeom>
-          <a:ln w="76200">
-            <a:solidFill>
-              <a:schemeClr val="accent6"/>
-            </a:solidFill>
-            <a:tailEnd type="triangle"/>
-          </a:ln>
-        </p:spPr>
-        <p:style>
-          <a:lnRef idx="2">
-            <a:schemeClr val="accent1"/>
-          </a:lnRef>
-          <a:fillRef idx="0">
-            <a:schemeClr val="accent1"/>
-          </a:fillRef>
-          <a:effectRef idx="1">
-            <a:schemeClr val="accent1"/>
-          </a:effectRef>
-          <a:fontRef idx="minor">
-            <a:schemeClr val="tx1"/>
-          </a:fontRef>
-        </p:style>
-      </p:cxnSp>
-      <p:cxnSp>
-        <p:nvCxnSpPr>
-          <p:cNvPr id="50" name="Straight Connector 49">
-            <a:extLst>
-              <a:ext uri="{FF2B5EF4-FFF2-40B4-BE49-F238E27FC236}">
                 <a16:creationId xmlns:a16="http://schemas.microsoft.com/office/drawing/2014/main" id="{267B7B5D-3B43-699C-FE56-483823CF00A3}"/>
               </a:ext>
             </a:extLst>
@@ -8522,6 +6377,146 @@
           </a:fontRef>
         </p:style>
       </p:cxnSp>
+      <p:sp>
+        <p:nvSpPr>
+          <p:cNvPr id="7" name="TextBox 6">
+            <a:extLst>
+              <a:ext uri="{FF2B5EF4-FFF2-40B4-BE49-F238E27FC236}">
+                <a16:creationId xmlns:a16="http://schemas.microsoft.com/office/drawing/2014/main" id="{81F696E2-EBD7-663A-64F3-F73DAE77D18E}"/>
+              </a:ext>
+            </a:extLst>
+          </p:cNvPr>
+          <p:cNvSpPr txBox="1"/>
+          <p:nvPr/>
+        </p:nvSpPr>
+        <p:spPr>
+          <a:xfrm>
+            <a:off x="10055467" y="2354933"/>
+            <a:ext cx="525195" cy="369332"/>
+          </a:xfrm>
+          <a:prstGeom prst="rect">
+            <a:avLst/>
+          </a:prstGeom>
+          <a:noFill/>
+        </p:spPr>
+        <p:txBody>
+          <a:bodyPr wrap="square" rtlCol="0">
+            <a:spAutoFit/>
+          </a:bodyPr>
+          <a:lstStyle/>
+          <a:p>
+            <a:r>
+              <a:rPr lang="en-US" dirty="0"/>
+              <a:t>No</a:t>
+            </a:r>
+          </a:p>
+        </p:txBody>
+      </p:sp>
+      <p:sp>
+        <p:nvSpPr>
+          <p:cNvPr id="8" name="TextBox 7">
+            <a:extLst>
+              <a:ext uri="{FF2B5EF4-FFF2-40B4-BE49-F238E27FC236}">
+                <a16:creationId xmlns:a16="http://schemas.microsoft.com/office/drawing/2014/main" id="{53BFE3B1-0DE0-1E19-D42D-CD24664CB10C}"/>
+              </a:ext>
+            </a:extLst>
+          </p:cNvPr>
+          <p:cNvSpPr txBox="1"/>
+          <p:nvPr/>
+        </p:nvSpPr>
+        <p:spPr>
+          <a:xfrm>
+            <a:off x="9301087" y="3647954"/>
+            <a:ext cx="525195" cy="369332"/>
+          </a:xfrm>
+          <a:prstGeom prst="rect">
+            <a:avLst/>
+          </a:prstGeom>
+          <a:noFill/>
+        </p:spPr>
+        <p:txBody>
+          <a:bodyPr wrap="square" rtlCol="0">
+            <a:spAutoFit/>
+          </a:bodyPr>
+          <a:lstStyle/>
+          <a:p>
+            <a:r>
+              <a:rPr lang="en-US" dirty="0"/>
+              <a:t>Yes</a:t>
+            </a:r>
+          </a:p>
+        </p:txBody>
+      </p:sp>
+      <p:sp>
+        <p:nvSpPr>
+          <p:cNvPr id="10" name="TextBox 9">
+            <a:extLst>
+              <a:ext uri="{FF2B5EF4-FFF2-40B4-BE49-F238E27FC236}">
+                <a16:creationId xmlns:a16="http://schemas.microsoft.com/office/drawing/2014/main" id="{B54313CE-5741-8026-8EB0-5CE5BAE9B35A}"/>
+              </a:ext>
+            </a:extLst>
+          </p:cNvPr>
+          <p:cNvSpPr txBox="1"/>
+          <p:nvPr/>
+        </p:nvSpPr>
+        <p:spPr>
+          <a:xfrm>
+            <a:off x="6516125" y="5486769"/>
+            <a:ext cx="597145" cy="369332"/>
+          </a:xfrm>
+          <a:prstGeom prst="rect">
+            <a:avLst/>
+          </a:prstGeom>
+          <a:noFill/>
+        </p:spPr>
+        <p:txBody>
+          <a:bodyPr wrap="square" rtlCol="0">
+            <a:spAutoFit/>
+          </a:bodyPr>
+          <a:lstStyle/>
+          <a:p>
+            <a:r>
+              <a:rPr lang="en-US" dirty="0"/>
+              <a:t>No</a:t>
+            </a:r>
+          </a:p>
+        </p:txBody>
+      </p:sp>
+      <p:sp>
+        <p:nvSpPr>
+          <p:cNvPr id="14" name="TextBox 13">
+            <a:extLst>
+              <a:ext uri="{FF2B5EF4-FFF2-40B4-BE49-F238E27FC236}">
+                <a16:creationId xmlns:a16="http://schemas.microsoft.com/office/drawing/2014/main" id="{4F78B87C-3148-ED77-3391-5597E25F291A}"/>
+              </a:ext>
+            </a:extLst>
+          </p:cNvPr>
+          <p:cNvSpPr txBox="1"/>
+          <p:nvPr/>
+        </p:nvSpPr>
+        <p:spPr>
+          <a:xfrm>
+            <a:off x="5616590" y="4204746"/>
+            <a:ext cx="525195" cy="369332"/>
+          </a:xfrm>
+          <a:prstGeom prst="rect">
+            <a:avLst/>
+          </a:prstGeom>
+          <a:noFill/>
+        </p:spPr>
+        <p:txBody>
+          <a:bodyPr wrap="square" rtlCol="0">
+            <a:spAutoFit/>
+          </a:bodyPr>
+          <a:lstStyle/>
+          <a:p>
+            <a:r>
+              <a:rPr lang="en-US" dirty="0"/>
+              <a:t>Yes</a:t>
+            </a:r>
+          </a:p>
+        </p:txBody>
+      </p:sp>
     </p:spTree>
     <p:extLst>
       <p:ext uri="{BB962C8B-B14F-4D97-AF65-F5344CB8AC3E}">
@@ -8535,7 +6530,7 @@
 </p:sld>
 </file>
 
-<file path=ppt/slides/slide12.xml><?xml version="1.0" encoding="utf-8"?>
+<file path=ppt/slides/slide11.xml><?xml version="1.0" encoding="utf-8"?>
 <p:sld xmlns:a="http://schemas.openxmlformats.org/drawingml/2006/main" xmlns:r="http://schemas.openxmlformats.org/officeDocument/2006/relationships" xmlns:p="http://schemas.openxmlformats.org/presentationml/2006/main">
   <p:cSld>
     <p:spTree>
@@ -9165,6 +7160,208 @@
 </p:sld>
 </file>
 
+<file path=ppt/slides/slide12.xml><?xml version="1.0" encoding="utf-8"?>
+<p:sld xmlns:a="http://schemas.openxmlformats.org/drawingml/2006/main" xmlns:r="http://schemas.openxmlformats.org/officeDocument/2006/relationships" xmlns:p="http://schemas.openxmlformats.org/presentationml/2006/main">
+  <p:cSld>
+    <p:spTree>
+      <p:nvGrpSpPr>
+        <p:cNvPr id="1" name="">
+          <a:extLst>
+            <a:ext uri="{FF2B5EF4-FFF2-40B4-BE49-F238E27FC236}">
+              <a16:creationId xmlns:a16="http://schemas.microsoft.com/office/drawing/2014/main" id="{0BBBD572-E903-680F-CC64-4455C9224748}"/>
+            </a:ext>
+          </a:extLst>
+        </p:cNvPr>
+        <p:cNvGrpSpPr/>
+        <p:nvPr/>
+      </p:nvGrpSpPr>
+      <p:grpSpPr>
+        <a:xfrm>
+          <a:off x="0" y="0"/>
+          <a:ext cx="0" cy="0"/>
+          <a:chOff x="0" y="0"/>
+          <a:chExt cx="0" cy="0"/>
+        </a:xfrm>
+      </p:grpSpPr>
+      <p:sp>
+        <p:nvSpPr>
+          <p:cNvPr id="2" name="Title 1">
+            <a:extLst>
+              <a:ext uri="{FF2B5EF4-FFF2-40B4-BE49-F238E27FC236}">
+                <a16:creationId xmlns:a16="http://schemas.microsoft.com/office/drawing/2014/main" id="{356BEC38-E697-643D-C5B9-8030B34DEBEB}"/>
+              </a:ext>
+            </a:extLst>
+          </p:cNvPr>
+          <p:cNvSpPr>
+            <a:spLocks noGrp="1"/>
+          </p:cNvSpPr>
+          <p:nvPr>
+            <p:ph type="title"/>
+          </p:nvPr>
+        </p:nvSpPr>
+        <p:spPr/>
+        <p:txBody>
+          <a:bodyPr/>
+          <a:lstStyle/>
+          <a:p>
+            <a:r>
+              <a:rPr lang="en-US" dirty="0"/>
+              <a:t>Designing algorithms</a:t>
+            </a:r>
+          </a:p>
+        </p:txBody>
+      </p:sp>
+      <p:sp>
+        <p:nvSpPr>
+          <p:cNvPr id="3" name="Content Placeholder 2">
+            <a:extLst>
+              <a:ext uri="{FF2B5EF4-FFF2-40B4-BE49-F238E27FC236}">
+                <a16:creationId xmlns:a16="http://schemas.microsoft.com/office/drawing/2014/main" id="{4DB367C7-941E-297B-7BEF-F5B2B015461E}"/>
+              </a:ext>
+            </a:extLst>
+          </p:cNvPr>
+          <p:cNvSpPr>
+            <a:spLocks noGrp="1"/>
+          </p:cNvSpPr>
+          <p:nvPr>
+            <p:ph idx="1"/>
+          </p:nvPr>
+        </p:nvSpPr>
+        <p:spPr>
+          <a:xfrm>
+            <a:off x="838200" y="1825625"/>
+            <a:ext cx="10515600" cy="3538112"/>
+          </a:xfrm>
+        </p:spPr>
+        <p:txBody>
+          <a:bodyPr>
+            <a:normAutofit/>
+          </a:bodyPr>
+          <a:lstStyle/>
+          <a:p>
+            <a:r>
+              <a:rPr lang="en-US" dirty="0"/>
+              <a:t>In this course, we won’t just be </a:t>
+            </a:r>
+            <a:r>
+              <a:rPr lang="en-US" i="1" dirty="0"/>
+              <a:t>following</a:t>
+            </a:r>
+            <a:r>
+              <a:rPr lang="en-US" dirty="0"/>
+              <a:t> algorithms, but also </a:t>
+            </a:r>
+            <a:r>
+              <a:rPr lang="en-US" i="1" dirty="0"/>
+              <a:t>designing them. </a:t>
+            </a:r>
+          </a:p>
+          <a:p>
+            <a:r>
+              <a:rPr lang="en-US" dirty="0"/>
+              <a:t>Typically, this means breaking a larger job down into a sequence of smaller steps. </a:t>
+            </a:r>
+          </a:p>
+          <a:p>
+            <a:pPr lvl="1"/>
+            <a:r>
+              <a:rPr lang="en-US" dirty="0"/>
+              <a:t>We may do this </a:t>
+            </a:r>
+            <a:r>
+              <a:rPr lang="en-US" i="1" dirty="0"/>
+              <a:t>iteratively- </a:t>
+            </a:r>
+            <a:r>
+              <a:rPr lang="en-US" dirty="0" err="1"/>
+              <a:t>e.g</a:t>
+            </a:r>
+            <a:r>
+              <a:rPr lang="en-US" dirty="0"/>
+              <a:t> we may need to break some of our “smaller steps” into separate tasks.</a:t>
+            </a:r>
+          </a:p>
+          <a:p>
+            <a:pPr lvl="1"/>
+            <a:r>
+              <a:rPr lang="en-US" dirty="0"/>
+              <a:t>Often we will make use of </a:t>
+            </a:r>
+            <a:r>
+              <a:rPr lang="en-US" i="1" dirty="0"/>
+              <a:t>decisions</a:t>
+            </a:r>
+            <a:r>
+              <a:rPr lang="en-US" dirty="0"/>
+              <a:t> (using some criteria to decide which instruction should be done next) and </a:t>
+            </a:r>
+            <a:r>
+              <a:rPr lang="en-US" i="1" dirty="0"/>
+              <a:t>iteration</a:t>
+            </a:r>
+            <a:r>
+              <a:rPr lang="en-US" dirty="0"/>
+              <a:t> (repeating an instruction some number of times). </a:t>
+            </a:r>
+          </a:p>
+        </p:txBody>
+      </p:sp>
+      <p:sp>
+        <p:nvSpPr>
+          <p:cNvPr id="4" name="TextBox 3">
+            <a:extLst>
+              <a:ext uri="{FF2B5EF4-FFF2-40B4-BE49-F238E27FC236}">
+                <a16:creationId xmlns:a16="http://schemas.microsoft.com/office/drawing/2014/main" id="{84D41838-5D76-CC9C-46A9-54F1428FA0BB}"/>
+              </a:ext>
+            </a:extLst>
+          </p:cNvPr>
+          <p:cNvSpPr txBox="1"/>
+          <p:nvPr/>
+        </p:nvSpPr>
+        <p:spPr>
+          <a:xfrm>
+            <a:off x="838200" y="5634232"/>
+            <a:ext cx="10816683" cy="523220"/>
+          </a:xfrm>
+          <a:prstGeom prst="rect">
+            <a:avLst/>
+          </a:prstGeom>
+          <a:noFill/>
+        </p:spPr>
+        <p:txBody>
+          <a:bodyPr wrap="square" rtlCol="0">
+            <a:spAutoFit/>
+          </a:bodyPr>
+          <a:lstStyle/>
+          <a:p>
+            <a:r>
+              <a:rPr lang="en-US" sz="2800" b="1" dirty="0"/>
+              <a:t>Q: When do we </a:t>
+            </a:r>
+            <a:r>
+              <a:rPr lang="en-US" sz="2800" b="1" i="1" dirty="0"/>
+              <a:t>stop</a:t>
+            </a:r>
+            <a:r>
+              <a:rPr lang="en-US" sz="2800" b="1" dirty="0"/>
+              <a:t> breaking things down into smaller steps?</a:t>
+            </a:r>
+          </a:p>
+        </p:txBody>
+      </p:sp>
+    </p:spTree>
+    <p:extLst>
+      <p:ext uri="{BB962C8B-B14F-4D97-AF65-F5344CB8AC3E}">
+        <p14:creationId xmlns:p14="http://schemas.microsoft.com/office/powerpoint/2010/main" val="1317102284"/>
+      </p:ext>
+    </p:extLst>
+  </p:cSld>
+  <p:clrMapOvr>
+    <a:masterClrMapping/>
+  </p:clrMapOvr>
+</p:sld>
+</file>
+
 <file path=ppt/slides/slide13.xml><?xml version="1.0" encoding="utf-8"?>
 <p:sld xmlns:a="http://schemas.openxmlformats.org/drawingml/2006/main" xmlns:r="http://schemas.openxmlformats.org/officeDocument/2006/relationships" xmlns:p="http://schemas.openxmlformats.org/presentationml/2006/main">
   <p:cSld>
@@ -9242,7 +7439,7 @@
             </a:pPr>
             <a:r>
               <a:rPr lang="en-US" dirty="0"/>
-              <a:t>In groups, discuss (~10 minutes) and develop algorithms for one the following tasks.</a:t>
+              <a:t>In groups, discuss (~5 minutes) and develop an algorithm for the following task:</a:t>
             </a:r>
           </a:p>
           <a:p>
@@ -9252,35 +7449,17 @@
             <a:endParaRPr lang="en-US" dirty="0"/>
           </a:p>
           <a:p>
-            <a:pPr marL="514350" indent="-514350">
-              <a:buAutoNum type="arabicPeriod"/>
+            <a:pPr marL="0" indent="0">
+              <a:buNone/>
             </a:pPr>
             <a:r>
               <a:rPr lang="en-US" dirty="0"/>
-              <a:t>Finding the greatest common divisor of two positive numbers.</a:t>
-            </a:r>
-          </a:p>
-          <a:p>
-            <a:pPr marL="514350" indent="-514350">
-              <a:buAutoNum type="arabicPeriod"/>
-            </a:pPr>
-            <a:r>
-              <a:rPr lang="en-US" dirty="0"/>
-              <a:t>Finding all primes between two positive numbers.</a:t>
-            </a:r>
-          </a:p>
-          <a:p>
-            <a:pPr marL="514350" indent="-514350">
-              <a:buAutoNum type="arabicPeriod"/>
-            </a:pPr>
-            <a:r>
-              <a:rPr lang="en-US" dirty="0"/>
-              <a:t>Converting a decimal number into binary.</a:t>
-            </a:r>
-          </a:p>
-          <a:p>
-            <a:pPr marL="514350" indent="-514350">
-              <a:buAutoNum type="arabicPeriod"/>
+              <a:t>I have an unsorted list of numbers: [0, 4, 5, 1, 8, 7, -1]. You are only allowed to look at one number at a time. How can I find the highest and lowest numbers in my list?</a:t>
+            </a:r>
+          </a:p>
+          <a:p>
+            <a:pPr marL="0" indent="0">
+              <a:buNone/>
             </a:pPr>
             <a:endParaRPr lang="en-US" dirty="0"/>
           </a:p>
@@ -10258,7 +8437,7 @@
           <a:p>
             <a:r>
               <a:rPr lang="en-US" dirty="0"/>
-              <a:t>A computer consists of a number of separate electronic devices that together can perform a vast number of algorithms.</a:t>
+              <a:t>A computer consists of several separate electronic devices that together can perform a vast number of algorithms.</a:t>
             </a:r>
           </a:p>
           <a:p>
@@ -11024,7 +9203,7 @@
           <a:p>
             <a:r>
               <a:rPr lang="en-US" sz="2800" dirty="0"/>
-              <a:t>Memory is used to store information. We can think (for now) of memory as a large number of boxes that can be used to data. Each piece of data stored in memory has:</a:t>
+              <a:t>Memory is used to store information. We can think (for now) of memory as a large number of boxes that can be used to store data. Each piece of data stored in memory has:</a:t>
             </a:r>
           </a:p>
           <a:p>
@@ -11161,7 +9340,7 @@
           <a:p>
             <a:r>
               <a:rPr lang="en-US" sz="2800" dirty="0"/>
-              <a:t>Memory is used to store information. We can think (for now) of memory as a large number of boxes that can be used to data. Each piece of data stored in memory has:</a:t>
+              <a:t>Memory is used to store information. We can think (for now) of memory as a large number of boxes that can be used to store data. Each piece of data stored in memory has:</a:t>
             </a:r>
           </a:p>
           <a:p>
@@ -11200,41 +9379,6 @@
             <a:r>
               <a:rPr lang="en-US" sz="2800" dirty="0"/>
               <a:t>).</a:t>
-            </a:r>
-          </a:p>
-        </p:txBody>
-      </p:sp>
-      <p:sp>
-        <p:nvSpPr>
-          <p:cNvPr id="4" name="TextBox 3">
-            <a:extLst>
-              <a:ext uri="{FF2B5EF4-FFF2-40B4-BE49-F238E27FC236}">
-                <a16:creationId xmlns:a16="http://schemas.microsoft.com/office/drawing/2014/main" id="{634D423F-6CC2-B9EF-EEA3-C8C6AFF24242}"/>
-              </a:ext>
-            </a:extLst>
-          </p:cNvPr>
-          <p:cNvSpPr txBox="1"/>
-          <p:nvPr/>
-        </p:nvSpPr>
-        <p:spPr>
-          <a:xfrm>
-            <a:off x="7396061" y="744080"/>
-            <a:ext cx="1176883" cy="490829"/>
-          </a:xfrm>
-          <a:prstGeom prst="rect">
-            <a:avLst/>
-          </a:prstGeom>
-          <a:noFill/>
-        </p:spPr>
-        <p:txBody>
-          <a:bodyPr wrap="square" rtlCol="0">
-            <a:spAutoFit/>
-          </a:bodyPr>
-          <a:lstStyle/>
-          <a:p>
-            <a:r>
-              <a:rPr lang="en-US" dirty="0"/>
-              <a:t>Memory</a:t>
             </a:r>
           </a:p>
         </p:txBody>
@@ -11504,7 +9648,7 @@
           <a:p>
             <a:r>
               <a:rPr lang="en-US" sz="2800" dirty="0"/>
-              <a:t>Memory is used to store information. We can think (for now) of memory as a large number of boxes that can be used to data. Each piece of data stored in memory has:</a:t>
+              <a:t>Memory is used to store information. We can think (for now) of memory as a large number of boxes that can be used to store data. Each piece of data stored in memory has:</a:t>
             </a:r>
           </a:p>
           <a:p>
@@ -11543,41 +9687,6 @@
             <a:r>
               <a:rPr lang="en-US" sz="2800" dirty="0"/>
               <a:t>).</a:t>
-            </a:r>
-          </a:p>
-        </p:txBody>
-      </p:sp>
-      <p:sp>
-        <p:nvSpPr>
-          <p:cNvPr id="4" name="TextBox 3">
-            <a:extLst>
-              <a:ext uri="{FF2B5EF4-FFF2-40B4-BE49-F238E27FC236}">
-                <a16:creationId xmlns:a16="http://schemas.microsoft.com/office/drawing/2014/main" id="{52B54897-8408-D5AC-1C7D-075C3371513F}"/>
-              </a:ext>
-            </a:extLst>
-          </p:cNvPr>
-          <p:cNvSpPr txBox="1"/>
-          <p:nvPr/>
-        </p:nvSpPr>
-        <p:spPr>
-          <a:xfrm>
-            <a:off x="7396061" y="744080"/>
-            <a:ext cx="1176883" cy="490829"/>
-          </a:xfrm>
-          <a:prstGeom prst="rect">
-            <a:avLst/>
-          </a:prstGeom>
-          <a:noFill/>
-        </p:spPr>
-        <p:txBody>
-          <a:bodyPr wrap="square" rtlCol="0">
-            <a:spAutoFit/>
-          </a:bodyPr>
-          <a:lstStyle/>
-          <a:p>
-            <a:r>
-              <a:rPr lang="en-US" dirty="0"/>
-              <a:t>Memory</a:t>
             </a:r>
           </a:p>
         </p:txBody>
@@ -11923,23 +10032,9 @@
         </p:spPr>
         <p:txBody>
           <a:bodyPr>
-            <a:normAutofit lnSpcReduction="10000"/>
+            <a:normAutofit/>
           </a:bodyPr>
           <a:lstStyle/>
-          <a:p>
-            <a:r>
-              <a:rPr lang="en-US" dirty="0"/>
-              <a:t>How much do you remember from Monday? </a:t>
-            </a:r>
-            <a:r>
-              <a:rPr lang="en-US" dirty="0" err="1"/>
-              <a:t>Menti.com</a:t>
-            </a:r>
-            <a:r>
-              <a:rPr lang="en-US" dirty="0"/>
-              <a:t>, code 6437 9999</a:t>
-            </a:r>
-          </a:p>
           <a:p>
             <a:r>
               <a:rPr lang="en-US" dirty="0"/>
@@ -11987,15 +10082,7 @@
             </a:r>
             <a:r>
               <a:rPr lang="en-US" dirty="0"/>
-              <a:t> your answer on </a:t>
-            </a:r>
-            <a:r>
-              <a:rPr lang="en-US" dirty="0" err="1"/>
-              <a:t>menti</a:t>
-            </a:r>
-            <a:r>
-              <a:rPr lang="en-US" dirty="0"/>
-              <a:t> with code: 4154 2054</a:t>
+              <a:t> your answer on Menti with code: 4154 2054</a:t>
             </a:r>
           </a:p>
         </p:txBody>
@@ -12946,7 +11033,7 @@
             </a:pPr>
             <a:r>
               <a:rPr lang="en-US" dirty="0"/>
-              <a:t>Handle input / output.</a:t>
+              <a:t>Basic arithmetic operations (add, subtract, multiply, divide).</a:t>
             </a:r>
           </a:p>
           <a:p>
@@ -12956,7 +11043,15 @@
             </a:pPr>
             <a:r>
               <a:rPr lang="en-US" dirty="0"/>
-              <a:t>Basic arithmetic operations (add, subtract, multiply divide).</a:t>
+              <a:t>Comparisons (</a:t>
+            </a:r>
+            <a:r>
+              <a:rPr lang="en-US" dirty="0" err="1"/>
+              <a:t>i.e</a:t>
+            </a:r>
+            <a:r>
+              <a:rPr lang="en-US" dirty="0"/>
+              <a:t> is value 1 greater than value 2).</a:t>
             </a:r>
           </a:p>
           <a:p>
@@ -12966,15 +11061,7 @@
             </a:pPr>
             <a:r>
               <a:rPr lang="en-US" dirty="0"/>
-              <a:t>Comparisons (</a:t>
-            </a:r>
-            <a:r>
-              <a:rPr lang="en-US" dirty="0" err="1"/>
-              <a:t>i.e</a:t>
-            </a:r>
-            <a:r>
-              <a:rPr lang="en-US" dirty="0"/>
-              <a:t> is value 1 greater than value 2).</a:t>
+              <a:t>Handle input / output.</a:t>
             </a:r>
           </a:p>
         </p:txBody>
@@ -13001,7 +11088,7 @@
         </p:blipFill>
         <p:spPr>
           <a:xfrm>
-            <a:off x="8025384" y="2276056"/>
+            <a:off x="8016592" y="2073833"/>
             <a:ext cx="2425288" cy="1807077"/>
           </a:xfrm>
           <a:prstGeom prst="rect">
@@ -13126,7 +11213,7 @@
             </a:pPr>
             <a:r>
               <a:rPr lang="en-US" dirty="0"/>
-              <a:t>Handle input / output.</a:t>
+              <a:t>Basic arithmetic operations (add, subtract, multiply, divide).</a:t>
             </a:r>
           </a:p>
           <a:p>
@@ -13136,7 +11223,15 @@
             </a:pPr>
             <a:r>
               <a:rPr lang="en-US" dirty="0"/>
-              <a:t>Basic arithmetic operations (add, subtract, multiply divide).</a:t>
+              <a:t>Comparisons (</a:t>
+            </a:r>
+            <a:r>
+              <a:rPr lang="en-US" dirty="0" err="1"/>
+              <a:t>i.e</a:t>
+            </a:r>
+            <a:r>
+              <a:rPr lang="en-US" dirty="0"/>
+              <a:t> is value 1 greater than value 2).</a:t>
             </a:r>
           </a:p>
           <a:p>
@@ -13146,15 +11241,7 @@
             </a:pPr>
             <a:r>
               <a:rPr lang="en-US" dirty="0"/>
-              <a:t>Comparisons (</a:t>
-            </a:r>
-            <a:r>
-              <a:rPr lang="en-US" dirty="0" err="1"/>
-              <a:t>i.e</a:t>
-            </a:r>
-            <a:r>
-              <a:rPr lang="en-US" dirty="0"/>
-              <a:t> is value 1 greater than value 2).</a:t>
+              <a:t>Handle input / output.</a:t>
             </a:r>
           </a:p>
           <a:p>
@@ -13172,7 +11259,7 @@
             </a:r>
             <a:r>
               <a:rPr lang="en-US" sz="2800" dirty="0"/>
-              <a:t> variable to keep track of which instruction should be executed next. </a:t>
+              <a:t> variable to keep track of which line should be executed next. </a:t>
             </a:r>
           </a:p>
         </p:txBody>
@@ -13629,7 +11716,7 @@
             </a:pPr>
             <a:r>
               <a:rPr lang="en-US" dirty="0"/>
-              <a:t>Handle input / output.</a:t>
+              <a:t>Basic arithmetic operations (add, subtract, multiply, divide).</a:t>
             </a:r>
           </a:p>
           <a:p>
@@ -13639,7 +11726,15 @@
             </a:pPr>
             <a:r>
               <a:rPr lang="en-US" dirty="0"/>
-              <a:t>Basic arithmetic operations (add, subtract, multiply divide).</a:t>
+              <a:t>Comparisons (</a:t>
+            </a:r>
+            <a:r>
+              <a:rPr lang="en-US" dirty="0" err="1"/>
+              <a:t>i.e</a:t>
+            </a:r>
+            <a:r>
+              <a:rPr lang="en-US" dirty="0"/>
+              <a:t> is value 1 greater than value 2).</a:t>
             </a:r>
           </a:p>
           <a:p>
@@ -13649,15 +11744,7 @@
             </a:pPr>
             <a:r>
               <a:rPr lang="en-US" dirty="0"/>
-              <a:t>Comparisons (</a:t>
-            </a:r>
-            <a:r>
-              <a:rPr lang="en-US" dirty="0" err="1"/>
-              <a:t>i.e</a:t>
-            </a:r>
-            <a:r>
-              <a:rPr lang="en-US" dirty="0"/>
-              <a:t> is value 1 greater than value 2).</a:t>
+              <a:t>Handle input / output.</a:t>
             </a:r>
           </a:p>
           <a:p>
@@ -14122,7 +12209,7 @@
         <p:spPr>
           <a:xfrm>
             <a:off x="923544" y="1527048"/>
-            <a:ext cx="10177272" cy="2062103"/>
+            <a:ext cx="10177272" cy="2339102"/>
           </a:xfrm>
           <a:prstGeom prst="rect">
             <a:avLst/>
@@ -14157,7 +12244,7 @@
             </a:pPr>
             <a:r>
               <a:rPr lang="en-US" dirty="0"/>
-              <a:t>Handle input / output.</a:t>
+              <a:t>Basic arithmetic operations (add, subtract, multiply, divide).</a:t>
             </a:r>
           </a:p>
           <a:p>
@@ -14167,7 +12254,15 @@
             </a:pPr>
             <a:r>
               <a:rPr lang="en-US" dirty="0"/>
-              <a:t>Basic arithmetic operations (add, subtract, multiply divide).</a:t>
+              <a:t>Comparisons (</a:t>
+            </a:r>
+            <a:r>
+              <a:rPr lang="en-US" dirty="0" err="1"/>
+              <a:t>i.e</a:t>
+            </a:r>
+            <a:r>
+              <a:rPr lang="en-US" dirty="0"/>
+              <a:t> is value 1 greater than value 2).</a:t>
             </a:r>
           </a:p>
           <a:p>
@@ -14177,16 +12272,12 @@
             </a:pPr>
             <a:r>
               <a:rPr lang="en-US" dirty="0"/>
-              <a:t>Comparisons (</a:t>
-            </a:r>
-            <a:r>
-              <a:rPr lang="en-US" dirty="0" err="1"/>
-              <a:t>i.e</a:t>
-            </a:r>
-            <a:r>
-              <a:rPr lang="en-US" dirty="0"/>
-              <a:t> is value 1 greater than value 2).</a:t>
-            </a:r>
+              <a:t>Handle input / output.</a:t>
+            </a:r>
+          </a:p>
+          <a:p>
+            <a:pPr lvl="1"/>
+            <a:endParaRPr lang="en-US" dirty="0"/>
           </a:p>
           <a:p>
             <a:endParaRPr lang="en-US" sz="2800" dirty="0"/>
@@ -14734,7 +12825,7 @@
             </a:pPr>
             <a:r>
               <a:rPr lang="en-US" dirty="0"/>
-              <a:t>Handle input / output.</a:t>
+              <a:t>Basic arithmetic operations (add, subtract, multiply, divide).</a:t>
             </a:r>
           </a:p>
           <a:p>
@@ -14744,7 +12835,15 @@
             </a:pPr>
             <a:r>
               <a:rPr lang="en-US" dirty="0"/>
-              <a:t>Basic arithmetic operations (add, subtract, multiply divide).</a:t>
+              <a:t>Comparisons (</a:t>
+            </a:r>
+            <a:r>
+              <a:rPr lang="en-US" dirty="0" err="1"/>
+              <a:t>i.e</a:t>
+            </a:r>
+            <a:r>
+              <a:rPr lang="en-US" dirty="0"/>
+              <a:t> is value 1 greater than value 2).</a:t>
             </a:r>
           </a:p>
           <a:p>
@@ -14754,15 +12853,7 @@
             </a:pPr>
             <a:r>
               <a:rPr lang="en-US" dirty="0"/>
-              <a:t>Comparisons (</a:t>
-            </a:r>
-            <a:r>
-              <a:rPr lang="en-US" dirty="0" err="1"/>
-              <a:t>i.e</a:t>
-            </a:r>
-            <a:r>
-              <a:rPr lang="en-US" dirty="0"/>
-              <a:t> is value 1 greater than value 2).</a:t>
+              <a:t>Handle input / output.</a:t>
             </a:r>
           </a:p>
           <a:p>
@@ -15563,7 +13654,7 @@
         <p:spPr>
           <a:xfrm>
             <a:off x="923544" y="1527048"/>
-            <a:ext cx="10177272" cy="2062103"/>
+            <a:ext cx="10177272" cy="2339102"/>
           </a:xfrm>
           <a:prstGeom prst="rect">
             <a:avLst/>
@@ -15598,7 +13689,7 @@
             </a:pPr>
             <a:r>
               <a:rPr lang="en-US" dirty="0"/>
-              <a:t>Handle input / output.</a:t>
+              <a:t>Basic arithmetic operations (add, subtract, multiply, divide).</a:t>
             </a:r>
           </a:p>
           <a:p>
@@ -15608,7 +13699,15 @@
             </a:pPr>
             <a:r>
               <a:rPr lang="en-US" dirty="0"/>
-              <a:t>Basic arithmetic operations (add, subtract, multiply divide).</a:t>
+              <a:t>Comparisons (</a:t>
+            </a:r>
+            <a:r>
+              <a:rPr lang="en-US" dirty="0" err="1"/>
+              <a:t>i.e</a:t>
+            </a:r>
+            <a:r>
+              <a:rPr lang="en-US" dirty="0"/>
+              <a:t> is value 1 greater than value 2).</a:t>
             </a:r>
           </a:p>
           <a:p>
@@ -15618,16 +13717,12 @@
             </a:pPr>
             <a:r>
               <a:rPr lang="en-US" dirty="0"/>
-              <a:t>Comparisons (</a:t>
-            </a:r>
-            <a:r>
-              <a:rPr lang="en-US" dirty="0" err="1"/>
-              <a:t>i.e</a:t>
-            </a:r>
-            <a:r>
-              <a:rPr lang="en-US" dirty="0"/>
-              <a:t> is value 1 greater than value 2).</a:t>
-            </a:r>
+              <a:t>Handle input / output.</a:t>
+            </a:r>
+          </a:p>
+          <a:p>
+            <a:pPr lvl="1"/>
+            <a:endParaRPr lang="en-US" dirty="0"/>
           </a:p>
           <a:p>
             <a:endParaRPr lang="en-US" sz="2800" dirty="0"/>
@@ -15713,7 +13808,7 @@
         <p:spPr>
           <a:xfrm>
             <a:off x="923544" y="1527048"/>
-            <a:ext cx="10177272" cy="4924425"/>
+            <a:ext cx="10177272" cy="5201424"/>
           </a:xfrm>
           <a:prstGeom prst="rect">
             <a:avLst/>
@@ -15748,7 +13843,7 @@
             </a:pPr>
             <a:r>
               <a:rPr lang="en-US" dirty="0"/>
-              <a:t>Handle input / output.</a:t>
+              <a:t>Basic arithmetic operations (add, subtract, multiply, divide).</a:t>
             </a:r>
           </a:p>
           <a:p>
@@ -15758,7 +13853,15 @@
             </a:pPr>
             <a:r>
               <a:rPr lang="en-US" dirty="0"/>
-              <a:t>Basic arithmetic operations (add, subtract, multiply divide).</a:t>
+              <a:t>Comparisons (</a:t>
+            </a:r>
+            <a:r>
+              <a:rPr lang="en-US" dirty="0" err="1"/>
+              <a:t>i.e</a:t>
+            </a:r>
+            <a:r>
+              <a:rPr lang="en-US" dirty="0"/>
+              <a:t> is value 1 greater than value 2).</a:t>
             </a:r>
           </a:p>
           <a:p>
@@ -15768,16 +13871,12 @@
             </a:pPr>
             <a:r>
               <a:rPr lang="en-US" dirty="0"/>
-              <a:t>Comparisons (</a:t>
-            </a:r>
-            <a:r>
-              <a:rPr lang="en-US" dirty="0" err="1"/>
-              <a:t>i.e</a:t>
-            </a:r>
-            <a:r>
-              <a:rPr lang="en-US" dirty="0"/>
-              <a:t> is value 1 greater than value 2).</a:t>
-            </a:r>
+              <a:t>Handle input / output.</a:t>
+            </a:r>
+          </a:p>
+          <a:p>
+            <a:pPr lvl="1"/>
+            <a:endParaRPr lang="en-US" dirty="0"/>
           </a:p>
           <a:p>
             <a:pPr marL="742950" lvl="1" indent="-285750">
@@ -16351,7 +14450,7 @@
           <p:cNvPr id="2" name="Title 1">
             <a:extLst>
               <a:ext uri="{FF2B5EF4-FFF2-40B4-BE49-F238E27FC236}">
-                <a16:creationId xmlns:a16="http://schemas.microsoft.com/office/drawing/2014/main" id="{FD0601CB-C244-1CF5-571C-4CFA71916AA1}"/>
+                <a16:creationId xmlns:a16="http://schemas.microsoft.com/office/drawing/2014/main" id="{0BD6A09F-C0AE-4396-13F8-A5819F58D109}"/>
               </a:ext>
             </a:extLst>
           </p:cNvPr>
@@ -16369,7 +14468,7 @@
           <a:p>
             <a:r>
               <a:rPr lang="en-US" dirty="0"/>
-              <a:t>What do you already know?</a:t>
+              <a:t>Today’s learning objectives</a:t>
             </a:r>
           </a:p>
         </p:txBody>
@@ -16379,7 +14478,7 @@
           <p:cNvPr id="3" name="Content Placeholder 2">
             <a:extLst>
               <a:ext uri="{FF2B5EF4-FFF2-40B4-BE49-F238E27FC236}">
-                <a16:creationId xmlns:a16="http://schemas.microsoft.com/office/drawing/2014/main" id="{FFCDE803-633B-E2AA-6B43-F65A1927B9B1}"/>
+                <a16:creationId xmlns:a16="http://schemas.microsoft.com/office/drawing/2014/main" id="{7CB20A90-9A7F-509C-D767-84D535328D62}"/>
               </a:ext>
             </a:extLst>
           </p:cNvPr>
@@ -16397,7 +14496,26 @@
           <a:p>
             <a:r>
               <a:rPr lang="en-US" dirty="0"/>
-              <a:t>(Brief review of Menti answers)</a:t>
+              <a:t>Understand what we mean by the word </a:t>
+            </a:r>
+            <a:r>
+              <a:rPr lang="en-US" i="1" dirty="0"/>
+              <a:t>algorithm.</a:t>
+            </a:r>
+            <a:endParaRPr lang="en-US" dirty="0"/>
+          </a:p>
+          <a:p>
+            <a:r>
+              <a:rPr lang="en-US" dirty="0"/>
+              <a:t>Begin to develop a mental model of how a computer can </a:t>
+            </a:r>
+            <a:r>
+              <a:rPr lang="en-US" i="1" dirty="0"/>
+              <a:t>execute</a:t>
+            </a:r>
+            <a:r>
+              <a:rPr lang="en-US" dirty="0"/>
+              <a:t> an algorithm. </a:t>
             </a:r>
           </a:p>
         </p:txBody>
@@ -16405,7 +14523,7 @@
     </p:spTree>
     <p:extLst>
       <p:ext uri="{BB962C8B-B14F-4D97-AF65-F5344CB8AC3E}">
-        <p14:creationId xmlns:p14="http://schemas.microsoft.com/office/powerpoint/2010/main" val="3878556393"/>
+        <p14:creationId xmlns:p14="http://schemas.microsoft.com/office/powerpoint/2010/main" val="3862914363"/>
       </p:ext>
     </p:extLst>
   </p:cSld>
@@ -17861,7 +15979,7 @@
                 <a:pPr algn="ctr"/>
                 <a:r>
                   <a:rPr lang="en-US" dirty="0"/>
-                  <a:t>Program Counter: 8</a:t>
+                  <a:t>Program Counter: 9</a:t>
                 </a:r>
               </a:p>
             </p:txBody>
@@ -18085,6 +16203,1216 @@
         <p:cNvPr id="1" name="">
           <a:extLst>
             <a:ext uri="{FF2B5EF4-FFF2-40B4-BE49-F238E27FC236}">
+              <a16:creationId xmlns:a16="http://schemas.microsoft.com/office/drawing/2014/main" id="{D0226312-7747-658D-10CC-460F3A7A61F3}"/>
+            </a:ext>
+          </a:extLst>
+        </p:cNvPr>
+        <p:cNvGrpSpPr/>
+        <p:nvPr/>
+      </p:nvGrpSpPr>
+      <p:grpSpPr>
+        <a:xfrm>
+          <a:off x="0" y="0"/>
+          <a:ext cx="0" cy="0"/>
+          <a:chOff x="0" y="0"/>
+          <a:chExt cx="0" cy="0"/>
+        </a:xfrm>
+      </p:grpSpPr>
+      <p:sp>
+        <p:nvSpPr>
+          <p:cNvPr id="2" name="Title 1">
+            <a:extLst>
+              <a:ext uri="{FF2B5EF4-FFF2-40B4-BE49-F238E27FC236}">
+                <a16:creationId xmlns:a16="http://schemas.microsoft.com/office/drawing/2014/main" id="{8C95F5B7-680F-B7A8-E60F-F254B4E407DF}"/>
+              </a:ext>
+            </a:extLst>
+          </p:cNvPr>
+          <p:cNvSpPr>
+            <a:spLocks noGrp="1"/>
+          </p:cNvSpPr>
+          <p:nvPr>
+            <p:ph type="title"/>
+          </p:nvPr>
+        </p:nvSpPr>
+        <p:spPr/>
+        <p:txBody>
+          <a:bodyPr/>
+          <a:lstStyle/>
+          <a:p>
+            <a:r>
+              <a:rPr lang="en-US" dirty="0"/>
+              <a:t>How a computer executes algorithms</a:t>
+            </a:r>
+          </a:p>
+        </p:txBody>
+      </p:sp>
+      <p:sp>
+        <p:nvSpPr>
+          <p:cNvPr id="40" name="TextBox 39">
+            <a:extLst>
+              <a:ext uri="{FF2B5EF4-FFF2-40B4-BE49-F238E27FC236}">
+                <a16:creationId xmlns:a16="http://schemas.microsoft.com/office/drawing/2014/main" id="{92D033F1-D1BC-DE1C-50E9-DA5CD688BB02}"/>
+              </a:ext>
+            </a:extLst>
+          </p:cNvPr>
+          <p:cNvSpPr txBox="1"/>
+          <p:nvPr/>
+        </p:nvSpPr>
+        <p:spPr>
+          <a:xfrm>
+            <a:off x="923544" y="1527048"/>
+            <a:ext cx="10177272" cy="954107"/>
+          </a:xfrm>
+          <a:prstGeom prst="rect">
+            <a:avLst/>
+          </a:prstGeom>
+          <a:noFill/>
+        </p:spPr>
+        <p:txBody>
+          <a:bodyPr wrap="square" rtlCol="0">
+            <a:spAutoFit/>
+          </a:bodyPr>
+          <a:lstStyle/>
+          <a:p>
+            <a:r>
+              <a:rPr lang="en-US" sz="2800" dirty="0"/>
+              <a:t>Exercise: What will be stored in memory after the following piece of code executes? Don’t forget the program counter!</a:t>
+            </a:r>
+          </a:p>
+        </p:txBody>
+      </p:sp>
+      <p:grpSp>
+        <p:nvGrpSpPr>
+          <p:cNvPr id="5" name="Group 4">
+            <a:extLst>
+              <a:ext uri="{FF2B5EF4-FFF2-40B4-BE49-F238E27FC236}">
+                <a16:creationId xmlns:a16="http://schemas.microsoft.com/office/drawing/2014/main" id="{E5CFFF95-7257-BB9B-33BF-684CD110E62D}"/>
+              </a:ext>
+            </a:extLst>
+          </p:cNvPr>
+          <p:cNvGrpSpPr/>
+          <p:nvPr/>
+        </p:nvGrpSpPr>
+        <p:grpSpPr>
+          <a:xfrm>
+            <a:off x="1097438" y="3459801"/>
+            <a:ext cx="10256362" cy="3033074"/>
+            <a:chOff x="857840" y="395926"/>
+            <a:chExt cx="10256362" cy="3033074"/>
+          </a:xfrm>
+        </p:grpSpPr>
+        <p:sp>
+          <p:nvSpPr>
+            <p:cNvPr id="6" name="Rounded Rectangle 5">
+              <a:extLst>
+                <a:ext uri="{FF2B5EF4-FFF2-40B4-BE49-F238E27FC236}">
+                  <a16:creationId xmlns:a16="http://schemas.microsoft.com/office/drawing/2014/main" id="{83E88D3A-6E46-C832-1F08-0C55FFEF82F0}"/>
+                </a:ext>
+              </a:extLst>
+            </p:cNvPr>
+            <p:cNvSpPr/>
+            <p:nvPr/>
+          </p:nvSpPr>
+          <p:spPr>
+            <a:xfrm>
+              <a:off x="4854804" y="1011117"/>
+              <a:ext cx="6259398" cy="2417883"/>
+            </a:xfrm>
+            <a:prstGeom prst="roundRect">
+              <a:avLst/>
+            </a:prstGeom>
+            <a:noFill/>
+            <a:ln w="38100"/>
+          </p:spPr>
+          <p:style>
+            <a:lnRef idx="2">
+              <a:schemeClr val="accent1">
+                <a:shade val="15000"/>
+              </a:schemeClr>
+            </a:lnRef>
+            <a:fillRef idx="1">
+              <a:schemeClr val="accent1"/>
+            </a:fillRef>
+            <a:effectRef idx="0">
+              <a:schemeClr val="accent1"/>
+            </a:effectRef>
+            <a:fontRef idx="minor">
+              <a:schemeClr val="lt1"/>
+            </a:fontRef>
+          </p:style>
+          <p:txBody>
+            <a:bodyPr rtlCol="0" anchor="ctr"/>
+            <a:lstStyle/>
+            <a:p>
+              <a:pPr algn="ctr"/>
+              <a:endParaRPr lang="en-US"/>
+            </a:p>
+          </p:txBody>
+        </p:sp>
+        <p:sp>
+          <p:nvSpPr>
+            <p:cNvPr id="7" name="TextBox 6">
+              <a:extLst>
+                <a:ext uri="{FF2B5EF4-FFF2-40B4-BE49-F238E27FC236}">
+                  <a16:creationId xmlns:a16="http://schemas.microsoft.com/office/drawing/2014/main" id="{16DC6E7C-C93A-6D1B-D665-AD5111C2D347}"/>
+                </a:ext>
+              </a:extLst>
+            </p:cNvPr>
+            <p:cNvSpPr txBox="1"/>
+            <p:nvPr/>
+          </p:nvSpPr>
+          <p:spPr>
+            <a:xfrm>
+              <a:off x="7396062" y="395926"/>
+              <a:ext cx="1176883" cy="490829"/>
+            </a:xfrm>
+            <a:prstGeom prst="rect">
+              <a:avLst/>
+            </a:prstGeom>
+            <a:noFill/>
+          </p:spPr>
+          <p:txBody>
+            <a:bodyPr wrap="square" rtlCol="0">
+              <a:spAutoFit/>
+            </a:bodyPr>
+            <a:lstStyle/>
+            <a:p>
+              <a:r>
+                <a:rPr lang="en-US" dirty="0"/>
+                <a:t>Memory</a:t>
+              </a:r>
+            </a:p>
+          </p:txBody>
+        </p:sp>
+        <p:grpSp>
+          <p:nvGrpSpPr>
+            <p:cNvPr id="20" name="Group 19">
+              <a:extLst>
+                <a:ext uri="{FF2B5EF4-FFF2-40B4-BE49-F238E27FC236}">
+                  <a16:creationId xmlns:a16="http://schemas.microsoft.com/office/drawing/2014/main" id="{E4469F3F-6083-824D-8E86-F37EF0481C1A}"/>
+                </a:ext>
+              </a:extLst>
+            </p:cNvPr>
+            <p:cNvGrpSpPr/>
+            <p:nvPr/>
+          </p:nvGrpSpPr>
+          <p:grpSpPr>
+            <a:xfrm>
+              <a:off x="857840" y="395926"/>
+              <a:ext cx="3761296" cy="3033074"/>
+              <a:chOff x="4207110" y="914400"/>
+              <a:chExt cx="3819260" cy="2282283"/>
+            </a:xfrm>
+          </p:grpSpPr>
+          <p:sp>
+            <p:nvSpPr>
+              <p:cNvPr id="22" name="Rounded Rectangle 21">
+                <a:extLst>
+                  <a:ext uri="{FF2B5EF4-FFF2-40B4-BE49-F238E27FC236}">
+                    <a16:creationId xmlns:a16="http://schemas.microsoft.com/office/drawing/2014/main" id="{80A4F81E-CF46-FF14-FFD9-795C979E1B32}"/>
+                  </a:ext>
+                </a:extLst>
+              </p:cNvPr>
+              <p:cNvSpPr/>
+              <p:nvPr/>
+            </p:nvSpPr>
+            <p:spPr>
+              <a:xfrm>
+                <a:off x="4207110" y="1377310"/>
+                <a:ext cx="3819260" cy="1819373"/>
+              </a:xfrm>
+              <a:prstGeom prst="roundRect">
+                <a:avLst/>
+              </a:prstGeom>
+              <a:noFill/>
+              <a:ln w="38100"/>
+            </p:spPr>
+            <p:style>
+              <a:lnRef idx="2">
+                <a:schemeClr val="accent1">
+                  <a:shade val="15000"/>
+                </a:schemeClr>
+              </a:lnRef>
+              <a:fillRef idx="1">
+                <a:schemeClr val="accent1"/>
+              </a:fillRef>
+              <a:effectRef idx="0">
+                <a:schemeClr val="accent1"/>
+              </a:effectRef>
+              <a:fontRef idx="minor">
+                <a:schemeClr val="lt1"/>
+              </a:fontRef>
+            </p:style>
+            <p:txBody>
+              <a:bodyPr rtlCol="0" anchor="ctr"/>
+              <a:lstStyle/>
+              <a:p>
+                <a:pPr algn="ctr"/>
+                <a:endParaRPr lang="en-US"/>
+              </a:p>
+            </p:txBody>
+          </p:sp>
+          <p:sp>
+            <p:nvSpPr>
+              <p:cNvPr id="23" name="TextBox 22">
+                <a:extLst>
+                  <a:ext uri="{FF2B5EF4-FFF2-40B4-BE49-F238E27FC236}">
+                    <a16:creationId xmlns:a16="http://schemas.microsoft.com/office/drawing/2014/main" id="{B6465C68-3C73-88DF-CF70-FEC10A36F288}"/>
+                  </a:ext>
+                </a:extLst>
+              </p:cNvPr>
+              <p:cNvSpPr txBox="1"/>
+              <p:nvPr/>
+            </p:nvSpPr>
+            <p:spPr>
+              <a:xfrm>
+                <a:off x="5582238" y="914400"/>
+                <a:ext cx="1027522" cy="277910"/>
+              </a:xfrm>
+              <a:prstGeom prst="rect">
+                <a:avLst/>
+              </a:prstGeom>
+              <a:noFill/>
+            </p:spPr>
+            <p:txBody>
+              <a:bodyPr wrap="square" rtlCol="0">
+                <a:spAutoFit/>
+              </a:bodyPr>
+              <a:lstStyle/>
+              <a:p>
+                <a:r>
+                  <a:rPr lang="en-US" dirty="0"/>
+                  <a:t>Program</a:t>
+                </a:r>
+              </a:p>
+            </p:txBody>
+          </p:sp>
+        </p:grpSp>
+      </p:grpSp>
+      <p:pic>
+        <p:nvPicPr>
+          <p:cNvPr id="11" name="Picture 10">
+            <a:extLst>
+              <a:ext uri="{FF2B5EF4-FFF2-40B4-BE49-F238E27FC236}">
+                <a16:creationId xmlns:a16="http://schemas.microsoft.com/office/drawing/2014/main" id="{B6C6B053-CC24-E1A4-BEA0-25531ECC3D40}"/>
+              </a:ext>
+            </a:extLst>
+          </p:cNvPr>
+          <p:cNvPicPr>
+            <a:picLocks noChangeAspect="1"/>
+          </p:cNvPicPr>
+          <p:nvPr/>
+        </p:nvPicPr>
+        <p:blipFill>
+          <a:blip r:embed="rId2"/>
+          <a:stretch>
+            <a:fillRect/>
+          </a:stretch>
+        </p:blipFill>
+        <p:spPr>
+          <a:xfrm>
+            <a:off x="1985718" y="4204760"/>
+            <a:ext cx="1993900" cy="2158345"/>
+          </a:xfrm>
+          <a:prstGeom prst="rect">
+            <a:avLst/>
+          </a:prstGeom>
+        </p:spPr>
+      </p:pic>
+    </p:spTree>
+    <p:extLst>
+      <p:ext uri="{BB962C8B-B14F-4D97-AF65-F5344CB8AC3E}">
+        <p14:creationId xmlns:p14="http://schemas.microsoft.com/office/powerpoint/2010/main" val="3652905622"/>
+      </p:ext>
+    </p:extLst>
+  </p:cSld>
+  <p:clrMapOvr>
+    <a:masterClrMapping/>
+  </p:clrMapOvr>
+</p:sld>
+</file>
+
+<file path=ppt/slides/slide34.xml><?xml version="1.0" encoding="utf-8"?>
+<p:sld xmlns:a="http://schemas.openxmlformats.org/drawingml/2006/main" xmlns:r="http://schemas.openxmlformats.org/officeDocument/2006/relationships" xmlns:p="http://schemas.openxmlformats.org/presentationml/2006/main">
+  <p:cSld>
+    <p:spTree>
+      <p:nvGrpSpPr>
+        <p:cNvPr id="1" name="">
+          <a:extLst>
+            <a:ext uri="{FF2B5EF4-FFF2-40B4-BE49-F238E27FC236}">
+              <a16:creationId xmlns:a16="http://schemas.microsoft.com/office/drawing/2014/main" id="{C2139D54-1B7D-C601-1EB7-75DB0D2F1559}"/>
+            </a:ext>
+          </a:extLst>
+        </p:cNvPr>
+        <p:cNvGrpSpPr/>
+        <p:nvPr/>
+      </p:nvGrpSpPr>
+      <p:grpSpPr>
+        <a:xfrm>
+          <a:off x="0" y="0"/>
+          <a:ext cx="0" cy="0"/>
+          <a:chOff x="0" y="0"/>
+          <a:chExt cx="0" cy="0"/>
+        </a:xfrm>
+      </p:grpSpPr>
+      <p:sp>
+        <p:nvSpPr>
+          <p:cNvPr id="2" name="Title 1">
+            <a:extLst>
+              <a:ext uri="{FF2B5EF4-FFF2-40B4-BE49-F238E27FC236}">
+                <a16:creationId xmlns:a16="http://schemas.microsoft.com/office/drawing/2014/main" id="{F0597AC3-1B66-C5A1-E15B-CEBE9B676A5A}"/>
+              </a:ext>
+            </a:extLst>
+          </p:cNvPr>
+          <p:cNvSpPr>
+            <a:spLocks noGrp="1"/>
+          </p:cNvSpPr>
+          <p:nvPr>
+            <p:ph type="title"/>
+          </p:nvPr>
+        </p:nvSpPr>
+        <p:spPr/>
+        <p:txBody>
+          <a:bodyPr/>
+          <a:lstStyle/>
+          <a:p>
+            <a:r>
+              <a:rPr lang="en-US" dirty="0"/>
+              <a:t>How a computer executes algorithms</a:t>
+            </a:r>
+          </a:p>
+        </p:txBody>
+      </p:sp>
+      <p:sp>
+        <p:nvSpPr>
+          <p:cNvPr id="40" name="TextBox 39">
+            <a:extLst>
+              <a:ext uri="{FF2B5EF4-FFF2-40B4-BE49-F238E27FC236}">
+                <a16:creationId xmlns:a16="http://schemas.microsoft.com/office/drawing/2014/main" id="{4762B84B-7569-4BA9-C640-E8971A65F392}"/>
+              </a:ext>
+            </a:extLst>
+          </p:cNvPr>
+          <p:cNvSpPr txBox="1"/>
+          <p:nvPr/>
+        </p:nvSpPr>
+        <p:spPr>
+          <a:xfrm>
+            <a:off x="923544" y="1527048"/>
+            <a:ext cx="10515600" cy="2031325"/>
+          </a:xfrm>
+          <a:prstGeom prst="rect">
+            <a:avLst/>
+          </a:prstGeom>
+          <a:noFill/>
+        </p:spPr>
+        <p:txBody>
+          <a:bodyPr wrap="square" rtlCol="0">
+            <a:spAutoFit/>
+          </a:bodyPr>
+          <a:lstStyle/>
+          <a:p>
+            <a:r>
+              <a:rPr lang="en-US" dirty="0"/>
+              <a:t>A CPU can execute a limited number of instructions. These are:</a:t>
+            </a:r>
+          </a:p>
+          <a:p>
+            <a:pPr marL="742950" lvl="1" indent="-285750">
+              <a:buFont typeface="Arial" panose="020B0604020202020204" pitchFamily="34" charset="0"/>
+              <a:buChar char="•"/>
+            </a:pPr>
+            <a:r>
+              <a:rPr lang="en-US" dirty="0"/>
+              <a:t>Read / write data from memory.</a:t>
+            </a:r>
+          </a:p>
+          <a:p>
+            <a:pPr marL="742950" lvl="1" indent="-285750">
+              <a:buFont typeface="Arial" panose="020B0604020202020204" pitchFamily="34" charset="0"/>
+              <a:buChar char="•"/>
+            </a:pPr>
+            <a:r>
+              <a:rPr lang="en-US" dirty="0"/>
+              <a:t>Basic arithmetic operations (add, subtract, multiply divide).</a:t>
+            </a:r>
+          </a:p>
+          <a:p>
+            <a:pPr marL="742950" lvl="1" indent="-285750">
+              <a:buFont typeface="Arial" panose="020B0604020202020204" pitchFamily="34" charset="0"/>
+              <a:buChar char="•"/>
+            </a:pPr>
+            <a:r>
+              <a:rPr lang="en-US" dirty="0"/>
+              <a:t>Comparisons (</a:t>
+            </a:r>
+            <a:r>
+              <a:rPr lang="en-US" dirty="0" err="1"/>
+              <a:t>i.e</a:t>
+            </a:r>
+            <a:r>
+              <a:rPr lang="en-US" dirty="0"/>
+              <a:t> is value 1 greater than value 2).</a:t>
+            </a:r>
+          </a:p>
+          <a:p>
+            <a:pPr marL="742950" lvl="1" indent="-285750">
+              <a:buFont typeface="Arial" panose="020B0604020202020204" pitchFamily="34" charset="0"/>
+              <a:buChar char="•"/>
+            </a:pPr>
+            <a:r>
+              <a:rPr lang="en-US" dirty="0"/>
+              <a:t>Handle input / output.</a:t>
+            </a:r>
+          </a:p>
+          <a:p>
+            <a:r>
+              <a:rPr lang="en-US" dirty="0"/>
+              <a:t>One line of Python code may require multiple instructions to be carried out.</a:t>
+            </a:r>
+          </a:p>
+          <a:p>
+            <a:r>
+              <a:rPr lang="en-US" dirty="0"/>
+              <a:t>Q: How many ‘instructions’ are executed in this piece of code?</a:t>
+            </a:r>
+          </a:p>
+        </p:txBody>
+      </p:sp>
+      <p:grpSp>
+        <p:nvGrpSpPr>
+          <p:cNvPr id="3" name="Group 2">
+            <a:extLst>
+              <a:ext uri="{FF2B5EF4-FFF2-40B4-BE49-F238E27FC236}">
+                <a16:creationId xmlns:a16="http://schemas.microsoft.com/office/drawing/2014/main" id="{3B4896AE-1DE1-AFE0-9FBB-2C82BF11435D}"/>
+              </a:ext>
+            </a:extLst>
+          </p:cNvPr>
+          <p:cNvGrpSpPr/>
+          <p:nvPr/>
+        </p:nvGrpSpPr>
+        <p:grpSpPr>
+          <a:xfrm>
+            <a:off x="1097438" y="3639772"/>
+            <a:ext cx="10256362" cy="2853104"/>
+            <a:chOff x="857840" y="575897"/>
+            <a:chExt cx="10256362" cy="2853104"/>
+          </a:xfrm>
+        </p:grpSpPr>
+        <p:sp>
+          <p:nvSpPr>
+            <p:cNvPr id="4" name="Rounded Rectangle 3">
+              <a:extLst>
+                <a:ext uri="{FF2B5EF4-FFF2-40B4-BE49-F238E27FC236}">
+                  <a16:creationId xmlns:a16="http://schemas.microsoft.com/office/drawing/2014/main" id="{3522BBF6-801C-F9AC-159C-066CF7F6C34C}"/>
+                </a:ext>
+              </a:extLst>
+            </p:cNvPr>
+            <p:cNvSpPr/>
+            <p:nvPr/>
+          </p:nvSpPr>
+          <p:spPr>
+            <a:xfrm>
+              <a:off x="4854804" y="1011117"/>
+              <a:ext cx="6259398" cy="2417883"/>
+            </a:xfrm>
+            <a:prstGeom prst="roundRect">
+              <a:avLst/>
+            </a:prstGeom>
+            <a:noFill/>
+            <a:ln w="38100"/>
+          </p:spPr>
+          <p:style>
+            <a:lnRef idx="2">
+              <a:schemeClr val="accent1">
+                <a:shade val="15000"/>
+              </a:schemeClr>
+            </a:lnRef>
+            <a:fillRef idx="1">
+              <a:schemeClr val="accent1"/>
+            </a:fillRef>
+            <a:effectRef idx="0">
+              <a:schemeClr val="accent1"/>
+            </a:effectRef>
+            <a:fontRef idx="minor">
+              <a:schemeClr val="lt1"/>
+            </a:fontRef>
+          </p:style>
+          <p:txBody>
+            <a:bodyPr rtlCol="0" anchor="ctr"/>
+            <a:lstStyle/>
+            <a:p>
+              <a:pPr algn="ctr"/>
+              <a:endParaRPr lang="en-US"/>
+            </a:p>
+          </p:txBody>
+        </p:sp>
+        <p:sp>
+          <p:nvSpPr>
+            <p:cNvPr id="8" name="TextBox 7">
+              <a:extLst>
+                <a:ext uri="{FF2B5EF4-FFF2-40B4-BE49-F238E27FC236}">
+                  <a16:creationId xmlns:a16="http://schemas.microsoft.com/office/drawing/2014/main" id="{AE191953-80EB-84E7-D587-2BDEF187C2BA}"/>
+                </a:ext>
+              </a:extLst>
+            </p:cNvPr>
+            <p:cNvSpPr txBox="1"/>
+            <p:nvPr/>
+          </p:nvSpPr>
+          <p:spPr>
+            <a:xfrm>
+              <a:off x="7396061" y="575897"/>
+              <a:ext cx="1176883" cy="490829"/>
+            </a:xfrm>
+            <a:prstGeom prst="rect">
+              <a:avLst/>
+            </a:prstGeom>
+            <a:noFill/>
+          </p:spPr>
+          <p:txBody>
+            <a:bodyPr wrap="square" rtlCol="0">
+              <a:spAutoFit/>
+            </a:bodyPr>
+            <a:lstStyle/>
+            <a:p>
+              <a:r>
+                <a:rPr lang="en-US" dirty="0"/>
+                <a:t>Memory</a:t>
+              </a:r>
+            </a:p>
+          </p:txBody>
+        </p:sp>
+        <p:grpSp>
+          <p:nvGrpSpPr>
+            <p:cNvPr id="9" name="Group 8">
+              <a:extLst>
+                <a:ext uri="{FF2B5EF4-FFF2-40B4-BE49-F238E27FC236}">
+                  <a16:creationId xmlns:a16="http://schemas.microsoft.com/office/drawing/2014/main" id="{EFA65389-3D54-40AA-D3B5-84003A503D95}"/>
+                </a:ext>
+              </a:extLst>
+            </p:cNvPr>
+            <p:cNvGrpSpPr/>
+            <p:nvPr/>
+          </p:nvGrpSpPr>
+          <p:grpSpPr>
+            <a:xfrm>
+              <a:off x="857840" y="614205"/>
+              <a:ext cx="3761296" cy="2814796"/>
+              <a:chOff x="1121791" y="614205"/>
+              <a:chExt cx="3761296" cy="2814796"/>
+            </a:xfrm>
+          </p:grpSpPr>
+          <p:grpSp>
+            <p:nvGrpSpPr>
+              <p:cNvPr id="25" name="Group 24">
+                <a:extLst>
+                  <a:ext uri="{FF2B5EF4-FFF2-40B4-BE49-F238E27FC236}">
+                    <a16:creationId xmlns:a16="http://schemas.microsoft.com/office/drawing/2014/main" id="{44AA83E0-E1FC-B0B9-2779-9A0773F32DD0}"/>
+                  </a:ext>
+                </a:extLst>
+              </p:cNvPr>
+              <p:cNvGrpSpPr/>
+              <p:nvPr/>
+            </p:nvGrpSpPr>
+            <p:grpSpPr>
+              <a:xfrm>
+                <a:off x="1121791" y="614205"/>
+                <a:ext cx="3761296" cy="2814796"/>
+                <a:chOff x="4207110" y="1078647"/>
+                <a:chExt cx="3819260" cy="2118036"/>
+              </a:xfrm>
+            </p:grpSpPr>
+            <p:sp>
+              <p:nvSpPr>
+                <p:cNvPr id="27" name="Rounded Rectangle 26">
+                  <a:extLst>
+                    <a:ext uri="{FF2B5EF4-FFF2-40B4-BE49-F238E27FC236}">
+                      <a16:creationId xmlns:a16="http://schemas.microsoft.com/office/drawing/2014/main" id="{65AC8495-5505-2523-FAFD-F1BCBAC5A2FB}"/>
+                    </a:ext>
+                  </a:extLst>
+                </p:cNvPr>
+                <p:cNvSpPr/>
+                <p:nvPr/>
+              </p:nvSpPr>
+              <p:spPr>
+                <a:xfrm>
+                  <a:off x="4207110" y="1377310"/>
+                  <a:ext cx="3819260" cy="1819373"/>
+                </a:xfrm>
+                <a:prstGeom prst="roundRect">
+                  <a:avLst/>
+                </a:prstGeom>
+                <a:noFill/>
+                <a:ln w="38100"/>
+              </p:spPr>
+              <p:style>
+                <a:lnRef idx="2">
+                  <a:schemeClr val="accent1">
+                    <a:shade val="15000"/>
+                  </a:schemeClr>
+                </a:lnRef>
+                <a:fillRef idx="1">
+                  <a:schemeClr val="accent1"/>
+                </a:fillRef>
+                <a:effectRef idx="0">
+                  <a:schemeClr val="accent1"/>
+                </a:effectRef>
+                <a:fontRef idx="minor">
+                  <a:schemeClr val="lt1"/>
+                </a:fontRef>
+              </p:style>
+              <p:txBody>
+                <a:bodyPr rtlCol="0" anchor="ctr"/>
+                <a:lstStyle/>
+                <a:p>
+                  <a:pPr algn="ctr"/>
+                  <a:endParaRPr lang="en-US"/>
+                </a:p>
+              </p:txBody>
+            </p:sp>
+            <p:sp>
+              <p:nvSpPr>
+                <p:cNvPr id="28" name="TextBox 27">
+                  <a:extLst>
+                    <a:ext uri="{FF2B5EF4-FFF2-40B4-BE49-F238E27FC236}">
+                      <a16:creationId xmlns:a16="http://schemas.microsoft.com/office/drawing/2014/main" id="{E4D4C379-6392-B10D-2D07-8295CFA5B11A}"/>
+                    </a:ext>
+                  </a:extLst>
+                </p:cNvPr>
+                <p:cNvSpPr txBox="1"/>
+                <p:nvPr/>
+              </p:nvSpPr>
+              <p:spPr>
+                <a:xfrm>
+                  <a:off x="5582237" y="1078647"/>
+                  <a:ext cx="1027522" cy="277910"/>
+                </a:xfrm>
+                <a:prstGeom prst="rect">
+                  <a:avLst/>
+                </a:prstGeom>
+                <a:noFill/>
+              </p:spPr>
+              <p:txBody>
+                <a:bodyPr wrap="square" rtlCol="0">
+                  <a:spAutoFit/>
+                </a:bodyPr>
+                <a:lstStyle/>
+                <a:p>
+                  <a:r>
+                    <a:rPr lang="en-US" dirty="0"/>
+                    <a:t>Program</a:t>
+                  </a:r>
+                </a:p>
+              </p:txBody>
+            </p:sp>
+          </p:grpSp>
+          <p:pic>
+            <p:nvPicPr>
+              <p:cNvPr id="26" name="Picture 25" descr="A screen shot of a computer&#10;&#10;AI-generated content may be incorrect.">
+                <a:extLst>
+                  <a:ext uri="{FF2B5EF4-FFF2-40B4-BE49-F238E27FC236}">
+                    <a16:creationId xmlns:a16="http://schemas.microsoft.com/office/drawing/2014/main" id="{4DF05195-43E9-1965-1CA5-BACB047633AA}"/>
+                  </a:ext>
+                </a:extLst>
+              </p:cNvPr>
+              <p:cNvPicPr>
+                <a:picLocks noChangeAspect="1"/>
+              </p:cNvPicPr>
+              <p:nvPr/>
+            </p:nvPicPr>
+            <p:blipFill>
+              <a:blip r:embed="rId2"/>
+              <a:stretch>
+                <a:fillRect/>
+              </a:stretch>
+            </p:blipFill>
+            <p:spPr>
+              <a:xfrm>
+                <a:off x="1533122" y="1130824"/>
+                <a:ext cx="2897780" cy="2159130"/>
+              </a:xfrm>
+              <a:prstGeom prst="rect">
+                <a:avLst/>
+              </a:prstGeom>
+            </p:spPr>
+          </p:pic>
+        </p:grpSp>
+        <p:grpSp>
+          <p:nvGrpSpPr>
+            <p:cNvPr id="10" name="Group 9">
+              <a:extLst>
+                <a:ext uri="{FF2B5EF4-FFF2-40B4-BE49-F238E27FC236}">
+                  <a16:creationId xmlns:a16="http://schemas.microsoft.com/office/drawing/2014/main" id="{069576A2-82EE-CF33-42F5-0CDD44837649}"/>
+                </a:ext>
+              </a:extLst>
+            </p:cNvPr>
+            <p:cNvGrpSpPr/>
+            <p:nvPr/>
+          </p:nvGrpSpPr>
+          <p:grpSpPr>
+            <a:xfrm>
+              <a:off x="5406273" y="1206134"/>
+              <a:ext cx="5156460" cy="2027848"/>
+              <a:chOff x="5335571" y="1206134"/>
+              <a:chExt cx="5156460" cy="2027848"/>
+            </a:xfrm>
+          </p:grpSpPr>
+          <p:grpSp>
+            <p:nvGrpSpPr>
+              <p:cNvPr id="12" name="Group 11">
+                <a:extLst>
+                  <a:ext uri="{FF2B5EF4-FFF2-40B4-BE49-F238E27FC236}">
+                    <a16:creationId xmlns:a16="http://schemas.microsoft.com/office/drawing/2014/main" id="{6B41CCE3-087C-3509-698F-3087D362A5AE}"/>
+                  </a:ext>
+                </a:extLst>
+              </p:cNvPr>
+              <p:cNvGrpSpPr/>
+              <p:nvPr/>
+            </p:nvGrpSpPr>
+            <p:grpSpPr>
+              <a:xfrm>
+                <a:off x="5335571" y="1206135"/>
+                <a:ext cx="2460396" cy="2027847"/>
+                <a:chOff x="5335571" y="1319753"/>
+                <a:chExt cx="2460396" cy="2027847"/>
+              </a:xfrm>
+            </p:grpSpPr>
+            <p:sp>
+              <p:nvSpPr>
+                <p:cNvPr id="18" name="Rounded Rectangle 17">
+                  <a:extLst>
+                    <a:ext uri="{FF2B5EF4-FFF2-40B4-BE49-F238E27FC236}">
+                      <a16:creationId xmlns:a16="http://schemas.microsoft.com/office/drawing/2014/main" id="{5DBCE16B-EB9C-04BF-BF41-26338A444475}"/>
+                    </a:ext>
+                  </a:extLst>
+                </p:cNvPr>
+                <p:cNvSpPr/>
+                <p:nvPr/>
+              </p:nvSpPr>
+              <p:spPr>
+                <a:xfrm>
+                  <a:off x="5335571" y="1319753"/>
+                  <a:ext cx="2460396" cy="443059"/>
+                </a:xfrm>
+                <a:prstGeom prst="roundRect">
+                  <a:avLst/>
+                </a:prstGeom>
+              </p:spPr>
+              <p:style>
+                <a:lnRef idx="2">
+                  <a:schemeClr val="accent1">
+                    <a:shade val="15000"/>
+                  </a:schemeClr>
+                </a:lnRef>
+                <a:fillRef idx="1">
+                  <a:schemeClr val="accent1"/>
+                </a:fillRef>
+                <a:effectRef idx="0">
+                  <a:schemeClr val="accent1"/>
+                </a:effectRef>
+                <a:fontRef idx="minor">
+                  <a:schemeClr val="lt1"/>
+                </a:fontRef>
+              </p:style>
+              <p:txBody>
+                <a:bodyPr rtlCol="0" anchor="ctr"/>
+                <a:lstStyle/>
+                <a:p>
+                  <a:pPr algn="ctr"/>
+                  <a:r>
+                    <a:rPr lang="en-US" dirty="0"/>
+                    <a:t>Program Counter: 8</a:t>
+                  </a:r>
+                </a:p>
+              </p:txBody>
+            </p:sp>
+            <p:sp>
+              <p:nvSpPr>
+                <p:cNvPr id="19" name="Rounded Rectangle 18">
+                  <a:extLst>
+                    <a:ext uri="{FF2B5EF4-FFF2-40B4-BE49-F238E27FC236}">
+                      <a16:creationId xmlns:a16="http://schemas.microsoft.com/office/drawing/2014/main" id="{566C966F-3122-4A3C-DBF5-69A320C387EF}"/>
+                    </a:ext>
+                  </a:extLst>
+                </p:cNvPr>
+                <p:cNvSpPr/>
+                <p:nvPr/>
+              </p:nvSpPr>
+              <p:spPr>
+                <a:xfrm>
+                  <a:off x="5335571" y="1849918"/>
+                  <a:ext cx="2460396" cy="443059"/>
+                </a:xfrm>
+                <a:prstGeom prst="roundRect">
+                  <a:avLst/>
+                </a:prstGeom>
+              </p:spPr>
+              <p:style>
+                <a:lnRef idx="2">
+                  <a:schemeClr val="accent1">
+                    <a:shade val="15000"/>
+                  </a:schemeClr>
+                </a:lnRef>
+                <a:fillRef idx="1">
+                  <a:schemeClr val="accent1"/>
+                </a:fillRef>
+                <a:effectRef idx="0">
+                  <a:schemeClr val="accent1"/>
+                </a:effectRef>
+                <a:fontRef idx="minor">
+                  <a:schemeClr val="lt1"/>
+                </a:fontRef>
+              </p:style>
+              <p:txBody>
+                <a:bodyPr rtlCol="0" anchor="ctr"/>
+                <a:lstStyle/>
+                <a:p>
+                  <a:pPr algn="ctr"/>
+                  <a:r>
+                    <a:rPr lang="en-US" dirty="0"/>
+                    <a:t>a: 1</a:t>
+                  </a:r>
+                </a:p>
+              </p:txBody>
+            </p:sp>
+            <p:sp>
+              <p:nvSpPr>
+                <p:cNvPr id="21" name="Rounded Rectangle 20">
+                  <a:extLst>
+                    <a:ext uri="{FF2B5EF4-FFF2-40B4-BE49-F238E27FC236}">
+                      <a16:creationId xmlns:a16="http://schemas.microsoft.com/office/drawing/2014/main" id="{5F321B8E-B141-CCBA-82A1-5B80B791E780}"/>
+                    </a:ext>
+                  </a:extLst>
+                </p:cNvPr>
+                <p:cNvSpPr/>
+                <p:nvPr/>
+              </p:nvSpPr>
+              <p:spPr>
+                <a:xfrm>
+                  <a:off x="5335571" y="2380083"/>
+                  <a:ext cx="2460396" cy="443059"/>
+                </a:xfrm>
+                <a:prstGeom prst="roundRect">
+                  <a:avLst/>
+                </a:prstGeom>
+              </p:spPr>
+              <p:style>
+                <a:lnRef idx="2">
+                  <a:schemeClr val="accent1">
+                    <a:shade val="15000"/>
+                  </a:schemeClr>
+                </a:lnRef>
+                <a:fillRef idx="1">
+                  <a:schemeClr val="accent1"/>
+                </a:fillRef>
+                <a:effectRef idx="0">
+                  <a:schemeClr val="accent1"/>
+                </a:effectRef>
+                <a:fontRef idx="minor">
+                  <a:schemeClr val="lt1"/>
+                </a:fontRef>
+              </p:style>
+              <p:txBody>
+                <a:bodyPr rtlCol="0" anchor="ctr"/>
+                <a:lstStyle/>
+                <a:p>
+                  <a:pPr algn="ctr"/>
+                  <a:r>
+                    <a:rPr lang="en-US" dirty="0"/>
+                    <a:t>b: 2</a:t>
+                  </a:r>
+                </a:p>
+              </p:txBody>
+            </p:sp>
+            <p:sp>
+              <p:nvSpPr>
+                <p:cNvPr id="24" name="Rounded Rectangle 23">
+                  <a:extLst>
+                    <a:ext uri="{FF2B5EF4-FFF2-40B4-BE49-F238E27FC236}">
+                      <a16:creationId xmlns:a16="http://schemas.microsoft.com/office/drawing/2014/main" id="{C84FE260-1412-41DC-FF33-EBCB2472E64D}"/>
+                    </a:ext>
+                  </a:extLst>
+                </p:cNvPr>
+                <p:cNvSpPr/>
+                <p:nvPr/>
+              </p:nvSpPr>
+              <p:spPr>
+                <a:xfrm>
+                  <a:off x="5335571" y="2904541"/>
+                  <a:ext cx="2460396" cy="443059"/>
+                </a:xfrm>
+                <a:prstGeom prst="roundRect">
+                  <a:avLst/>
+                </a:prstGeom>
+              </p:spPr>
+              <p:style>
+                <a:lnRef idx="2">
+                  <a:schemeClr val="accent1">
+                    <a:shade val="15000"/>
+                  </a:schemeClr>
+                </a:lnRef>
+                <a:fillRef idx="1">
+                  <a:schemeClr val="accent1"/>
+                </a:fillRef>
+                <a:effectRef idx="0">
+                  <a:schemeClr val="accent1"/>
+                </a:effectRef>
+                <a:fontRef idx="minor">
+                  <a:schemeClr val="lt1"/>
+                </a:fontRef>
+              </p:style>
+              <p:txBody>
+                <a:bodyPr rtlCol="0" anchor="ctr"/>
+                <a:lstStyle/>
+                <a:p>
+                  <a:pPr algn="ctr"/>
+                  <a:r>
+                    <a:rPr lang="en-US" dirty="0"/>
+                    <a:t>c: 3</a:t>
+                  </a:r>
+                </a:p>
+              </p:txBody>
+            </p:sp>
+          </p:grpSp>
+          <p:grpSp>
+            <p:nvGrpSpPr>
+              <p:cNvPr id="13" name="Group 12">
+                <a:extLst>
+                  <a:ext uri="{FF2B5EF4-FFF2-40B4-BE49-F238E27FC236}">
+                    <a16:creationId xmlns:a16="http://schemas.microsoft.com/office/drawing/2014/main" id="{145E0058-A414-C9E9-1CDB-93EB4BCF8760}"/>
+                  </a:ext>
+                </a:extLst>
+              </p:cNvPr>
+              <p:cNvGrpSpPr/>
+              <p:nvPr/>
+            </p:nvGrpSpPr>
+            <p:grpSpPr>
+              <a:xfrm>
+                <a:off x="8031635" y="1206134"/>
+                <a:ext cx="2460396" cy="2027848"/>
+                <a:chOff x="8031635" y="1319752"/>
+                <a:chExt cx="2460396" cy="2027848"/>
+              </a:xfrm>
+            </p:grpSpPr>
+            <p:sp>
+              <p:nvSpPr>
+                <p:cNvPr id="14" name="Rounded Rectangle 13">
+                  <a:extLst>
+                    <a:ext uri="{FF2B5EF4-FFF2-40B4-BE49-F238E27FC236}">
+                      <a16:creationId xmlns:a16="http://schemas.microsoft.com/office/drawing/2014/main" id="{119F2150-8F44-EB4C-C38E-CD2ACC318B0E}"/>
+                    </a:ext>
+                  </a:extLst>
+                </p:cNvPr>
+                <p:cNvSpPr/>
+                <p:nvPr/>
+              </p:nvSpPr>
+              <p:spPr>
+                <a:xfrm>
+                  <a:off x="8031635" y="1319752"/>
+                  <a:ext cx="2460396" cy="443059"/>
+                </a:xfrm>
+                <a:prstGeom prst="roundRect">
+                  <a:avLst/>
+                </a:prstGeom>
+              </p:spPr>
+              <p:style>
+                <a:lnRef idx="2">
+                  <a:schemeClr val="accent1">
+                    <a:shade val="15000"/>
+                  </a:schemeClr>
+                </a:lnRef>
+                <a:fillRef idx="1">
+                  <a:schemeClr val="accent1"/>
+                </a:fillRef>
+                <a:effectRef idx="0">
+                  <a:schemeClr val="accent1"/>
+                </a:effectRef>
+                <a:fontRef idx="minor">
+                  <a:schemeClr val="lt1"/>
+                </a:fontRef>
+              </p:style>
+              <p:txBody>
+                <a:bodyPr rtlCol="0" anchor="ctr"/>
+                <a:lstStyle/>
+                <a:p>
+                  <a:pPr algn="ctr"/>
+                  <a:r>
+                    <a:rPr lang="en-US" dirty="0"/>
+                    <a:t>d: 4</a:t>
+                  </a:r>
+                </a:p>
+              </p:txBody>
+            </p:sp>
+            <p:sp>
+              <p:nvSpPr>
+                <p:cNvPr id="15" name="Rounded Rectangle 14">
+                  <a:extLst>
+                    <a:ext uri="{FF2B5EF4-FFF2-40B4-BE49-F238E27FC236}">
+                      <a16:creationId xmlns:a16="http://schemas.microsoft.com/office/drawing/2014/main" id="{4766EE73-4BF2-A12D-15E0-1D8B08FD2D50}"/>
+                    </a:ext>
+                  </a:extLst>
+                </p:cNvPr>
+                <p:cNvSpPr/>
+                <p:nvPr/>
+              </p:nvSpPr>
+              <p:spPr>
+                <a:xfrm>
+                  <a:off x="8031635" y="1849916"/>
+                  <a:ext cx="2460396" cy="443059"/>
+                </a:xfrm>
+                <a:prstGeom prst="roundRect">
+                  <a:avLst/>
+                </a:prstGeom>
+              </p:spPr>
+              <p:style>
+                <a:lnRef idx="2">
+                  <a:schemeClr val="accent1">
+                    <a:shade val="15000"/>
+                  </a:schemeClr>
+                </a:lnRef>
+                <a:fillRef idx="1">
+                  <a:schemeClr val="accent1"/>
+                </a:fillRef>
+                <a:effectRef idx="0">
+                  <a:schemeClr val="accent1"/>
+                </a:effectRef>
+                <a:fontRef idx="minor">
+                  <a:schemeClr val="lt1"/>
+                </a:fontRef>
+              </p:style>
+              <p:txBody>
+                <a:bodyPr rtlCol="0" anchor="ctr"/>
+                <a:lstStyle/>
+                <a:p>
+                  <a:pPr algn="ctr"/>
+                  <a:r>
+                    <a:rPr lang="en-US" dirty="0"/>
+                    <a:t>sum1: 3</a:t>
+                  </a:r>
+                </a:p>
+              </p:txBody>
+            </p:sp>
+            <p:sp>
+              <p:nvSpPr>
+                <p:cNvPr id="16" name="Rounded Rectangle 15">
+                  <a:extLst>
+                    <a:ext uri="{FF2B5EF4-FFF2-40B4-BE49-F238E27FC236}">
+                      <a16:creationId xmlns:a16="http://schemas.microsoft.com/office/drawing/2014/main" id="{69064221-DCB6-46CC-2303-91529A0BB82C}"/>
+                    </a:ext>
+                  </a:extLst>
+                </p:cNvPr>
+                <p:cNvSpPr/>
+                <p:nvPr/>
+              </p:nvSpPr>
+              <p:spPr>
+                <a:xfrm>
+                  <a:off x="8031635" y="2375182"/>
+                  <a:ext cx="2460396" cy="443059"/>
+                </a:xfrm>
+                <a:prstGeom prst="roundRect">
+                  <a:avLst/>
+                </a:prstGeom>
+              </p:spPr>
+              <p:style>
+                <a:lnRef idx="2">
+                  <a:schemeClr val="accent1">
+                    <a:shade val="15000"/>
+                  </a:schemeClr>
+                </a:lnRef>
+                <a:fillRef idx="1">
+                  <a:schemeClr val="accent1"/>
+                </a:fillRef>
+                <a:effectRef idx="0">
+                  <a:schemeClr val="accent1"/>
+                </a:effectRef>
+                <a:fontRef idx="minor">
+                  <a:schemeClr val="lt1"/>
+                </a:fontRef>
+              </p:style>
+              <p:txBody>
+                <a:bodyPr rtlCol="0" anchor="ctr"/>
+                <a:lstStyle/>
+                <a:p>
+                  <a:pPr algn="ctr"/>
+                  <a:r>
+                    <a:rPr lang="en-US" dirty="0"/>
+                    <a:t>sum2: 7</a:t>
+                  </a:r>
+                </a:p>
+              </p:txBody>
+            </p:sp>
+            <p:sp>
+              <p:nvSpPr>
+                <p:cNvPr id="17" name="Rounded Rectangle 16">
+                  <a:extLst>
+                    <a:ext uri="{FF2B5EF4-FFF2-40B4-BE49-F238E27FC236}">
+                      <a16:creationId xmlns:a16="http://schemas.microsoft.com/office/drawing/2014/main" id="{49FAC296-D7BB-C557-7DEB-FE1626FDC20E}"/>
+                    </a:ext>
+                  </a:extLst>
+                </p:cNvPr>
+                <p:cNvSpPr/>
+                <p:nvPr/>
+              </p:nvSpPr>
+              <p:spPr>
+                <a:xfrm>
+                  <a:off x="8031635" y="2904541"/>
+                  <a:ext cx="2460396" cy="443059"/>
+                </a:xfrm>
+                <a:prstGeom prst="roundRect">
+                  <a:avLst/>
+                </a:prstGeom>
+              </p:spPr>
+              <p:style>
+                <a:lnRef idx="2">
+                  <a:schemeClr val="accent1">
+                    <a:shade val="15000"/>
+                  </a:schemeClr>
+                </a:lnRef>
+                <a:fillRef idx="1">
+                  <a:schemeClr val="accent1"/>
+                </a:fillRef>
+                <a:effectRef idx="0">
+                  <a:schemeClr val="accent1"/>
+                </a:effectRef>
+                <a:fontRef idx="minor">
+                  <a:schemeClr val="lt1"/>
+                </a:fontRef>
+              </p:style>
+              <p:txBody>
+                <a:bodyPr rtlCol="0" anchor="ctr"/>
+                <a:lstStyle/>
+                <a:p>
+                  <a:pPr algn="ctr"/>
+                  <a:r>
+                    <a:rPr lang="en-US" dirty="0"/>
+                    <a:t>total: 10</a:t>
+                  </a:r>
+                </a:p>
+              </p:txBody>
+            </p:sp>
+          </p:grpSp>
+        </p:grpSp>
+      </p:grpSp>
+    </p:spTree>
+    <p:extLst>
+      <p:ext uri="{BB962C8B-B14F-4D97-AF65-F5344CB8AC3E}">
+        <p14:creationId xmlns:p14="http://schemas.microsoft.com/office/powerpoint/2010/main" val="1496779790"/>
+      </p:ext>
+    </p:extLst>
+  </p:cSld>
+  <p:clrMapOvr>
+    <a:masterClrMapping/>
+  </p:clrMapOvr>
+</p:sld>
+</file>
+
+<file path=ppt/slides/slide35.xml><?xml version="1.0" encoding="utf-8"?>
+<p:sld xmlns:a="http://schemas.openxmlformats.org/drawingml/2006/main" xmlns:r="http://schemas.openxmlformats.org/officeDocument/2006/relationships" xmlns:p="http://schemas.openxmlformats.org/presentationml/2006/main">
+  <p:cSld>
+    <p:spTree>
+      <p:nvGrpSpPr>
+        <p:cNvPr id="1" name="">
+          <a:extLst>
+            <a:ext uri="{FF2B5EF4-FFF2-40B4-BE49-F238E27FC236}">
               <a16:creationId xmlns:a16="http://schemas.microsoft.com/office/drawing/2014/main" id="{7B9D643F-020F-85F3-B82D-B51DE5311120}"/>
             </a:ext>
           </a:extLst>
@@ -18203,7 +17531,7 @@
 </p:sld>
 </file>
 
-<file path=ppt/slides/slide34.xml><?xml version="1.0" encoding="utf-8"?>
+<file path=ppt/slides/slide36.xml><?xml version="1.0" encoding="utf-8"?>
 <p:sld xmlns:a="http://schemas.openxmlformats.org/drawingml/2006/main" xmlns:r="http://schemas.openxmlformats.org/officeDocument/2006/relationships" xmlns:p="http://schemas.openxmlformats.org/presentationml/2006/main">
   <p:cSld>
     <p:spTree>
@@ -18311,7 +17639,7 @@
             </a:pPr>
             <a:r>
               <a:rPr lang="en-US" sz="2800" dirty="0"/>
-              <a:t>Write some computer code that has encodes this set of sequences in a format the CPU can understand.</a:t>
+              <a:t>Write some computer code that encodes this set of instructions in a format the CPU can understand.</a:t>
             </a:r>
           </a:p>
           <a:p>
@@ -18360,7 +17688,7 @@
 </p:sld>
 </file>
 
-<file path=ppt/slides/slide35.xml><?xml version="1.0" encoding="utf-8"?>
+<file path=ppt/slides/slide37.xml><?xml version="1.0" encoding="utf-8"?>
 <p:sld xmlns:a="http://schemas.openxmlformats.org/drawingml/2006/main" xmlns:r="http://schemas.openxmlformats.org/officeDocument/2006/relationships" xmlns:p="http://schemas.openxmlformats.org/presentationml/2006/main">
   <p:cSld>
     <p:spTree>
@@ -18508,7 +17836,7 @@
 </p:sld>
 </file>
 
-<file path=ppt/slides/slide36.xml><?xml version="1.0" encoding="utf-8"?>
+<file path=ppt/slides/slide38.xml><?xml version="1.0" encoding="utf-8"?>
 <p:sld xmlns:a="http://schemas.openxmlformats.org/drawingml/2006/main" xmlns:r="http://schemas.openxmlformats.org/officeDocument/2006/relationships" xmlns:p="http://schemas.openxmlformats.org/presentationml/2006/main">
   <p:cSld>
     <p:spTree>
@@ -18703,7 +18031,7 @@
 </p:sld>
 </file>
 
-<file path=ppt/slides/slide37.xml><?xml version="1.0" encoding="utf-8"?>
+<file path=ppt/slides/slide39.xml><?xml version="1.0" encoding="utf-8"?>
 <p:sld xmlns:a="http://schemas.openxmlformats.org/drawingml/2006/main" xmlns:r="http://schemas.openxmlformats.org/officeDocument/2006/relationships" xmlns:p="http://schemas.openxmlformats.org/presentationml/2006/main">
   <p:cSld>
     <p:spTree>
@@ -18852,7 +18180,289 @@
 </p:sld>
 </file>
 
-<file path=ppt/slides/slide38.xml><?xml version="1.0" encoding="utf-8"?>
+<file path=ppt/slides/slide4.xml><?xml version="1.0" encoding="utf-8"?>
+<p:sld xmlns:a="http://schemas.openxmlformats.org/drawingml/2006/main" xmlns:r="http://schemas.openxmlformats.org/officeDocument/2006/relationships" xmlns:p="http://schemas.openxmlformats.org/presentationml/2006/main">
+  <p:cSld>
+    <p:spTree>
+      <p:nvGrpSpPr>
+        <p:cNvPr id="1" name="">
+          <a:extLst>
+            <a:ext uri="{FF2B5EF4-FFF2-40B4-BE49-F238E27FC236}">
+              <a16:creationId xmlns:a16="http://schemas.microsoft.com/office/drawing/2014/main" id="{1D83A64F-1061-7688-8264-9ADD78F6B379}"/>
+            </a:ext>
+          </a:extLst>
+        </p:cNvPr>
+        <p:cNvGrpSpPr/>
+        <p:nvPr/>
+      </p:nvGrpSpPr>
+      <p:grpSpPr>
+        <a:xfrm>
+          <a:off x="0" y="0"/>
+          <a:ext cx="0" cy="0"/>
+          <a:chOff x="0" y="0"/>
+          <a:chExt cx="0" cy="0"/>
+        </a:xfrm>
+      </p:grpSpPr>
+      <p:sp>
+        <p:nvSpPr>
+          <p:cNvPr id="2" name="Title 1">
+            <a:extLst>
+              <a:ext uri="{FF2B5EF4-FFF2-40B4-BE49-F238E27FC236}">
+                <a16:creationId xmlns:a16="http://schemas.microsoft.com/office/drawing/2014/main" id="{2A016C70-C3D3-DA82-56DF-5B98E4494EC0}"/>
+              </a:ext>
+            </a:extLst>
+          </p:cNvPr>
+          <p:cNvSpPr>
+            <a:spLocks noGrp="1"/>
+          </p:cNvSpPr>
+          <p:nvPr>
+            <p:ph type="title"/>
+          </p:nvPr>
+        </p:nvSpPr>
+        <p:spPr/>
+        <p:txBody>
+          <a:bodyPr/>
+          <a:lstStyle/>
+          <a:p>
+            <a:r>
+              <a:rPr lang="en-US" dirty="0"/>
+              <a:t>Algorithms</a:t>
+            </a:r>
+          </a:p>
+        </p:txBody>
+      </p:sp>
+      <p:sp>
+        <p:nvSpPr>
+          <p:cNvPr id="3" name="Content Placeholder 2">
+            <a:extLst>
+              <a:ext uri="{FF2B5EF4-FFF2-40B4-BE49-F238E27FC236}">
+                <a16:creationId xmlns:a16="http://schemas.microsoft.com/office/drawing/2014/main" id="{273284C4-8633-A94B-7B32-754C491ED548}"/>
+              </a:ext>
+            </a:extLst>
+          </p:cNvPr>
+          <p:cNvSpPr>
+            <a:spLocks noGrp="1"/>
+          </p:cNvSpPr>
+          <p:nvPr>
+            <p:ph idx="1"/>
+          </p:nvPr>
+        </p:nvSpPr>
+        <p:spPr/>
+        <p:txBody>
+          <a:bodyPr>
+            <a:normAutofit/>
+          </a:bodyPr>
+          <a:lstStyle/>
+          <a:p>
+            <a:pPr marL="0" indent="0">
+              <a:buNone/>
+            </a:pPr>
+            <a:r>
+              <a:rPr lang="en-US" dirty="0"/>
+              <a:t>An algorithm is a set of instructions that can be followed to complete a task.</a:t>
+            </a:r>
+          </a:p>
+          <a:p>
+            <a:pPr marL="0" indent="0">
+              <a:buNone/>
+            </a:pPr>
+            <a:r>
+              <a:rPr lang="en-US" dirty="0"/>
+              <a:t>For example, to make a Lego model, we follow instructions.</a:t>
+            </a:r>
+          </a:p>
+          <a:p>
+            <a:pPr marL="0" indent="0">
+              <a:buNone/>
+            </a:pPr>
+            <a:endParaRPr lang="en-US" dirty="0"/>
+          </a:p>
+          <a:p>
+            <a:pPr marL="0" indent="0">
+              <a:buNone/>
+            </a:pPr>
+            <a:endParaRPr lang="en-US" dirty="0"/>
+          </a:p>
+          <a:p>
+            <a:pPr marL="0" indent="0">
+              <a:buNone/>
+            </a:pPr>
+            <a:endParaRPr lang="en-US" dirty="0"/>
+          </a:p>
+          <a:p>
+            <a:pPr marL="0" indent="0">
+              <a:buNone/>
+            </a:pPr>
+            <a:endParaRPr lang="en-US" dirty="0"/>
+          </a:p>
+          <a:p>
+            <a:pPr marL="0" indent="0">
+              <a:buNone/>
+            </a:pPr>
+            <a:endParaRPr lang="en-US" dirty="0"/>
+          </a:p>
+          <a:p>
+            <a:pPr marL="0" indent="0">
+              <a:buNone/>
+            </a:pPr>
+            <a:endParaRPr lang="en-US" dirty="0"/>
+          </a:p>
+          <a:p>
+            <a:pPr marL="0" indent="0">
+              <a:buNone/>
+            </a:pPr>
+            <a:endParaRPr lang="en-US" dirty="0"/>
+          </a:p>
+          <a:p>
+            <a:pPr marL="0" indent="0">
+              <a:buNone/>
+            </a:pPr>
+            <a:endParaRPr lang="en-US" dirty="0"/>
+          </a:p>
+        </p:txBody>
+      </p:sp>
+      <p:grpSp>
+        <p:nvGrpSpPr>
+          <p:cNvPr id="9" name="Group 8">
+            <a:extLst>
+              <a:ext uri="{FF2B5EF4-FFF2-40B4-BE49-F238E27FC236}">
+                <a16:creationId xmlns:a16="http://schemas.microsoft.com/office/drawing/2014/main" id="{375A48C2-D42F-E9CE-73C8-A1E6336B9AE7}"/>
+              </a:ext>
+            </a:extLst>
+          </p:cNvPr>
+          <p:cNvGrpSpPr/>
+          <p:nvPr/>
+        </p:nvGrpSpPr>
+        <p:grpSpPr>
+          <a:xfrm>
+            <a:off x="1587011" y="3604846"/>
+            <a:ext cx="9017977" cy="2022841"/>
+            <a:chOff x="838200" y="4001294"/>
+            <a:chExt cx="10515600" cy="2358776"/>
+          </a:xfrm>
+        </p:grpSpPr>
+        <p:pic>
+          <p:nvPicPr>
+            <p:cNvPr id="1026" name="Picture 2" descr="Police Station">
+              <a:extLst>
+                <a:ext uri="{FF2B5EF4-FFF2-40B4-BE49-F238E27FC236}">
+                  <a16:creationId xmlns:a16="http://schemas.microsoft.com/office/drawing/2014/main" id="{9637D37C-FAD2-5BD8-5ADB-A50D6FCE9CCB}"/>
+                </a:ext>
+              </a:extLst>
+            </p:cNvPr>
+            <p:cNvPicPr>
+              <a:picLocks noChangeAspect="1" noChangeArrowheads="1"/>
+            </p:cNvPicPr>
+            <p:nvPr/>
+          </p:nvPicPr>
+          <p:blipFill>
+            <a:blip r:embed="rId2">
+              <a:extLst>
+                <a:ext uri="{28A0092B-C50C-407E-A947-70E740481C1C}">
+                  <a14:useLocalDpi xmlns:a14="http://schemas.microsoft.com/office/drawing/2010/main" val="0"/>
+                </a:ext>
+              </a:extLst>
+            </a:blip>
+            <a:srcRect/>
+            <a:stretch>
+              <a:fillRect/>
+            </a:stretch>
+          </p:blipFill>
+          <p:spPr bwMode="auto">
+            <a:xfrm>
+              <a:off x="838200" y="4001294"/>
+              <a:ext cx="2768517" cy="2358776"/>
+            </a:xfrm>
+            <a:prstGeom prst="rect">
+              <a:avLst/>
+            </a:prstGeom>
+            <a:noFill/>
+            <a:extLst>
+              <a:ext uri="{909E8E84-426E-40DD-AFC4-6F175D3DCCD1}">
+                <a14:hiddenFill xmlns:a14="http://schemas.microsoft.com/office/drawing/2010/main">
+                  <a:solidFill>
+                    <a:srgbClr val="FFFFFF"/>
+                  </a:solidFill>
+                </a14:hiddenFill>
+              </a:ext>
+            </a:extLst>
+          </p:spPr>
+        </p:pic>
+        <p:pic>
+          <p:nvPicPr>
+            <p:cNvPr id="6" name="Picture 5" descr="A instructions for building a house&#10;&#10;AI-generated content may be incorrect.">
+              <a:extLst>
+                <a:ext uri="{FF2B5EF4-FFF2-40B4-BE49-F238E27FC236}">
+                  <a16:creationId xmlns:a16="http://schemas.microsoft.com/office/drawing/2014/main" id="{84E45741-F93F-1F93-736A-5A2FD4BECB5C}"/>
+                </a:ext>
+              </a:extLst>
+            </p:cNvPr>
+            <p:cNvPicPr>
+              <a:picLocks noChangeAspect="1"/>
+            </p:cNvPicPr>
+            <p:nvPr/>
+          </p:nvPicPr>
+          <p:blipFill>
+            <a:blip r:embed="rId3"/>
+            <a:stretch>
+              <a:fillRect/>
+            </a:stretch>
+          </p:blipFill>
+          <p:spPr>
+            <a:xfrm>
+              <a:off x="4711597" y="4129727"/>
+              <a:ext cx="2768517" cy="2101911"/>
+            </a:xfrm>
+            <a:prstGeom prst="rect">
+              <a:avLst/>
+            </a:prstGeom>
+          </p:spPr>
+        </p:pic>
+        <p:pic>
+          <p:nvPicPr>
+            <p:cNvPr id="8" name="Picture 7" descr="A black and white lego block&#10;&#10;AI-generated content may be incorrect.">
+              <a:extLst>
+                <a:ext uri="{FF2B5EF4-FFF2-40B4-BE49-F238E27FC236}">
+                  <a16:creationId xmlns:a16="http://schemas.microsoft.com/office/drawing/2014/main" id="{5B8A5E4C-7BED-718B-82AF-349E584E493D}"/>
+                </a:ext>
+              </a:extLst>
+            </p:cNvPr>
+            <p:cNvPicPr>
+              <a:picLocks noChangeAspect="1"/>
+            </p:cNvPicPr>
+            <p:nvPr/>
+          </p:nvPicPr>
+          <p:blipFill>
+            <a:blip r:embed="rId4"/>
+            <a:stretch>
+              <a:fillRect/>
+            </a:stretch>
+          </p:blipFill>
+          <p:spPr>
+            <a:xfrm>
+              <a:off x="8584993" y="4129726"/>
+              <a:ext cx="2768807" cy="2101912"/>
+            </a:xfrm>
+            <a:prstGeom prst="rect">
+              <a:avLst/>
+            </a:prstGeom>
+          </p:spPr>
+        </p:pic>
+      </p:grpSp>
+    </p:spTree>
+    <p:extLst>
+      <p:ext uri="{BB962C8B-B14F-4D97-AF65-F5344CB8AC3E}">
+        <p14:creationId xmlns:p14="http://schemas.microsoft.com/office/powerpoint/2010/main" val="1672918485"/>
+      </p:ext>
+    </p:extLst>
+  </p:cSld>
+  <p:clrMapOvr>
+    <a:masterClrMapping/>
+  </p:clrMapOvr>
+</p:sld>
+</file>
+
+<file path=ppt/slides/slide40.xml><?xml version="1.0" encoding="utf-8"?>
 <p:sld xmlns:a="http://schemas.openxmlformats.org/drawingml/2006/main" xmlns:r="http://schemas.openxmlformats.org/officeDocument/2006/relationships" xmlns:p="http://schemas.openxmlformats.org/presentationml/2006/main">
   <p:cSld>
     <p:spTree>
@@ -19049,7 +18659,7 @@
 </p:sld>
 </file>
 
-<file path=ppt/slides/slide39.xml><?xml version="1.0" encoding="utf-8"?>
+<file path=ppt/slides/slide41.xml><?xml version="1.0" encoding="utf-8"?>
 <p:sld xmlns:a="http://schemas.openxmlformats.org/drawingml/2006/main" xmlns:r="http://schemas.openxmlformats.org/officeDocument/2006/relationships" xmlns:p="http://schemas.openxmlformats.org/presentationml/2006/main">
   <p:cSld>
     <p:spTree>
@@ -19321,118 +18931,7 @@
 </p:sld>
 </file>
 
-<file path=ppt/slides/slide4.xml><?xml version="1.0" encoding="utf-8"?>
-<p:sld xmlns:a="http://schemas.openxmlformats.org/drawingml/2006/main" xmlns:r="http://schemas.openxmlformats.org/officeDocument/2006/relationships" xmlns:p="http://schemas.openxmlformats.org/presentationml/2006/main">
-  <p:cSld>
-    <p:spTree>
-      <p:nvGrpSpPr>
-        <p:cNvPr id="1" name=""/>
-        <p:cNvGrpSpPr/>
-        <p:nvPr/>
-      </p:nvGrpSpPr>
-      <p:grpSpPr>
-        <a:xfrm>
-          <a:off x="0" y="0"/>
-          <a:ext cx="0" cy="0"/>
-          <a:chOff x="0" y="0"/>
-          <a:chExt cx="0" cy="0"/>
-        </a:xfrm>
-      </p:grpSpPr>
-      <p:sp>
-        <p:nvSpPr>
-          <p:cNvPr id="2" name="Title 1">
-            <a:extLst>
-              <a:ext uri="{FF2B5EF4-FFF2-40B4-BE49-F238E27FC236}">
-                <a16:creationId xmlns:a16="http://schemas.microsoft.com/office/drawing/2014/main" id="{0BD6A09F-C0AE-4396-13F8-A5819F58D109}"/>
-              </a:ext>
-            </a:extLst>
-          </p:cNvPr>
-          <p:cNvSpPr>
-            <a:spLocks noGrp="1"/>
-          </p:cNvSpPr>
-          <p:nvPr>
-            <p:ph type="title"/>
-          </p:nvPr>
-        </p:nvSpPr>
-        <p:spPr/>
-        <p:txBody>
-          <a:bodyPr/>
-          <a:lstStyle/>
-          <a:p>
-            <a:r>
-              <a:rPr lang="en-US" dirty="0"/>
-              <a:t>Today’s learning objectives</a:t>
-            </a:r>
-          </a:p>
-        </p:txBody>
-      </p:sp>
-      <p:sp>
-        <p:nvSpPr>
-          <p:cNvPr id="3" name="Content Placeholder 2">
-            <a:extLst>
-              <a:ext uri="{FF2B5EF4-FFF2-40B4-BE49-F238E27FC236}">
-                <a16:creationId xmlns:a16="http://schemas.microsoft.com/office/drawing/2014/main" id="{7CB20A90-9A7F-509C-D767-84D535328D62}"/>
-              </a:ext>
-            </a:extLst>
-          </p:cNvPr>
-          <p:cNvSpPr>
-            <a:spLocks noGrp="1"/>
-          </p:cNvSpPr>
-          <p:nvPr>
-            <p:ph idx="1"/>
-          </p:nvPr>
-        </p:nvSpPr>
-        <p:spPr/>
-        <p:txBody>
-          <a:bodyPr/>
-          <a:lstStyle/>
-          <a:p>
-            <a:r>
-              <a:rPr lang="en-US" dirty="0"/>
-              <a:t>Understand what we mean by the word </a:t>
-            </a:r>
-            <a:r>
-              <a:rPr lang="en-US" i="1" dirty="0"/>
-              <a:t>algorithm.</a:t>
-            </a:r>
-            <a:endParaRPr lang="en-US" dirty="0"/>
-          </a:p>
-          <a:p>
-            <a:r>
-              <a:rPr lang="en-US" dirty="0"/>
-              <a:t>Practice designing some basic algorithms</a:t>
-            </a:r>
-          </a:p>
-          <a:p>
-            <a:r>
-              <a:rPr lang="en-US" dirty="0"/>
-              <a:t>Begin to develop a mental model of how a computer can </a:t>
-            </a:r>
-            <a:r>
-              <a:rPr lang="en-US" i="1" dirty="0"/>
-              <a:t>execute</a:t>
-            </a:r>
-            <a:r>
-              <a:rPr lang="en-US" dirty="0"/>
-              <a:t> an algorithm. </a:t>
-            </a:r>
-          </a:p>
-        </p:txBody>
-      </p:sp>
-    </p:spTree>
-    <p:extLst>
-      <p:ext uri="{BB962C8B-B14F-4D97-AF65-F5344CB8AC3E}">
-        <p14:creationId xmlns:p14="http://schemas.microsoft.com/office/powerpoint/2010/main" val="3862914363"/>
-      </p:ext>
-    </p:extLst>
-  </p:cSld>
-  <p:clrMapOvr>
-    <a:masterClrMapping/>
-  </p:clrMapOvr>
-</p:sld>
-</file>
-
-<file path=ppt/slides/slide40.xml><?xml version="1.0" encoding="utf-8"?>
+<file path=ppt/slides/slide42.xml><?xml version="1.0" encoding="utf-8"?>
 <p:sld xmlns:a="http://schemas.openxmlformats.org/drawingml/2006/main" xmlns:r="http://schemas.openxmlformats.org/officeDocument/2006/relationships" xmlns:p="http://schemas.openxmlformats.org/presentationml/2006/main">
   <p:cSld>
     <p:spTree>
@@ -19545,14 +19044,26 @@
             </a:r>
             <a:r>
               <a:rPr lang="en-US" sz="2000" dirty="0"/>
-              <a:t> how will a line of Python code change the state (</a:t>
-            </a:r>
-            <a:r>
-              <a:rPr lang="en-US" sz="2000" dirty="0" err="1"/>
+              <a:t> </a:t>
+            </a:r>
+            <a:r>
+              <a:rPr lang="en-US" sz="2000" u="sng" dirty="0"/>
+              <a:t>how will a line  </a:t>
+            </a:r>
+            <a:r>
+              <a:rPr lang="en-US" sz="2000" u="sng"/>
+              <a:t>(or </a:t>
+            </a:r>
+            <a:r>
+              <a:rPr lang="en-US" sz="2000" u="sng" dirty="0"/>
+              <a:t>series of lines) of Python code change the state (</a:t>
+            </a:r>
+            <a:r>
+              <a:rPr lang="en-US" sz="2000" u="sng" dirty="0" err="1"/>
               <a:t>i.e</a:t>
             </a:r>
             <a:r>
-              <a:rPr lang="en-US" sz="2000" dirty="0"/>
+              <a:rPr lang="en-US" sz="2000" u="sng" dirty="0"/>
               <a:t> memory) of the computer?</a:t>
             </a:r>
           </a:p>
@@ -20293,288 +19804,6 @@
         <p:cNvPr id="1" name="">
           <a:extLst>
             <a:ext uri="{FF2B5EF4-FFF2-40B4-BE49-F238E27FC236}">
-              <a16:creationId xmlns:a16="http://schemas.microsoft.com/office/drawing/2014/main" id="{1D83A64F-1061-7688-8264-9ADD78F6B379}"/>
-            </a:ext>
-          </a:extLst>
-        </p:cNvPr>
-        <p:cNvGrpSpPr/>
-        <p:nvPr/>
-      </p:nvGrpSpPr>
-      <p:grpSpPr>
-        <a:xfrm>
-          <a:off x="0" y="0"/>
-          <a:ext cx="0" cy="0"/>
-          <a:chOff x="0" y="0"/>
-          <a:chExt cx="0" cy="0"/>
-        </a:xfrm>
-      </p:grpSpPr>
-      <p:sp>
-        <p:nvSpPr>
-          <p:cNvPr id="2" name="Title 1">
-            <a:extLst>
-              <a:ext uri="{FF2B5EF4-FFF2-40B4-BE49-F238E27FC236}">
-                <a16:creationId xmlns:a16="http://schemas.microsoft.com/office/drawing/2014/main" id="{2A016C70-C3D3-DA82-56DF-5B98E4494EC0}"/>
-              </a:ext>
-            </a:extLst>
-          </p:cNvPr>
-          <p:cNvSpPr>
-            <a:spLocks noGrp="1"/>
-          </p:cNvSpPr>
-          <p:nvPr>
-            <p:ph type="title"/>
-          </p:nvPr>
-        </p:nvSpPr>
-        <p:spPr/>
-        <p:txBody>
-          <a:bodyPr/>
-          <a:lstStyle/>
-          <a:p>
-            <a:r>
-              <a:rPr lang="en-US" dirty="0"/>
-              <a:t>Algorithms</a:t>
-            </a:r>
-          </a:p>
-        </p:txBody>
-      </p:sp>
-      <p:sp>
-        <p:nvSpPr>
-          <p:cNvPr id="3" name="Content Placeholder 2">
-            <a:extLst>
-              <a:ext uri="{FF2B5EF4-FFF2-40B4-BE49-F238E27FC236}">
-                <a16:creationId xmlns:a16="http://schemas.microsoft.com/office/drawing/2014/main" id="{273284C4-8633-A94B-7B32-754C491ED548}"/>
-              </a:ext>
-            </a:extLst>
-          </p:cNvPr>
-          <p:cNvSpPr>
-            <a:spLocks noGrp="1"/>
-          </p:cNvSpPr>
-          <p:nvPr>
-            <p:ph idx="1"/>
-          </p:nvPr>
-        </p:nvSpPr>
-        <p:spPr/>
-        <p:txBody>
-          <a:bodyPr>
-            <a:normAutofit/>
-          </a:bodyPr>
-          <a:lstStyle/>
-          <a:p>
-            <a:pPr marL="0" indent="0">
-              <a:buNone/>
-            </a:pPr>
-            <a:r>
-              <a:rPr lang="en-US" dirty="0"/>
-              <a:t>An algorithm is a set of instructions that can be followed to complete a task.</a:t>
-            </a:r>
-          </a:p>
-          <a:p>
-            <a:pPr marL="0" indent="0">
-              <a:buNone/>
-            </a:pPr>
-            <a:r>
-              <a:rPr lang="en-US" dirty="0"/>
-              <a:t>For example, to make a Lego model, we follow instructions.</a:t>
-            </a:r>
-          </a:p>
-          <a:p>
-            <a:pPr marL="0" indent="0">
-              <a:buNone/>
-            </a:pPr>
-            <a:endParaRPr lang="en-US" dirty="0"/>
-          </a:p>
-          <a:p>
-            <a:pPr marL="0" indent="0">
-              <a:buNone/>
-            </a:pPr>
-            <a:endParaRPr lang="en-US" dirty="0"/>
-          </a:p>
-          <a:p>
-            <a:pPr marL="0" indent="0">
-              <a:buNone/>
-            </a:pPr>
-            <a:endParaRPr lang="en-US" dirty="0"/>
-          </a:p>
-          <a:p>
-            <a:pPr marL="0" indent="0">
-              <a:buNone/>
-            </a:pPr>
-            <a:endParaRPr lang="en-US" dirty="0"/>
-          </a:p>
-          <a:p>
-            <a:pPr marL="0" indent="0">
-              <a:buNone/>
-            </a:pPr>
-            <a:endParaRPr lang="en-US" dirty="0"/>
-          </a:p>
-          <a:p>
-            <a:pPr marL="0" indent="0">
-              <a:buNone/>
-            </a:pPr>
-            <a:endParaRPr lang="en-US" dirty="0"/>
-          </a:p>
-          <a:p>
-            <a:pPr marL="0" indent="0">
-              <a:buNone/>
-            </a:pPr>
-            <a:endParaRPr lang="en-US" dirty="0"/>
-          </a:p>
-          <a:p>
-            <a:pPr marL="0" indent="0">
-              <a:buNone/>
-            </a:pPr>
-            <a:endParaRPr lang="en-US" dirty="0"/>
-          </a:p>
-        </p:txBody>
-      </p:sp>
-      <p:grpSp>
-        <p:nvGrpSpPr>
-          <p:cNvPr id="9" name="Group 8">
-            <a:extLst>
-              <a:ext uri="{FF2B5EF4-FFF2-40B4-BE49-F238E27FC236}">
-                <a16:creationId xmlns:a16="http://schemas.microsoft.com/office/drawing/2014/main" id="{375A48C2-D42F-E9CE-73C8-A1E6336B9AE7}"/>
-              </a:ext>
-            </a:extLst>
-          </p:cNvPr>
-          <p:cNvGrpSpPr/>
-          <p:nvPr/>
-        </p:nvGrpSpPr>
-        <p:grpSpPr>
-          <a:xfrm>
-            <a:off x="1587011" y="3604846"/>
-            <a:ext cx="9017977" cy="2022841"/>
-            <a:chOff x="838200" y="4001294"/>
-            <a:chExt cx="10515600" cy="2358776"/>
-          </a:xfrm>
-        </p:grpSpPr>
-        <p:pic>
-          <p:nvPicPr>
-            <p:cNvPr id="1026" name="Picture 2" descr="Police Station">
-              <a:extLst>
-                <a:ext uri="{FF2B5EF4-FFF2-40B4-BE49-F238E27FC236}">
-                  <a16:creationId xmlns:a16="http://schemas.microsoft.com/office/drawing/2014/main" id="{9637D37C-FAD2-5BD8-5ADB-A50D6FCE9CCB}"/>
-                </a:ext>
-              </a:extLst>
-            </p:cNvPr>
-            <p:cNvPicPr>
-              <a:picLocks noChangeAspect="1" noChangeArrowheads="1"/>
-            </p:cNvPicPr>
-            <p:nvPr/>
-          </p:nvPicPr>
-          <p:blipFill>
-            <a:blip r:embed="rId2">
-              <a:extLst>
-                <a:ext uri="{28A0092B-C50C-407E-A947-70E740481C1C}">
-                  <a14:useLocalDpi xmlns:a14="http://schemas.microsoft.com/office/drawing/2010/main" val="0"/>
-                </a:ext>
-              </a:extLst>
-            </a:blip>
-            <a:srcRect/>
-            <a:stretch>
-              <a:fillRect/>
-            </a:stretch>
-          </p:blipFill>
-          <p:spPr bwMode="auto">
-            <a:xfrm>
-              <a:off x="838200" y="4001294"/>
-              <a:ext cx="2768517" cy="2358776"/>
-            </a:xfrm>
-            <a:prstGeom prst="rect">
-              <a:avLst/>
-            </a:prstGeom>
-            <a:noFill/>
-            <a:extLst>
-              <a:ext uri="{909E8E84-426E-40DD-AFC4-6F175D3DCCD1}">
-                <a14:hiddenFill xmlns:a14="http://schemas.microsoft.com/office/drawing/2010/main">
-                  <a:solidFill>
-                    <a:srgbClr val="FFFFFF"/>
-                  </a:solidFill>
-                </a14:hiddenFill>
-              </a:ext>
-            </a:extLst>
-          </p:spPr>
-        </p:pic>
-        <p:pic>
-          <p:nvPicPr>
-            <p:cNvPr id="6" name="Picture 5" descr="A instructions for building a house&#10;&#10;AI-generated content may be incorrect.">
-              <a:extLst>
-                <a:ext uri="{FF2B5EF4-FFF2-40B4-BE49-F238E27FC236}">
-                  <a16:creationId xmlns:a16="http://schemas.microsoft.com/office/drawing/2014/main" id="{84E45741-F93F-1F93-736A-5A2FD4BECB5C}"/>
-                </a:ext>
-              </a:extLst>
-            </p:cNvPr>
-            <p:cNvPicPr>
-              <a:picLocks noChangeAspect="1"/>
-            </p:cNvPicPr>
-            <p:nvPr/>
-          </p:nvPicPr>
-          <p:blipFill>
-            <a:blip r:embed="rId3"/>
-            <a:stretch>
-              <a:fillRect/>
-            </a:stretch>
-          </p:blipFill>
-          <p:spPr>
-            <a:xfrm>
-              <a:off x="4711597" y="4129727"/>
-              <a:ext cx="2768517" cy="2101911"/>
-            </a:xfrm>
-            <a:prstGeom prst="rect">
-              <a:avLst/>
-            </a:prstGeom>
-          </p:spPr>
-        </p:pic>
-        <p:pic>
-          <p:nvPicPr>
-            <p:cNvPr id="8" name="Picture 7" descr="A black and white lego block&#10;&#10;AI-generated content may be incorrect.">
-              <a:extLst>
-                <a:ext uri="{FF2B5EF4-FFF2-40B4-BE49-F238E27FC236}">
-                  <a16:creationId xmlns:a16="http://schemas.microsoft.com/office/drawing/2014/main" id="{5B8A5E4C-7BED-718B-82AF-349E584E493D}"/>
-                </a:ext>
-              </a:extLst>
-            </p:cNvPr>
-            <p:cNvPicPr>
-              <a:picLocks noChangeAspect="1"/>
-            </p:cNvPicPr>
-            <p:nvPr/>
-          </p:nvPicPr>
-          <p:blipFill>
-            <a:blip r:embed="rId4"/>
-            <a:stretch>
-              <a:fillRect/>
-            </a:stretch>
-          </p:blipFill>
-          <p:spPr>
-            <a:xfrm>
-              <a:off x="8584993" y="4129726"/>
-              <a:ext cx="2768807" cy="2101912"/>
-            </a:xfrm>
-            <a:prstGeom prst="rect">
-              <a:avLst/>
-            </a:prstGeom>
-          </p:spPr>
-        </p:pic>
-      </p:grpSp>
-    </p:spTree>
-    <p:extLst>
-      <p:ext uri="{BB962C8B-B14F-4D97-AF65-F5344CB8AC3E}">
-        <p14:creationId xmlns:p14="http://schemas.microsoft.com/office/powerpoint/2010/main" val="1672918485"/>
-      </p:ext>
-    </p:extLst>
-  </p:cSld>
-  <p:clrMapOvr>
-    <a:masterClrMapping/>
-  </p:clrMapOvr>
-</p:sld>
-</file>
-
-<file path=ppt/slides/slide6.xml><?xml version="1.0" encoding="utf-8"?>
-<p:sld xmlns:a="http://schemas.openxmlformats.org/drawingml/2006/main" xmlns:r="http://schemas.openxmlformats.org/officeDocument/2006/relationships" xmlns:p="http://schemas.openxmlformats.org/presentationml/2006/main">
-  <p:cSld>
-    <p:spTree>
-      <p:nvGrpSpPr>
-        <p:cNvPr id="1" name="">
-          <a:extLst>
-            <a:ext uri="{FF2B5EF4-FFF2-40B4-BE49-F238E27FC236}">
               <a16:creationId xmlns:a16="http://schemas.microsoft.com/office/drawing/2014/main" id="{F249C0D0-3C40-AF6A-0655-2AD4044F3FA2}"/>
             </a:ext>
           </a:extLst>
@@ -20692,15 +19921,6 @@
               <a:buNone/>
             </a:pPr>
             <a:endParaRPr lang="en-US" dirty="0"/>
-          </a:p>
-          <a:p>
-            <a:pPr marL="0" indent="0">
-              <a:buNone/>
-            </a:pPr>
-            <a:r>
-              <a:rPr lang="en-US" dirty="0"/>
-              <a:t>Question: Discuss (2-3 mins) some examples of algorithms you have encountered in your daily lives.</a:t>
-            </a:r>
           </a:p>
         </p:txBody>
       </p:sp>
@@ -20845,7 +20065,7 @@
 </p:sld>
 </file>
 
-<file path=ppt/slides/slide7.xml><?xml version="1.0" encoding="utf-8"?>
+<file path=ppt/slides/slide6.xml><?xml version="1.0" encoding="utf-8"?>
 <p:sld xmlns:a="http://schemas.openxmlformats.org/drawingml/2006/main" xmlns:r="http://schemas.openxmlformats.org/officeDocument/2006/relationships" xmlns:p="http://schemas.openxmlformats.org/presentationml/2006/main">
   <p:cSld>
     <p:spTree>
@@ -20967,7 +20187,7 @@
             </a:r>
             <a:r>
               <a:rPr lang="en-US" dirty="0"/>
-              <a:t> (using some criteria to decide which instruction should be done next) and </a:t>
+              <a:t> (using some criteria to decide which instruction should be done next or whether we should continue / stop) and </a:t>
             </a:r>
             <a:r>
               <a:rPr lang="en-US" i="1" dirty="0"/>
@@ -20993,7 +20213,7 @@
 </p:sld>
 </file>
 
-<file path=ppt/slides/slide8.xml><?xml version="1.0" encoding="utf-8"?>
+<file path=ppt/slides/slide7.xml><?xml version="1.0" encoding="utf-8"?>
 <p:sld xmlns:a="http://schemas.openxmlformats.org/drawingml/2006/main" xmlns:r="http://schemas.openxmlformats.org/officeDocument/2006/relationships" xmlns:p="http://schemas.openxmlformats.org/presentationml/2006/main">
   <p:cSld>
     <p:spTree>
@@ -21108,7 +20328,7 @@
 </p:sld>
 </file>
 
-<file path=ppt/slides/slide9.xml><?xml version="1.0" encoding="utf-8"?>
+<file path=ppt/slides/slide8.xml><?xml version="1.0" encoding="utf-8"?>
 <p:sld xmlns:a="http://schemas.openxmlformats.org/drawingml/2006/main" xmlns:r="http://schemas.openxmlformats.org/officeDocument/2006/relationships" xmlns:p="http://schemas.openxmlformats.org/presentationml/2006/main">
   <p:cSld>
     <p:spTree>
@@ -21278,6 +20498,1557 @@
     <p:extLst>
       <p:ext uri="{BB962C8B-B14F-4D97-AF65-F5344CB8AC3E}">
         <p14:creationId xmlns:p14="http://schemas.microsoft.com/office/powerpoint/2010/main" val="843374860"/>
+      </p:ext>
+    </p:extLst>
+  </p:cSld>
+  <p:clrMapOvr>
+    <a:masterClrMapping/>
+  </p:clrMapOvr>
+</p:sld>
+</file>
+
+<file path=ppt/slides/slide9.xml><?xml version="1.0" encoding="utf-8"?>
+<p:sld xmlns:a="http://schemas.openxmlformats.org/drawingml/2006/main" xmlns:r="http://schemas.openxmlformats.org/officeDocument/2006/relationships" xmlns:p="http://schemas.openxmlformats.org/presentationml/2006/main">
+  <p:cSld>
+    <p:spTree>
+      <p:nvGrpSpPr>
+        <p:cNvPr id="1" name="">
+          <a:extLst>
+            <a:ext uri="{FF2B5EF4-FFF2-40B4-BE49-F238E27FC236}">
+              <a16:creationId xmlns:a16="http://schemas.microsoft.com/office/drawing/2014/main" id="{DD6FAD40-F7E2-0D67-FBAC-42FBFE829EBD}"/>
+            </a:ext>
+          </a:extLst>
+        </p:cNvPr>
+        <p:cNvGrpSpPr/>
+        <p:nvPr/>
+      </p:nvGrpSpPr>
+      <p:grpSpPr>
+        <a:xfrm>
+          <a:off x="0" y="0"/>
+          <a:ext cx="0" cy="0"/>
+          <a:chOff x="0" y="0"/>
+          <a:chExt cx="0" cy="0"/>
+        </a:xfrm>
+      </p:grpSpPr>
+      <p:sp>
+        <p:nvSpPr>
+          <p:cNvPr id="2" name="Title 1">
+            <a:extLst>
+              <a:ext uri="{FF2B5EF4-FFF2-40B4-BE49-F238E27FC236}">
+                <a16:creationId xmlns:a16="http://schemas.microsoft.com/office/drawing/2014/main" id="{4C02B6B2-70E0-48BA-73D7-D240286C4F77}"/>
+              </a:ext>
+            </a:extLst>
+          </p:cNvPr>
+          <p:cNvSpPr>
+            <a:spLocks noGrp="1"/>
+          </p:cNvSpPr>
+          <p:nvPr>
+            <p:ph type="title"/>
+          </p:nvPr>
+        </p:nvSpPr>
+        <p:spPr/>
+        <p:txBody>
+          <a:bodyPr/>
+          <a:lstStyle/>
+          <a:p>
+            <a:r>
+              <a:rPr lang="en-US" dirty="0"/>
+              <a:t>Designing algorithms</a:t>
+            </a:r>
+          </a:p>
+        </p:txBody>
+      </p:sp>
+      <p:sp>
+        <p:nvSpPr>
+          <p:cNvPr id="3" name="Content Placeholder 2">
+            <a:extLst>
+              <a:ext uri="{FF2B5EF4-FFF2-40B4-BE49-F238E27FC236}">
+                <a16:creationId xmlns:a16="http://schemas.microsoft.com/office/drawing/2014/main" id="{D53ADDAC-B5CC-5817-A153-E10BB106ED2E}"/>
+              </a:ext>
+            </a:extLst>
+          </p:cNvPr>
+          <p:cNvSpPr>
+            <a:spLocks noGrp="1"/>
+          </p:cNvSpPr>
+          <p:nvPr>
+            <p:ph idx="1"/>
+          </p:nvPr>
+        </p:nvSpPr>
+        <p:spPr>
+          <a:xfrm>
+            <a:off x="752110" y="1704025"/>
+            <a:ext cx="10515600" cy="4351338"/>
+          </a:xfrm>
+        </p:spPr>
+        <p:txBody>
+          <a:bodyPr>
+            <a:normAutofit/>
+          </a:bodyPr>
+          <a:lstStyle/>
+          <a:p>
+            <a:pPr marL="0" indent="0">
+              <a:buNone/>
+            </a:pPr>
+            <a:r>
+              <a:rPr lang="en-US" dirty="0"/>
+              <a:t>Example:  An algorithm for making a cup of tea.</a:t>
+            </a:r>
+          </a:p>
+          <a:p>
+            <a:pPr marL="0" indent="0">
+              <a:buNone/>
+            </a:pPr>
+            <a:endParaRPr lang="en-US" dirty="0"/>
+          </a:p>
+          <a:p>
+            <a:pPr marL="0" indent="0">
+              <a:buNone/>
+            </a:pPr>
+            <a:endParaRPr lang="en-US" dirty="0"/>
+          </a:p>
+          <a:p>
+            <a:pPr marL="0" indent="0">
+              <a:buNone/>
+            </a:pPr>
+            <a:endParaRPr lang="en-US" dirty="0"/>
+          </a:p>
+        </p:txBody>
+      </p:sp>
+      <p:sp>
+        <p:nvSpPr>
+          <p:cNvPr id="4" name="Rounded Rectangle 3">
+            <a:extLst>
+              <a:ext uri="{FF2B5EF4-FFF2-40B4-BE49-F238E27FC236}">
+                <a16:creationId xmlns:a16="http://schemas.microsoft.com/office/drawing/2014/main" id="{7DC282DC-EDE1-5E91-95D7-FADAD1C763D1}"/>
+              </a:ext>
+            </a:extLst>
+          </p:cNvPr>
+          <p:cNvSpPr/>
+          <p:nvPr/>
+        </p:nvSpPr>
+        <p:spPr>
+          <a:xfrm>
+            <a:off x="838200" y="2583533"/>
+            <a:ext cx="1247773" cy="465992"/>
+          </a:xfrm>
+          <a:prstGeom prst="roundRect">
+            <a:avLst/>
+          </a:prstGeom>
+        </p:spPr>
+        <p:style>
+          <a:lnRef idx="2">
+            <a:schemeClr val="accent6"/>
+          </a:lnRef>
+          <a:fillRef idx="1">
+            <a:schemeClr val="lt1"/>
+          </a:fillRef>
+          <a:effectRef idx="0">
+            <a:schemeClr val="accent6"/>
+          </a:effectRef>
+          <a:fontRef idx="minor">
+            <a:schemeClr val="dk1"/>
+          </a:fontRef>
+        </p:style>
+        <p:txBody>
+          <a:bodyPr rtlCol="0" anchor="ctr"/>
+          <a:lstStyle/>
+          <a:p>
+            <a:pPr algn="ctr"/>
+            <a:r>
+              <a:rPr lang="en-US" dirty="0"/>
+              <a:t>Make tea</a:t>
+            </a:r>
+          </a:p>
+        </p:txBody>
+      </p:sp>
+      <p:sp>
+        <p:nvSpPr>
+          <p:cNvPr id="5" name="Rectangle 4">
+            <a:extLst>
+              <a:ext uri="{FF2B5EF4-FFF2-40B4-BE49-F238E27FC236}">
+                <a16:creationId xmlns:a16="http://schemas.microsoft.com/office/drawing/2014/main" id="{F92FA4B5-13E9-C3C7-CDEB-373B321516F5}"/>
+              </a:ext>
+            </a:extLst>
+          </p:cNvPr>
+          <p:cNvSpPr/>
+          <p:nvPr/>
+        </p:nvSpPr>
+        <p:spPr>
+          <a:xfrm>
+            <a:off x="2776755" y="2354933"/>
+            <a:ext cx="1247773" cy="923192"/>
+          </a:xfrm>
+          <a:prstGeom prst="rect">
+            <a:avLst/>
+          </a:prstGeom>
+        </p:spPr>
+        <p:style>
+          <a:lnRef idx="2">
+            <a:schemeClr val="accent1">
+              <a:shade val="15000"/>
+            </a:schemeClr>
+          </a:lnRef>
+          <a:fillRef idx="1">
+            <a:schemeClr val="accent1"/>
+          </a:fillRef>
+          <a:effectRef idx="0">
+            <a:schemeClr val="accent1"/>
+          </a:effectRef>
+          <a:fontRef idx="minor">
+            <a:schemeClr val="lt1"/>
+          </a:fontRef>
+        </p:style>
+        <p:txBody>
+          <a:bodyPr rtlCol="0" anchor="ctr"/>
+          <a:lstStyle/>
+          <a:p>
+            <a:pPr algn="ctr"/>
+            <a:r>
+              <a:rPr lang="en-US" dirty="0"/>
+              <a:t>Fill kettle with water</a:t>
+            </a:r>
+          </a:p>
+        </p:txBody>
+      </p:sp>
+      <p:sp>
+        <p:nvSpPr>
+          <p:cNvPr id="6" name="Rectangle 5">
+            <a:extLst>
+              <a:ext uri="{FF2B5EF4-FFF2-40B4-BE49-F238E27FC236}">
+                <a16:creationId xmlns:a16="http://schemas.microsoft.com/office/drawing/2014/main" id="{FBD06FBB-D2AE-9CC5-17AA-63BFCA8F268F}"/>
+              </a:ext>
+            </a:extLst>
+          </p:cNvPr>
+          <p:cNvSpPr/>
+          <p:nvPr/>
+        </p:nvSpPr>
+        <p:spPr>
+          <a:xfrm>
+            <a:off x="4715310" y="2365131"/>
+            <a:ext cx="943709" cy="923192"/>
+          </a:xfrm>
+          <a:prstGeom prst="rect">
+            <a:avLst/>
+          </a:prstGeom>
+        </p:spPr>
+        <p:style>
+          <a:lnRef idx="2">
+            <a:schemeClr val="accent1">
+              <a:shade val="15000"/>
+            </a:schemeClr>
+          </a:lnRef>
+          <a:fillRef idx="1">
+            <a:schemeClr val="accent1"/>
+          </a:fillRef>
+          <a:effectRef idx="0">
+            <a:schemeClr val="accent1"/>
+          </a:effectRef>
+          <a:fontRef idx="minor">
+            <a:schemeClr val="lt1"/>
+          </a:fontRef>
+        </p:style>
+        <p:txBody>
+          <a:bodyPr rtlCol="0" anchor="ctr"/>
+          <a:lstStyle/>
+          <a:p>
+            <a:pPr algn="ctr"/>
+            <a:r>
+              <a:rPr lang="en-US" dirty="0"/>
+              <a:t>Turn on kettle</a:t>
+            </a:r>
+          </a:p>
+        </p:txBody>
+      </p:sp>
+      <p:sp>
+        <p:nvSpPr>
+          <p:cNvPr id="9" name="Rectangle 8">
+            <a:extLst>
+              <a:ext uri="{FF2B5EF4-FFF2-40B4-BE49-F238E27FC236}">
+                <a16:creationId xmlns:a16="http://schemas.microsoft.com/office/drawing/2014/main" id="{164133FC-A8A7-EFE0-0AF1-7E4012EB540F}"/>
+              </a:ext>
+            </a:extLst>
+          </p:cNvPr>
+          <p:cNvSpPr/>
+          <p:nvPr/>
+        </p:nvSpPr>
+        <p:spPr>
+          <a:xfrm>
+            <a:off x="6349801" y="2386929"/>
+            <a:ext cx="1249975" cy="923192"/>
+          </a:xfrm>
+          <a:prstGeom prst="rect">
+            <a:avLst/>
+          </a:prstGeom>
+        </p:spPr>
+        <p:style>
+          <a:lnRef idx="2">
+            <a:schemeClr val="accent1">
+              <a:shade val="15000"/>
+            </a:schemeClr>
+          </a:lnRef>
+          <a:fillRef idx="1">
+            <a:schemeClr val="accent1"/>
+          </a:fillRef>
+          <a:effectRef idx="0">
+            <a:schemeClr val="accent1"/>
+          </a:effectRef>
+          <a:fontRef idx="minor">
+            <a:schemeClr val="lt1"/>
+          </a:fontRef>
+        </p:style>
+        <p:txBody>
+          <a:bodyPr rtlCol="0" anchor="ctr"/>
+          <a:lstStyle/>
+          <a:p>
+            <a:pPr algn="ctr"/>
+            <a:r>
+              <a:rPr lang="en-US" dirty="0"/>
+              <a:t>Put teabag in cup</a:t>
+            </a:r>
+          </a:p>
+        </p:txBody>
+      </p:sp>
+      <p:sp>
+        <p:nvSpPr>
+          <p:cNvPr id="10" name="Rectangle 9">
+            <a:extLst>
+              <a:ext uri="{FF2B5EF4-FFF2-40B4-BE49-F238E27FC236}">
+                <a16:creationId xmlns:a16="http://schemas.microsoft.com/office/drawing/2014/main" id="{B8119503-6F6B-79A1-8D84-4C15C5012FA6}"/>
+              </a:ext>
+            </a:extLst>
+          </p:cNvPr>
+          <p:cNvSpPr/>
+          <p:nvPr/>
+        </p:nvSpPr>
+        <p:spPr>
+          <a:xfrm>
+            <a:off x="2776755" y="4205148"/>
+            <a:ext cx="1077788" cy="923192"/>
+          </a:xfrm>
+          <a:prstGeom prst="rect">
+            <a:avLst/>
+          </a:prstGeom>
+        </p:spPr>
+        <p:style>
+          <a:lnRef idx="2">
+            <a:schemeClr val="accent1">
+              <a:shade val="15000"/>
+            </a:schemeClr>
+          </a:lnRef>
+          <a:fillRef idx="1">
+            <a:schemeClr val="accent1"/>
+          </a:fillRef>
+          <a:effectRef idx="0">
+            <a:schemeClr val="accent1"/>
+          </a:effectRef>
+          <a:fontRef idx="minor">
+            <a:schemeClr val="lt1"/>
+          </a:fontRef>
+        </p:style>
+        <p:txBody>
+          <a:bodyPr rtlCol="0" anchor="ctr"/>
+          <a:lstStyle/>
+          <a:p>
+            <a:pPr algn="ctr"/>
+            <a:r>
+              <a:rPr lang="en-US" dirty="0"/>
+              <a:t>Add milk</a:t>
+            </a:r>
+          </a:p>
+        </p:txBody>
+      </p:sp>
+      <p:sp>
+        <p:nvSpPr>
+          <p:cNvPr id="11" name="Decision 10">
+            <a:extLst>
+              <a:ext uri="{FF2B5EF4-FFF2-40B4-BE49-F238E27FC236}">
+                <a16:creationId xmlns:a16="http://schemas.microsoft.com/office/drawing/2014/main" id="{62AF060D-B84D-A90A-E6EF-B8634B339DE6}"/>
+              </a:ext>
+            </a:extLst>
+          </p:cNvPr>
+          <p:cNvSpPr/>
+          <p:nvPr/>
+        </p:nvSpPr>
+        <p:spPr>
+          <a:xfrm>
+            <a:off x="8290558" y="2023023"/>
+            <a:ext cx="1673472" cy="1587012"/>
+          </a:xfrm>
+          <a:prstGeom prst="flowChartDecision">
+            <a:avLst/>
+          </a:prstGeom>
+          <a:solidFill>
+            <a:schemeClr val="accent2"/>
+          </a:solidFill>
+        </p:spPr>
+        <p:style>
+          <a:lnRef idx="2">
+            <a:schemeClr val="accent1">
+              <a:shade val="15000"/>
+            </a:schemeClr>
+          </a:lnRef>
+          <a:fillRef idx="1">
+            <a:schemeClr val="accent1"/>
+          </a:fillRef>
+          <a:effectRef idx="0">
+            <a:schemeClr val="accent1"/>
+          </a:effectRef>
+          <a:fontRef idx="minor">
+            <a:schemeClr val="lt1"/>
+          </a:fontRef>
+        </p:style>
+        <p:txBody>
+          <a:bodyPr rtlCol="0" anchor="ctr"/>
+          <a:lstStyle/>
+          <a:p>
+            <a:pPr algn="ctr"/>
+            <a:r>
+              <a:rPr lang="en-US" dirty="0"/>
+              <a:t>Has kettle boiled?</a:t>
+            </a:r>
+          </a:p>
+        </p:txBody>
+      </p:sp>
+      <p:sp>
+        <p:nvSpPr>
+          <p:cNvPr id="12" name="Rectangle 11">
+            <a:extLst>
+              <a:ext uri="{FF2B5EF4-FFF2-40B4-BE49-F238E27FC236}">
+                <a16:creationId xmlns:a16="http://schemas.microsoft.com/office/drawing/2014/main" id="{7A587BBF-E600-5805-E596-CC8BDA3FA6BA}"/>
+              </a:ext>
+            </a:extLst>
+          </p:cNvPr>
+          <p:cNvSpPr/>
+          <p:nvPr/>
+        </p:nvSpPr>
+        <p:spPr>
+          <a:xfrm>
+            <a:off x="10654811" y="2386929"/>
+            <a:ext cx="1397977" cy="923192"/>
+          </a:xfrm>
+          <a:prstGeom prst="rect">
+            <a:avLst/>
+          </a:prstGeom>
+        </p:spPr>
+        <p:style>
+          <a:lnRef idx="2">
+            <a:schemeClr val="accent1">
+              <a:shade val="15000"/>
+            </a:schemeClr>
+          </a:lnRef>
+          <a:fillRef idx="1">
+            <a:schemeClr val="accent1"/>
+          </a:fillRef>
+          <a:effectRef idx="0">
+            <a:schemeClr val="accent1"/>
+          </a:effectRef>
+          <a:fontRef idx="minor">
+            <a:schemeClr val="lt1"/>
+          </a:fontRef>
+        </p:style>
+        <p:txBody>
+          <a:bodyPr rtlCol="0" anchor="ctr"/>
+          <a:lstStyle/>
+          <a:p>
+            <a:pPr algn="ctr"/>
+            <a:r>
+              <a:rPr lang="en-US" dirty="0"/>
+              <a:t>Wait 30 seconds</a:t>
+            </a:r>
+          </a:p>
+        </p:txBody>
+      </p:sp>
+      <p:sp>
+        <p:nvSpPr>
+          <p:cNvPr id="13" name="Rectangle 12">
+            <a:extLst>
+              <a:ext uri="{FF2B5EF4-FFF2-40B4-BE49-F238E27FC236}">
+                <a16:creationId xmlns:a16="http://schemas.microsoft.com/office/drawing/2014/main" id="{720F0724-92B1-01EB-746F-ABE00008E3B6}"/>
+              </a:ext>
+            </a:extLst>
+          </p:cNvPr>
+          <p:cNvSpPr/>
+          <p:nvPr/>
+        </p:nvSpPr>
+        <p:spPr>
+          <a:xfrm>
+            <a:off x="8629981" y="4230783"/>
+            <a:ext cx="1196301" cy="923192"/>
+          </a:xfrm>
+          <a:prstGeom prst="rect">
+            <a:avLst/>
+          </a:prstGeom>
+        </p:spPr>
+        <p:style>
+          <a:lnRef idx="2">
+            <a:schemeClr val="accent1">
+              <a:shade val="15000"/>
+            </a:schemeClr>
+          </a:lnRef>
+          <a:fillRef idx="1">
+            <a:schemeClr val="accent1"/>
+          </a:fillRef>
+          <a:effectRef idx="0">
+            <a:schemeClr val="accent1"/>
+          </a:effectRef>
+          <a:fontRef idx="minor">
+            <a:schemeClr val="lt1"/>
+          </a:fontRef>
+        </p:style>
+        <p:txBody>
+          <a:bodyPr rtlCol="0" anchor="ctr"/>
+          <a:lstStyle/>
+          <a:p>
+            <a:pPr algn="ctr"/>
+            <a:r>
+              <a:rPr lang="en-US" dirty="0"/>
+              <a:t>Pour water into cup</a:t>
+            </a:r>
+          </a:p>
+        </p:txBody>
+      </p:sp>
+      <p:sp>
+        <p:nvSpPr>
+          <p:cNvPr id="15" name="Decision 14">
+            <a:extLst>
+              <a:ext uri="{FF2B5EF4-FFF2-40B4-BE49-F238E27FC236}">
+                <a16:creationId xmlns:a16="http://schemas.microsoft.com/office/drawing/2014/main" id="{EAB1AAB0-4447-2007-22BE-0E59D4AB3761}"/>
+              </a:ext>
+            </a:extLst>
+          </p:cNvPr>
+          <p:cNvSpPr/>
+          <p:nvPr/>
+        </p:nvSpPr>
+        <p:spPr>
+          <a:xfrm>
+            <a:off x="6077387" y="3874295"/>
+            <a:ext cx="1983396" cy="1587012"/>
+          </a:xfrm>
+          <a:prstGeom prst="flowChartDecision">
+            <a:avLst/>
+          </a:prstGeom>
+          <a:solidFill>
+            <a:schemeClr val="accent2"/>
+          </a:solidFill>
+        </p:spPr>
+        <p:style>
+          <a:lnRef idx="2">
+            <a:schemeClr val="accent1">
+              <a:shade val="15000"/>
+            </a:schemeClr>
+          </a:lnRef>
+          <a:fillRef idx="1">
+            <a:schemeClr val="accent1"/>
+          </a:fillRef>
+          <a:effectRef idx="0">
+            <a:schemeClr val="accent1"/>
+          </a:effectRef>
+          <a:fontRef idx="minor">
+            <a:schemeClr val="lt1"/>
+          </a:fontRef>
+        </p:style>
+        <p:txBody>
+          <a:bodyPr rtlCol="0" anchor="ctr"/>
+          <a:lstStyle/>
+          <a:p>
+            <a:pPr algn="ctr"/>
+            <a:r>
+              <a:rPr lang="en-US" dirty="0"/>
+              <a:t>Has tea steeped?</a:t>
+            </a:r>
+          </a:p>
+        </p:txBody>
+      </p:sp>
+      <p:sp>
+        <p:nvSpPr>
+          <p:cNvPr id="16" name="Rectangle 15">
+            <a:extLst>
+              <a:ext uri="{FF2B5EF4-FFF2-40B4-BE49-F238E27FC236}">
+                <a16:creationId xmlns:a16="http://schemas.microsoft.com/office/drawing/2014/main" id="{93D972C1-B09C-F1BE-95E0-EF9FAEB01346}"/>
+              </a:ext>
+            </a:extLst>
+          </p:cNvPr>
+          <p:cNvSpPr/>
+          <p:nvPr/>
+        </p:nvSpPr>
+        <p:spPr>
+          <a:xfrm>
+            <a:off x="6370095" y="6025481"/>
+            <a:ext cx="1397977" cy="612711"/>
+          </a:xfrm>
+          <a:prstGeom prst="rect">
+            <a:avLst/>
+          </a:prstGeom>
+        </p:spPr>
+        <p:style>
+          <a:lnRef idx="2">
+            <a:schemeClr val="accent1">
+              <a:shade val="15000"/>
+            </a:schemeClr>
+          </a:lnRef>
+          <a:fillRef idx="1">
+            <a:schemeClr val="accent1"/>
+          </a:fillRef>
+          <a:effectRef idx="0">
+            <a:schemeClr val="accent1"/>
+          </a:effectRef>
+          <a:fontRef idx="minor">
+            <a:schemeClr val="lt1"/>
+          </a:fontRef>
+        </p:style>
+        <p:txBody>
+          <a:bodyPr rtlCol="0" anchor="ctr"/>
+          <a:lstStyle/>
+          <a:p>
+            <a:pPr algn="ctr"/>
+            <a:r>
+              <a:rPr lang="en-US" dirty="0"/>
+              <a:t>Wait 10 seconds</a:t>
+            </a:r>
+          </a:p>
+        </p:txBody>
+      </p:sp>
+      <p:sp>
+        <p:nvSpPr>
+          <p:cNvPr id="17" name="Rectangle 16">
+            <a:extLst>
+              <a:ext uri="{FF2B5EF4-FFF2-40B4-BE49-F238E27FC236}">
+                <a16:creationId xmlns:a16="http://schemas.microsoft.com/office/drawing/2014/main" id="{29DF9C24-2369-683B-6228-446F16F450FA}"/>
+              </a:ext>
+            </a:extLst>
+          </p:cNvPr>
+          <p:cNvSpPr/>
+          <p:nvPr/>
+        </p:nvSpPr>
+        <p:spPr>
+          <a:xfrm>
+            <a:off x="4513562" y="4206205"/>
+            <a:ext cx="994627" cy="923192"/>
+          </a:xfrm>
+          <a:prstGeom prst="rect">
+            <a:avLst/>
+          </a:prstGeom>
+        </p:spPr>
+        <p:style>
+          <a:lnRef idx="2">
+            <a:schemeClr val="accent1">
+              <a:shade val="15000"/>
+            </a:schemeClr>
+          </a:lnRef>
+          <a:fillRef idx="1">
+            <a:schemeClr val="accent1"/>
+          </a:fillRef>
+          <a:effectRef idx="0">
+            <a:schemeClr val="accent1"/>
+          </a:effectRef>
+          <a:fontRef idx="minor">
+            <a:schemeClr val="lt1"/>
+          </a:fontRef>
+        </p:style>
+        <p:txBody>
+          <a:bodyPr rtlCol="0" anchor="ctr"/>
+          <a:lstStyle/>
+          <a:p>
+            <a:pPr algn="ctr"/>
+            <a:r>
+              <a:rPr lang="en-US" dirty="0"/>
+              <a:t>Remove teabag</a:t>
+            </a:r>
+          </a:p>
+        </p:txBody>
+      </p:sp>
+      <p:sp>
+        <p:nvSpPr>
+          <p:cNvPr id="18" name="Rounded Rectangle 17">
+            <a:extLst>
+              <a:ext uri="{FF2B5EF4-FFF2-40B4-BE49-F238E27FC236}">
+                <a16:creationId xmlns:a16="http://schemas.microsoft.com/office/drawing/2014/main" id="{B18DE44C-B6BA-53DF-6EC1-CA9C83C7672A}"/>
+              </a:ext>
+            </a:extLst>
+          </p:cNvPr>
+          <p:cNvSpPr/>
+          <p:nvPr/>
+        </p:nvSpPr>
+        <p:spPr>
+          <a:xfrm>
+            <a:off x="752110" y="4341082"/>
+            <a:ext cx="1397977" cy="465992"/>
+          </a:xfrm>
+          <a:prstGeom prst="roundRect">
+            <a:avLst/>
+          </a:prstGeom>
+        </p:spPr>
+        <p:style>
+          <a:lnRef idx="2">
+            <a:schemeClr val="accent6"/>
+          </a:lnRef>
+          <a:fillRef idx="1">
+            <a:schemeClr val="lt1"/>
+          </a:fillRef>
+          <a:effectRef idx="0">
+            <a:schemeClr val="accent6"/>
+          </a:effectRef>
+          <a:fontRef idx="minor">
+            <a:schemeClr val="dk1"/>
+          </a:fontRef>
+        </p:style>
+        <p:txBody>
+          <a:bodyPr rtlCol="0" anchor="ctr"/>
+          <a:lstStyle/>
+          <a:p>
+            <a:pPr algn="ctr"/>
+            <a:r>
+              <a:rPr lang="en-US" dirty="0"/>
+              <a:t>Tea is made</a:t>
+            </a:r>
+          </a:p>
+        </p:txBody>
+      </p:sp>
+      <p:cxnSp>
+        <p:nvCxnSpPr>
+          <p:cNvPr id="20" name="Straight Arrow Connector 19">
+            <a:extLst>
+              <a:ext uri="{FF2B5EF4-FFF2-40B4-BE49-F238E27FC236}">
+                <a16:creationId xmlns:a16="http://schemas.microsoft.com/office/drawing/2014/main" id="{34551062-A526-7F5F-B07A-365A15F10CD8}"/>
+              </a:ext>
+            </a:extLst>
+          </p:cNvPr>
+          <p:cNvCxnSpPr>
+            <a:cxnSpLocks/>
+          </p:cNvCxnSpPr>
+          <p:nvPr/>
+        </p:nvCxnSpPr>
+        <p:spPr>
+          <a:xfrm>
+            <a:off x="2154115" y="2826727"/>
+            <a:ext cx="585057" cy="0"/>
+          </a:xfrm>
+          <a:prstGeom prst="straightConnector1">
+            <a:avLst/>
+          </a:prstGeom>
+          <a:ln w="76200">
+            <a:solidFill>
+              <a:schemeClr val="accent6"/>
+            </a:solidFill>
+            <a:tailEnd type="triangle"/>
+          </a:ln>
+        </p:spPr>
+        <p:style>
+          <a:lnRef idx="2">
+            <a:schemeClr val="accent1"/>
+          </a:lnRef>
+          <a:fillRef idx="0">
+            <a:schemeClr val="accent1"/>
+          </a:fillRef>
+          <a:effectRef idx="1">
+            <a:schemeClr val="accent1"/>
+          </a:effectRef>
+          <a:fontRef idx="minor">
+            <a:schemeClr val="tx1"/>
+          </a:fontRef>
+        </p:style>
+      </p:cxnSp>
+      <p:cxnSp>
+        <p:nvCxnSpPr>
+          <p:cNvPr id="22" name="Straight Arrow Connector 21">
+            <a:extLst>
+              <a:ext uri="{FF2B5EF4-FFF2-40B4-BE49-F238E27FC236}">
+                <a16:creationId xmlns:a16="http://schemas.microsoft.com/office/drawing/2014/main" id="{316F2114-8D03-A3E7-F4DE-5A54D38A9982}"/>
+              </a:ext>
+            </a:extLst>
+          </p:cNvPr>
+          <p:cNvCxnSpPr>
+            <a:cxnSpLocks/>
+          </p:cNvCxnSpPr>
+          <p:nvPr/>
+        </p:nvCxnSpPr>
+        <p:spPr>
+          <a:xfrm>
+            <a:off x="4088423" y="2820865"/>
+            <a:ext cx="599343" cy="0"/>
+          </a:xfrm>
+          <a:prstGeom prst="straightConnector1">
+            <a:avLst/>
+          </a:prstGeom>
+          <a:ln w="76200">
+            <a:solidFill>
+              <a:schemeClr val="accent6"/>
+            </a:solidFill>
+            <a:tailEnd type="triangle"/>
+          </a:ln>
+        </p:spPr>
+        <p:style>
+          <a:lnRef idx="2">
+            <a:schemeClr val="accent1"/>
+          </a:lnRef>
+          <a:fillRef idx="0">
+            <a:schemeClr val="accent1"/>
+          </a:fillRef>
+          <a:effectRef idx="1">
+            <a:schemeClr val="accent1"/>
+          </a:effectRef>
+          <a:fontRef idx="minor">
+            <a:schemeClr val="tx1"/>
+          </a:fontRef>
+        </p:style>
+      </p:cxnSp>
+      <p:cxnSp>
+        <p:nvCxnSpPr>
+          <p:cNvPr id="26" name="Straight Arrow Connector 25">
+            <a:extLst>
+              <a:ext uri="{FF2B5EF4-FFF2-40B4-BE49-F238E27FC236}">
+                <a16:creationId xmlns:a16="http://schemas.microsoft.com/office/drawing/2014/main" id="{F9570409-B41E-2321-459E-1B2964F01364}"/>
+              </a:ext>
+            </a:extLst>
+          </p:cNvPr>
+          <p:cNvCxnSpPr>
+            <a:cxnSpLocks/>
+          </p:cNvCxnSpPr>
+          <p:nvPr/>
+        </p:nvCxnSpPr>
+        <p:spPr>
+          <a:xfrm>
+            <a:off x="5715290" y="2820865"/>
+            <a:ext cx="599343" cy="0"/>
+          </a:xfrm>
+          <a:prstGeom prst="straightConnector1">
+            <a:avLst/>
+          </a:prstGeom>
+          <a:ln w="76200">
+            <a:solidFill>
+              <a:schemeClr val="accent6"/>
+            </a:solidFill>
+            <a:tailEnd type="triangle"/>
+          </a:ln>
+        </p:spPr>
+        <p:style>
+          <a:lnRef idx="2">
+            <a:schemeClr val="accent1"/>
+          </a:lnRef>
+          <a:fillRef idx="0">
+            <a:schemeClr val="accent1"/>
+          </a:fillRef>
+          <a:effectRef idx="1">
+            <a:schemeClr val="accent1"/>
+          </a:effectRef>
+          <a:fontRef idx="minor">
+            <a:schemeClr val="tx1"/>
+          </a:fontRef>
+        </p:style>
+      </p:cxnSp>
+      <p:cxnSp>
+        <p:nvCxnSpPr>
+          <p:cNvPr id="27" name="Straight Arrow Connector 26">
+            <a:extLst>
+              <a:ext uri="{FF2B5EF4-FFF2-40B4-BE49-F238E27FC236}">
+                <a16:creationId xmlns:a16="http://schemas.microsoft.com/office/drawing/2014/main" id="{1946BDF2-C122-B5EA-8B03-FB84999CE96F}"/>
+              </a:ext>
+            </a:extLst>
+          </p:cNvPr>
+          <p:cNvCxnSpPr>
+            <a:cxnSpLocks/>
+          </p:cNvCxnSpPr>
+          <p:nvPr/>
+        </p:nvCxnSpPr>
+        <p:spPr>
+          <a:xfrm>
+            <a:off x="7656047" y="2820865"/>
+            <a:ext cx="599343" cy="0"/>
+          </a:xfrm>
+          <a:prstGeom prst="straightConnector1">
+            <a:avLst/>
+          </a:prstGeom>
+          <a:ln w="76200">
+            <a:solidFill>
+              <a:schemeClr val="accent6"/>
+            </a:solidFill>
+            <a:tailEnd type="triangle"/>
+          </a:ln>
+        </p:spPr>
+        <p:style>
+          <a:lnRef idx="2">
+            <a:schemeClr val="accent1"/>
+          </a:lnRef>
+          <a:fillRef idx="0">
+            <a:schemeClr val="accent1"/>
+          </a:fillRef>
+          <a:effectRef idx="1">
+            <a:schemeClr val="accent1"/>
+          </a:effectRef>
+          <a:fontRef idx="minor">
+            <a:schemeClr val="tx1"/>
+          </a:fontRef>
+        </p:style>
+      </p:cxnSp>
+      <p:cxnSp>
+        <p:nvCxnSpPr>
+          <p:cNvPr id="28" name="Straight Arrow Connector 27">
+            <a:extLst>
+              <a:ext uri="{FF2B5EF4-FFF2-40B4-BE49-F238E27FC236}">
+                <a16:creationId xmlns:a16="http://schemas.microsoft.com/office/drawing/2014/main" id="{C15A48CF-B21F-5AFB-CD47-B47E419CA92C}"/>
+              </a:ext>
+            </a:extLst>
+          </p:cNvPr>
+          <p:cNvCxnSpPr>
+            <a:cxnSpLocks/>
+          </p:cNvCxnSpPr>
+          <p:nvPr/>
+        </p:nvCxnSpPr>
+        <p:spPr>
+          <a:xfrm>
+            <a:off x="10055468" y="2820865"/>
+            <a:ext cx="599343" cy="0"/>
+          </a:xfrm>
+          <a:prstGeom prst="straightConnector1">
+            <a:avLst/>
+          </a:prstGeom>
+          <a:ln w="76200">
+            <a:solidFill>
+              <a:schemeClr val="accent6"/>
+            </a:solidFill>
+            <a:tailEnd type="triangle"/>
+          </a:ln>
+        </p:spPr>
+        <p:style>
+          <a:lnRef idx="2">
+            <a:schemeClr val="accent1"/>
+          </a:lnRef>
+          <a:fillRef idx="0">
+            <a:schemeClr val="accent1"/>
+          </a:fillRef>
+          <a:effectRef idx="1">
+            <a:schemeClr val="accent1"/>
+          </a:effectRef>
+          <a:fontRef idx="minor">
+            <a:schemeClr val="tx1"/>
+          </a:fontRef>
+        </p:style>
+      </p:cxnSp>
+      <p:cxnSp>
+        <p:nvCxnSpPr>
+          <p:cNvPr id="29" name="Straight Arrow Connector 28">
+            <a:extLst>
+              <a:ext uri="{FF2B5EF4-FFF2-40B4-BE49-F238E27FC236}">
+                <a16:creationId xmlns:a16="http://schemas.microsoft.com/office/drawing/2014/main" id="{6EAF4841-07A0-A92D-63FF-D490F7B58887}"/>
+              </a:ext>
+            </a:extLst>
+          </p:cNvPr>
+          <p:cNvCxnSpPr>
+            <a:cxnSpLocks/>
+          </p:cNvCxnSpPr>
+          <p:nvPr/>
+        </p:nvCxnSpPr>
+        <p:spPr>
+          <a:xfrm>
+            <a:off x="9139600" y="1469598"/>
+            <a:ext cx="0" cy="442180"/>
+          </a:xfrm>
+          <a:prstGeom prst="straightConnector1">
+            <a:avLst/>
+          </a:prstGeom>
+          <a:ln w="76200">
+            <a:solidFill>
+              <a:schemeClr val="accent6"/>
+            </a:solidFill>
+            <a:tailEnd type="triangle"/>
+          </a:ln>
+        </p:spPr>
+        <p:style>
+          <a:lnRef idx="2">
+            <a:schemeClr val="accent1"/>
+          </a:lnRef>
+          <a:fillRef idx="0">
+            <a:schemeClr val="accent1"/>
+          </a:fillRef>
+          <a:effectRef idx="1">
+            <a:schemeClr val="accent1"/>
+          </a:effectRef>
+          <a:fontRef idx="minor">
+            <a:schemeClr val="tx1"/>
+          </a:fontRef>
+        </p:style>
+      </p:cxnSp>
+      <p:cxnSp>
+        <p:nvCxnSpPr>
+          <p:cNvPr id="31" name="Straight Arrow Connector 30">
+            <a:extLst>
+              <a:ext uri="{FF2B5EF4-FFF2-40B4-BE49-F238E27FC236}">
+                <a16:creationId xmlns:a16="http://schemas.microsoft.com/office/drawing/2014/main" id="{807AA584-FA03-39FE-14E0-33C6017CD827}"/>
+              </a:ext>
+            </a:extLst>
+          </p:cNvPr>
+          <p:cNvCxnSpPr>
+            <a:cxnSpLocks/>
+          </p:cNvCxnSpPr>
+          <p:nvPr/>
+        </p:nvCxnSpPr>
+        <p:spPr>
+          <a:xfrm>
+            <a:off x="9127294" y="3653205"/>
+            <a:ext cx="0" cy="442180"/>
+          </a:xfrm>
+          <a:prstGeom prst="straightConnector1">
+            <a:avLst/>
+          </a:prstGeom>
+          <a:ln w="76200">
+            <a:solidFill>
+              <a:schemeClr val="accent6"/>
+            </a:solidFill>
+            <a:tailEnd type="triangle"/>
+          </a:ln>
+        </p:spPr>
+        <p:style>
+          <a:lnRef idx="2">
+            <a:schemeClr val="accent1"/>
+          </a:lnRef>
+          <a:fillRef idx="0">
+            <a:schemeClr val="accent1"/>
+          </a:fillRef>
+          <a:effectRef idx="1">
+            <a:schemeClr val="accent1"/>
+          </a:effectRef>
+          <a:fontRef idx="minor">
+            <a:schemeClr val="tx1"/>
+          </a:fontRef>
+        </p:style>
+      </p:cxnSp>
+      <p:cxnSp>
+        <p:nvCxnSpPr>
+          <p:cNvPr id="32" name="Straight Arrow Connector 31">
+            <a:extLst>
+              <a:ext uri="{FF2B5EF4-FFF2-40B4-BE49-F238E27FC236}">
+                <a16:creationId xmlns:a16="http://schemas.microsoft.com/office/drawing/2014/main" id="{D134B90F-23D1-0B25-B395-A1AC0251A44A}"/>
+              </a:ext>
+            </a:extLst>
+          </p:cNvPr>
+          <p:cNvCxnSpPr>
+            <a:cxnSpLocks/>
+          </p:cNvCxnSpPr>
+          <p:nvPr/>
+        </p:nvCxnSpPr>
+        <p:spPr>
+          <a:xfrm>
+            <a:off x="7069084" y="5494277"/>
+            <a:ext cx="0" cy="442180"/>
+          </a:xfrm>
+          <a:prstGeom prst="straightConnector1">
+            <a:avLst/>
+          </a:prstGeom>
+          <a:ln w="76200">
+            <a:solidFill>
+              <a:schemeClr val="accent6"/>
+            </a:solidFill>
+            <a:tailEnd type="triangle"/>
+          </a:ln>
+        </p:spPr>
+        <p:style>
+          <a:lnRef idx="2">
+            <a:schemeClr val="accent1"/>
+          </a:lnRef>
+          <a:fillRef idx="0">
+            <a:schemeClr val="accent1"/>
+          </a:fillRef>
+          <a:effectRef idx="1">
+            <a:schemeClr val="accent1"/>
+          </a:effectRef>
+          <a:fontRef idx="minor">
+            <a:schemeClr val="tx1"/>
+          </a:fontRef>
+        </p:style>
+      </p:cxnSp>
+      <p:cxnSp>
+        <p:nvCxnSpPr>
+          <p:cNvPr id="33" name="Straight Arrow Connector 32">
+            <a:extLst>
+              <a:ext uri="{FF2B5EF4-FFF2-40B4-BE49-F238E27FC236}">
+                <a16:creationId xmlns:a16="http://schemas.microsoft.com/office/drawing/2014/main" id="{4AB84D02-A7A2-D07F-2AAE-13DD39F3B271}"/>
+              </a:ext>
+            </a:extLst>
+          </p:cNvPr>
+          <p:cNvCxnSpPr>
+            <a:cxnSpLocks/>
+          </p:cNvCxnSpPr>
+          <p:nvPr/>
+        </p:nvCxnSpPr>
+        <p:spPr>
+          <a:xfrm flipH="1">
+            <a:off x="5607515" y="4667801"/>
+            <a:ext cx="407446" cy="0"/>
+          </a:xfrm>
+          <a:prstGeom prst="straightConnector1">
+            <a:avLst/>
+          </a:prstGeom>
+          <a:ln w="76200">
+            <a:solidFill>
+              <a:schemeClr val="accent6"/>
+            </a:solidFill>
+            <a:tailEnd type="triangle"/>
+          </a:ln>
+        </p:spPr>
+        <p:style>
+          <a:lnRef idx="2">
+            <a:schemeClr val="accent1"/>
+          </a:lnRef>
+          <a:fillRef idx="0">
+            <a:schemeClr val="accent1"/>
+          </a:fillRef>
+          <a:effectRef idx="1">
+            <a:schemeClr val="accent1"/>
+          </a:effectRef>
+          <a:fontRef idx="minor">
+            <a:schemeClr val="tx1"/>
+          </a:fontRef>
+        </p:style>
+      </p:cxnSp>
+      <p:cxnSp>
+        <p:nvCxnSpPr>
+          <p:cNvPr id="36" name="Straight Arrow Connector 35">
+            <a:extLst>
+              <a:ext uri="{FF2B5EF4-FFF2-40B4-BE49-F238E27FC236}">
+                <a16:creationId xmlns:a16="http://schemas.microsoft.com/office/drawing/2014/main" id="{C91877BD-4655-E742-1E3A-8BAFB5441D9F}"/>
+              </a:ext>
+            </a:extLst>
+          </p:cNvPr>
+          <p:cNvCxnSpPr>
+            <a:cxnSpLocks/>
+          </p:cNvCxnSpPr>
+          <p:nvPr/>
+        </p:nvCxnSpPr>
+        <p:spPr>
+          <a:xfrm flipH="1">
+            <a:off x="3980648" y="4616007"/>
+            <a:ext cx="407446" cy="0"/>
+          </a:xfrm>
+          <a:prstGeom prst="straightConnector1">
+            <a:avLst/>
+          </a:prstGeom>
+          <a:ln w="76200">
+            <a:solidFill>
+              <a:schemeClr val="accent6"/>
+            </a:solidFill>
+            <a:tailEnd type="triangle"/>
+          </a:ln>
+        </p:spPr>
+        <p:style>
+          <a:lnRef idx="2">
+            <a:schemeClr val="accent1"/>
+          </a:lnRef>
+          <a:fillRef idx="0">
+            <a:schemeClr val="accent1"/>
+          </a:fillRef>
+          <a:effectRef idx="1">
+            <a:schemeClr val="accent1"/>
+          </a:effectRef>
+          <a:fontRef idx="minor">
+            <a:schemeClr val="tx1"/>
+          </a:fontRef>
+        </p:style>
+      </p:cxnSp>
+      <p:cxnSp>
+        <p:nvCxnSpPr>
+          <p:cNvPr id="37" name="Straight Arrow Connector 36">
+            <a:extLst>
+              <a:ext uri="{FF2B5EF4-FFF2-40B4-BE49-F238E27FC236}">
+                <a16:creationId xmlns:a16="http://schemas.microsoft.com/office/drawing/2014/main" id="{FB86D970-3DE9-1C40-4F8F-57223C6BD2C9}"/>
+              </a:ext>
+            </a:extLst>
+          </p:cNvPr>
+          <p:cNvCxnSpPr>
+            <a:cxnSpLocks/>
+          </p:cNvCxnSpPr>
+          <p:nvPr/>
+        </p:nvCxnSpPr>
+        <p:spPr>
+          <a:xfrm flipH="1">
+            <a:off x="2254166" y="4574078"/>
+            <a:ext cx="407446" cy="0"/>
+          </a:xfrm>
+          <a:prstGeom prst="straightConnector1">
+            <a:avLst/>
+          </a:prstGeom>
+          <a:ln w="76200">
+            <a:solidFill>
+              <a:schemeClr val="accent6"/>
+            </a:solidFill>
+            <a:tailEnd type="triangle"/>
+          </a:ln>
+        </p:spPr>
+        <p:style>
+          <a:lnRef idx="2">
+            <a:schemeClr val="accent1"/>
+          </a:lnRef>
+          <a:fillRef idx="0">
+            <a:schemeClr val="accent1"/>
+          </a:fillRef>
+          <a:effectRef idx="1">
+            <a:schemeClr val="accent1"/>
+          </a:effectRef>
+          <a:fontRef idx="minor">
+            <a:schemeClr val="tx1"/>
+          </a:fontRef>
+        </p:style>
+      </p:cxnSp>
+      <p:cxnSp>
+        <p:nvCxnSpPr>
+          <p:cNvPr id="39" name="Straight Connector 38">
+            <a:extLst>
+              <a:ext uri="{FF2B5EF4-FFF2-40B4-BE49-F238E27FC236}">
+                <a16:creationId xmlns:a16="http://schemas.microsoft.com/office/drawing/2014/main" id="{23D123E2-82BB-0CF2-CD64-17F392C554BD}"/>
+              </a:ext>
+            </a:extLst>
+          </p:cNvPr>
+          <p:cNvCxnSpPr>
+            <a:cxnSpLocks/>
+          </p:cNvCxnSpPr>
+          <p:nvPr/>
+        </p:nvCxnSpPr>
+        <p:spPr>
+          <a:xfrm flipV="1">
+            <a:off x="11267710" y="1469598"/>
+            <a:ext cx="0" cy="802665"/>
+          </a:xfrm>
+          <a:prstGeom prst="line">
+            <a:avLst/>
+          </a:prstGeom>
+          <a:ln w="76200">
+            <a:solidFill>
+              <a:schemeClr val="accent6"/>
+            </a:solidFill>
+          </a:ln>
+        </p:spPr>
+        <p:style>
+          <a:lnRef idx="2">
+            <a:schemeClr val="accent1"/>
+          </a:lnRef>
+          <a:fillRef idx="0">
+            <a:schemeClr val="accent1"/>
+          </a:fillRef>
+          <a:effectRef idx="1">
+            <a:schemeClr val="accent1"/>
+          </a:effectRef>
+          <a:fontRef idx="minor">
+            <a:schemeClr val="tx1"/>
+          </a:fontRef>
+        </p:style>
+      </p:cxnSp>
+      <p:cxnSp>
+        <p:nvCxnSpPr>
+          <p:cNvPr id="41" name="Straight Connector 40">
+            <a:extLst>
+              <a:ext uri="{FF2B5EF4-FFF2-40B4-BE49-F238E27FC236}">
+                <a16:creationId xmlns:a16="http://schemas.microsoft.com/office/drawing/2014/main" id="{69302D18-CD1D-2814-8CDD-390E25F81AC4}"/>
+              </a:ext>
+            </a:extLst>
+          </p:cNvPr>
+          <p:cNvCxnSpPr>
+            <a:cxnSpLocks/>
+          </p:cNvCxnSpPr>
+          <p:nvPr/>
+        </p:nvCxnSpPr>
+        <p:spPr>
+          <a:xfrm>
+            <a:off x="9127294" y="1501472"/>
+            <a:ext cx="2140416" cy="0"/>
+          </a:xfrm>
+          <a:prstGeom prst="line">
+            <a:avLst/>
+          </a:prstGeom>
+          <a:ln w="76200">
+            <a:solidFill>
+              <a:schemeClr val="accent6"/>
+            </a:solidFill>
+          </a:ln>
+        </p:spPr>
+        <p:style>
+          <a:lnRef idx="2">
+            <a:schemeClr val="accent1"/>
+          </a:lnRef>
+          <a:fillRef idx="0">
+            <a:schemeClr val="accent1"/>
+          </a:fillRef>
+          <a:effectRef idx="1">
+            <a:schemeClr val="accent1"/>
+          </a:effectRef>
+          <a:fontRef idx="minor">
+            <a:schemeClr val="tx1"/>
+          </a:fontRef>
+        </p:style>
+      </p:cxnSp>
+      <p:cxnSp>
+        <p:nvCxnSpPr>
+          <p:cNvPr id="45" name="Straight Arrow Connector 44">
+            <a:extLst>
+              <a:ext uri="{FF2B5EF4-FFF2-40B4-BE49-F238E27FC236}">
+                <a16:creationId xmlns:a16="http://schemas.microsoft.com/office/drawing/2014/main" id="{4FE03817-AE61-5242-F6BA-47F958ACE063}"/>
+              </a:ext>
+            </a:extLst>
+          </p:cNvPr>
+          <p:cNvCxnSpPr>
+            <a:cxnSpLocks/>
+          </p:cNvCxnSpPr>
+          <p:nvPr/>
+        </p:nvCxnSpPr>
+        <p:spPr>
+          <a:xfrm flipH="1">
+            <a:off x="8118365" y="4667801"/>
+            <a:ext cx="437055" cy="0"/>
+          </a:xfrm>
+          <a:prstGeom prst="straightConnector1">
+            <a:avLst/>
+          </a:prstGeom>
+          <a:ln w="76200">
+            <a:solidFill>
+              <a:schemeClr val="accent6"/>
+            </a:solidFill>
+            <a:tailEnd type="triangle"/>
+          </a:ln>
+        </p:spPr>
+        <p:style>
+          <a:lnRef idx="2">
+            <a:schemeClr val="accent1"/>
+          </a:lnRef>
+          <a:fillRef idx="0">
+            <a:schemeClr val="accent1"/>
+          </a:fillRef>
+          <a:effectRef idx="1">
+            <a:schemeClr val="accent1"/>
+          </a:effectRef>
+          <a:fontRef idx="minor">
+            <a:schemeClr val="tx1"/>
+          </a:fontRef>
+        </p:style>
+      </p:cxnSp>
+      <p:cxnSp>
+        <p:nvCxnSpPr>
+          <p:cNvPr id="50" name="Straight Connector 49">
+            <a:extLst>
+              <a:ext uri="{FF2B5EF4-FFF2-40B4-BE49-F238E27FC236}">
+                <a16:creationId xmlns:a16="http://schemas.microsoft.com/office/drawing/2014/main" id="{6A4625DB-25B5-D432-2952-CCF6F842F117}"/>
+              </a:ext>
+            </a:extLst>
+          </p:cNvPr>
+          <p:cNvCxnSpPr>
+            <a:cxnSpLocks/>
+          </p:cNvCxnSpPr>
+          <p:nvPr/>
+        </p:nvCxnSpPr>
+        <p:spPr>
+          <a:xfrm>
+            <a:off x="7800962" y="6342730"/>
+            <a:ext cx="519642" cy="0"/>
+          </a:xfrm>
+          <a:prstGeom prst="line">
+            <a:avLst/>
+          </a:prstGeom>
+          <a:ln w="76200">
+            <a:solidFill>
+              <a:schemeClr val="accent6"/>
+            </a:solidFill>
+          </a:ln>
+        </p:spPr>
+        <p:style>
+          <a:lnRef idx="2">
+            <a:schemeClr val="accent1"/>
+          </a:lnRef>
+          <a:fillRef idx="0">
+            <a:schemeClr val="accent1"/>
+          </a:fillRef>
+          <a:effectRef idx="1">
+            <a:schemeClr val="accent1"/>
+          </a:effectRef>
+          <a:fontRef idx="minor">
+            <a:schemeClr val="tx1"/>
+          </a:fontRef>
+        </p:style>
+      </p:cxnSp>
+      <p:cxnSp>
+        <p:nvCxnSpPr>
+          <p:cNvPr id="52" name="Straight Arrow Connector 51">
+            <a:extLst>
+              <a:ext uri="{FF2B5EF4-FFF2-40B4-BE49-F238E27FC236}">
+                <a16:creationId xmlns:a16="http://schemas.microsoft.com/office/drawing/2014/main" id="{B4AB78D4-3236-69C1-03B9-859BF42104B5}"/>
+              </a:ext>
+            </a:extLst>
+          </p:cNvPr>
+          <p:cNvCxnSpPr>
+            <a:cxnSpLocks/>
+          </p:cNvCxnSpPr>
+          <p:nvPr/>
+        </p:nvCxnSpPr>
+        <p:spPr>
+          <a:xfrm flipH="1" flipV="1">
+            <a:off x="7599776" y="5128340"/>
+            <a:ext cx="712658" cy="1214390"/>
+          </a:xfrm>
+          <a:prstGeom prst="straightConnector1">
+            <a:avLst/>
+          </a:prstGeom>
+          <a:ln w="76200">
+            <a:solidFill>
+              <a:schemeClr val="accent6"/>
+            </a:solidFill>
+            <a:tailEnd type="triangle"/>
+          </a:ln>
+        </p:spPr>
+        <p:style>
+          <a:lnRef idx="2">
+            <a:schemeClr val="accent1"/>
+          </a:lnRef>
+          <a:fillRef idx="0">
+            <a:schemeClr val="accent1"/>
+          </a:fillRef>
+          <a:effectRef idx="1">
+            <a:schemeClr val="accent1"/>
+          </a:effectRef>
+          <a:fontRef idx="minor">
+            <a:schemeClr val="tx1"/>
+          </a:fontRef>
+        </p:style>
+      </p:cxnSp>
+      <p:sp>
+        <p:nvSpPr>
+          <p:cNvPr id="7" name="TextBox 6">
+            <a:extLst>
+              <a:ext uri="{FF2B5EF4-FFF2-40B4-BE49-F238E27FC236}">
+                <a16:creationId xmlns:a16="http://schemas.microsoft.com/office/drawing/2014/main" id="{A8CA58A2-57E6-1C23-31E1-64FC8322B906}"/>
+              </a:ext>
+            </a:extLst>
+          </p:cNvPr>
+          <p:cNvSpPr txBox="1"/>
+          <p:nvPr/>
+        </p:nvSpPr>
+        <p:spPr>
+          <a:xfrm>
+            <a:off x="10055467" y="2354933"/>
+            <a:ext cx="525195" cy="369332"/>
+          </a:xfrm>
+          <a:prstGeom prst="rect">
+            <a:avLst/>
+          </a:prstGeom>
+          <a:noFill/>
+        </p:spPr>
+        <p:txBody>
+          <a:bodyPr wrap="square" rtlCol="0">
+            <a:spAutoFit/>
+          </a:bodyPr>
+          <a:lstStyle/>
+          <a:p>
+            <a:r>
+              <a:rPr lang="en-US" dirty="0"/>
+              <a:t>No</a:t>
+            </a:r>
+          </a:p>
+        </p:txBody>
+      </p:sp>
+      <p:sp>
+        <p:nvSpPr>
+          <p:cNvPr id="8" name="TextBox 7">
+            <a:extLst>
+              <a:ext uri="{FF2B5EF4-FFF2-40B4-BE49-F238E27FC236}">
+                <a16:creationId xmlns:a16="http://schemas.microsoft.com/office/drawing/2014/main" id="{9F324D12-2DCC-FF37-DAFF-865980FACEDC}"/>
+              </a:ext>
+            </a:extLst>
+          </p:cNvPr>
+          <p:cNvSpPr txBox="1"/>
+          <p:nvPr/>
+        </p:nvSpPr>
+        <p:spPr>
+          <a:xfrm>
+            <a:off x="9301087" y="3647954"/>
+            <a:ext cx="525195" cy="369332"/>
+          </a:xfrm>
+          <a:prstGeom prst="rect">
+            <a:avLst/>
+          </a:prstGeom>
+          <a:noFill/>
+        </p:spPr>
+        <p:txBody>
+          <a:bodyPr wrap="square" rtlCol="0">
+            <a:spAutoFit/>
+          </a:bodyPr>
+          <a:lstStyle/>
+          <a:p>
+            <a:r>
+              <a:rPr lang="en-US" dirty="0"/>
+              <a:t>Yes</a:t>
+            </a:r>
+          </a:p>
+        </p:txBody>
+      </p:sp>
+      <p:sp>
+        <p:nvSpPr>
+          <p:cNvPr id="14" name="TextBox 13">
+            <a:extLst>
+              <a:ext uri="{FF2B5EF4-FFF2-40B4-BE49-F238E27FC236}">
+                <a16:creationId xmlns:a16="http://schemas.microsoft.com/office/drawing/2014/main" id="{891591C2-63D0-B84C-82A1-37702FA8A259}"/>
+              </a:ext>
+            </a:extLst>
+          </p:cNvPr>
+          <p:cNvSpPr txBox="1"/>
+          <p:nvPr/>
+        </p:nvSpPr>
+        <p:spPr>
+          <a:xfrm>
+            <a:off x="6516125" y="5486769"/>
+            <a:ext cx="597145" cy="369332"/>
+          </a:xfrm>
+          <a:prstGeom prst="rect">
+            <a:avLst/>
+          </a:prstGeom>
+          <a:noFill/>
+        </p:spPr>
+        <p:txBody>
+          <a:bodyPr wrap="square" rtlCol="0">
+            <a:spAutoFit/>
+          </a:bodyPr>
+          <a:lstStyle/>
+          <a:p>
+            <a:r>
+              <a:rPr lang="en-US" dirty="0"/>
+              <a:t>No</a:t>
+            </a:r>
+          </a:p>
+        </p:txBody>
+      </p:sp>
+      <p:sp>
+        <p:nvSpPr>
+          <p:cNvPr id="19" name="TextBox 18">
+            <a:extLst>
+              <a:ext uri="{FF2B5EF4-FFF2-40B4-BE49-F238E27FC236}">
+                <a16:creationId xmlns:a16="http://schemas.microsoft.com/office/drawing/2014/main" id="{34D6230D-4C37-FD7A-8E1B-EAB4FA1CFF4D}"/>
+              </a:ext>
+            </a:extLst>
+          </p:cNvPr>
+          <p:cNvSpPr txBox="1"/>
+          <p:nvPr/>
+        </p:nvSpPr>
+        <p:spPr>
+          <a:xfrm>
+            <a:off x="5616590" y="4204746"/>
+            <a:ext cx="525195" cy="369332"/>
+          </a:xfrm>
+          <a:prstGeom prst="rect">
+            <a:avLst/>
+          </a:prstGeom>
+          <a:noFill/>
+        </p:spPr>
+        <p:txBody>
+          <a:bodyPr wrap="square" rtlCol="0">
+            <a:spAutoFit/>
+          </a:bodyPr>
+          <a:lstStyle/>
+          <a:p>
+            <a:r>
+              <a:rPr lang="en-US" dirty="0"/>
+              <a:t>Yes</a:t>
+            </a:r>
+          </a:p>
+        </p:txBody>
+      </p:sp>
+    </p:spTree>
+    <p:extLst>
+      <p:ext uri="{BB962C8B-B14F-4D97-AF65-F5344CB8AC3E}">
+        <p14:creationId xmlns:p14="http://schemas.microsoft.com/office/powerpoint/2010/main" val="704847650"/>
       </p:ext>
     </p:extLst>
   </p:cSld>
